--- a/Aurkezpena/1.Erronka Aurkezpena.pptx
+++ b/Aurkezpena/1.Erronka Aurkezpena.pptx
@@ -10,6 +10,8 @@
     <p:sldId id="258" r:id="rId4"/>
     <p:sldId id="259" r:id="rId5"/>
     <p:sldId id="260" r:id="rId6"/>
+    <p:sldId id="261" r:id="rId7"/>
+    <p:sldId id="263" r:id="rId8"/>
   </p:sldIdLst>
   <p:sldSz cx="12192000" cy="6858000"/>
   <p:notesSz cx="6858000" cy="9144000"/>
@@ -6392,7 +6394,7 @@
         <p:spPr>
           <a:xfrm>
             <a:off x="1154953" y="1007807"/>
-            <a:ext cx="7261460" cy="467032"/>
+            <a:ext cx="7261460" cy="997974"/>
           </a:xfrm>
         </p:spPr>
         <p:txBody>
@@ -6400,8 +6402,8 @@
           <a:lstStyle/>
           <a:p>
             <a:r>
-              <a:rPr lang="eu-ES" noProof="0" dirty="0"/>
-              <a:t>Produkzio-sektoreei aplikatutako digitalizazioa</a:t>
+              <a:rPr lang="eu-ES" sz="3200" noProof="0" dirty="0"/>
+              <a:t>PRODUKZIO-SEKTOREEI APLIKATUTAKO DIGITALIZAZIOA</a:t>
             </a:r>
           </a:p>
         </p:txBody>
@@ -6513,7 +6515,7 @@
         </p:blipFill>
         <p:spPr>
           <a:xfrm>
-            <a:off x="1195583" y="3374758"/>
+            <a:off x="1154953" y="3429000"/>
             <a:ext cx="2844800" cy="1600200"/>
           </a:xfrm>
           <a:prstGeom prst="rect">
@@ -6864,6 +6866,181 @@
     <p:extLst>
       <p:ext uri="{BB962C8B-B14F-4D97-AF65-F5344CB8AC3E}">
         <p14:creationId xmlns:p14="http://schemas.microsoft.com/office/powerpoint/2010/main" val="2172799081"/>
+      </p:ext>
+    </p:extLst>
+  </p:cSld>
+  <p:clrMapOvr>
+    <a:masterClrMapping/>
+  </p:clrMapOvr>
+</p:sld>
+</file>
+
+<file path=ppt/slides/slide6.xml><?xml version="1.0" encoding="utf-8"?>
+<p:sld xmlns:a="http://schemas.openxmlformats.org/drawingml/2006/main" xmlns:r="http://schemas.openxmlformats.org/officeDocument/2006/relationships" xmlns:p="http://schemas.openxmlformats.org/presentationml/2006/main">
+  <p:cSld>
+    <p:spTree>
+      <p:nvGrpSpPr>
+        <p:cNvPr id="1" name="">
+          <a:extLst>
+            <a:ext uri="{FF2B5EF4-FFF2-40B4-BE49-F238E27FC236}">
+              <a16:creationId xmlns:a16="http://schemas.microsoft.com/office/drawing/2014/main" id="{1B380320-EE7F-BF03-E94C-B5447D0A71CA}"/>
+            </a:ext>
+          </a:extLst>
+        </p:cNvPr>
+        <p:cNvGrpSpPr/>
+        <p:nvPr/>
+      </p:nvGrpSpPr>
+      <p:grpSpPr>
+        <a:xfrm>
+          <a:off x="0" y="0"/>
+          <a:ext cx="0" cy="0"/>
+          <a:chOff x="0" y="0"/>
+          <a:chExt cx="0" cy="0"/>
+        </a:xfrm>
+      </p:grpSpPr>
+      <p:sp>
+        <p:nvSpPr>
+          <p:cNvPr id="2" name="Título 1">
+            <a:extLst>
+              <a:ext uri="{FF2B5EF4-FFF2-40B4-BE49-F238E27FC236}">
+                <a16:creationId xmlns:a16="http://schemas.microsoft.com/office/drawing/2014/main" id="{F394B38B-AAF1-E004-9A26-4271476AF004}"/>
+              </a:ext>
+            </a:extLst>
+          </p:cNvPr>
+          <p:cNvSpPr>
+            <a:spLocks noGrp="1"/>
+          </p:cNvSpPr>
+          <p:nvPr>
+            <p:ph type="ctrTitle"/>
+          </p:nvPr>
+        </p:nvSpPr>
+        <p:spPr/>
+        <p:txBody>
+          <a:bodyPr/>
+          <a:lstStyle/>
+          <a:p>
+            <a:r>
+              <a:rPr lang="eu-ES" dirty="0"/>
+              <a:t>Sistema Eragileak Ezartzea</a:t>
+            </a:r>
+            <a:endParaRPr lang="eu-ES" noProof="0" dirty="0"/>
+          </a:p>
+        </p:txBody>
+      </p:sp>
+    </p:spTree>
+    <p:extLst>
+      <p:ext uri="{BB962C8B-B14F-4D97-AF65-F5344CB8AC3E}">
+        <p14:creationId xmlns:p14="http://schemas.microsoft.com/office/powerpoint/2010/main" val="4071827309"/>
+      </p:ext>
+    </p:extLst>
+  </p:cSld>
+  <p:clrMapOvr>
+    <a:masterClrMapping/>
+  </p:clrMapOvr>
+</p:sld>
+</file>
+
+<file path=ppt/slides/slide7.xml><?xml version="1.0" encoding="utf-8"?>
+<p:sld xmlns:a="http://schemas.openxmlformats.org/drawingml/2006/main" xmlns:r="http://schemas.openxmlformats.org/officeDocument/2006/relationships" xmlns:p="http://schemas.openxmlformats.org/presentationml/2006/main">
+  <p:cSld>
+    <p:spTree>
+      <p:nvGrpSpPr>
+        <p:cNvPr id="1" name="">
+          <a:extLst>
+            <a:ext uri="{FF2B5EF4-FFF2-40B4-BE49-F238E27FC236}">
+              <a16:creationId xmlns:a16="http://schemas.microsoft.com/office/drawing/2014/main" id="{421B3075-3C96-ABD1-3100-00103A0FD6DC}"/>
+            </a:ext>
+          </a:extLst>
+        </p:cNvPr>
+        <p:cNvGrpSpPr/>
+        <p:nvPr/>
+      </p:nvGrpSpPr>
+      <p:grpSpPr>
+        <a:xfrm>
+          <a:off x="0" y="0"/>
+          <a:ext cx="0" cy="0"/>
+          <a:chOff x="0" y="0"/>
+          <a:chExt cx="0" cy="0"/>
+        </a:xfrm>
+      </p:grpSpPr>
+      <p:sp>
+        <p:nvSpPr>
+          <p:cNvPr id="2" name="Título 1">
+            <a:extLst>
+              <a:ext uri="{FF2B5EF4-FFF2-40B4-BE49-F238E27FC236}">
+                <a16:creationId xmlns:a16="http://schemas.microsoft.com/office/drawing/2014/main" id="{53B95E81-C2BF-EF5D-11C6-D677431FC6B5}"/>
+              </a:ext>
+            </a:extLst>
+          </p:cNvPr>
+          <p:cNvSpPr>
+            <a:spLocks noGrp="1"/>
+          </p:cNvSpPr>
+          <p:nvPr>
+            <p:ph type="title"/>
+          </p:nvPr>
+        </p:nvSpPr>
+        <p:spPr>
+          <a:xfrm>
+            <a:off x="1154953" y="1007807"/>
+            <a:ext cx="7261460" cy="997974"/>
+          </a:xfrm>
+        </p:spPr>
+        <p:txBody>
+          <a:bodyPr/>
+          <a:lstStyle/>
+          <a:p>
+            <a:r>
+              <a:rPr lang="eu-ES" sz="3200" dirty="0"/>
+              <a:t>SISTEMA ERAGILEAK EZARTZEA</a:t>
+            </a:r>
+            <a:endParaRPr lang="eu-ES" sz="3200" noProof="0" dirty="0"/>
+          </a:p>
+        </p:txBody>
+      </p:sp>
+      <p:sp>
+        <p:nvSpPr>
+          <p:cNvPr id="3" name="Marcador de contenido 2">
+            <a:extLst>
+              <a:ext uri="{FF2B5EF4-FFF2-40B4-BE49-F238E27FC236}">
+                <a16:creationId xmlns:a16="http://schemas.microsoft.com/office/drawing/2014/main" id="{F2AA8D19-9F92-99BA-8F76-51E8481BF80C}"/>
+              </a:ext>
+            </a:extLst>
+          </p:cNvPr>
+          <p:cNvSpPr>
+            <a:spLocks noGrp="1"/>
+          </p:cNvSpPr>
+          <p:nvPr>
+            <p:ph idx="1"/>
+          </p:nvPr>
+        </p:nvSpPr>
+        <p:spPr>
+          <a:xfrm>
+            <a:off x="1154953" y="2357120"/>
+            <a:ext cx="5195997" cy="2003323"/>
+          </a:xfrm>
+        </p:spPr>
+        <p:txBody>
+          <a:bodyPr/>
+          <a:lstStyle/>
+          <a:p>
+            <a:pPr marL="0" indent="0">
+              <a:buNone/>
+            </a:pPr>
+            <a:r>
+              <a:rPr lang="eu-ES" b="1" noProof="0" dirty="0"/>
+              <a:t>Zertarako?</a:t>
+            </a:r>
+            <a:r>
+              <a:rPr lang="eu-ES" noProof="0" dirty="0"/>
+              <a:t> Guztiok sarean modu txukunean eta antolatuan lan egiteko, erronkako helburuak taldeari garbi adierazteko eta gure lana (dokumentazioa) publikatzeko.</a:t>
+            </a:r>
+          </a:p>
+        </p:txBody>
+      </p:sp>
+    </p:spTree>
+    <p:extLst>
+      <p:ext uri="{BB962C8B-B14F-4D97-AF65-F5344CB8AC3E}">
+        <p14:creationId xmlns:p14="http://schemas.microsoft.com/office/powerpoint/2010/main" val="1850726310"/>
       </p:ext>
     </p:extLst>
   </p:cSld>

--- a/Aurkezpena/1.Erronka Aurkezpena.pptx
+++ b/Aurkezpena/1.Erronka Aurkezpena.pptx
@@ -12,6 +12,15 @@
     <p:sldId id="260" r:id="rId6"/>
     <p:sldId id="261" r:id="rId7"/>
     <p:sldId id="263" r:id="rId8"/>
+    <p:sldId id="264" r:id="rId9"/>
+    <p:sldId id="265" r:id="rId10"/>
+    <p:sldId id="266" r:id="rId11"/>
+    <p:sldId id="267" r:id="rId12"/>
+    <p:sldId id="268" r:id="rId13"/>
+    <p:sldId id="269" r:id="rId14"/>
+    <p:sldId id="270" r:id="rId15"/>
+    <p:sldId id="271" r:id="rId16"/>
+    <p:sldId id="272" r:id="rId17"/>
   </p:sldIdLst>
   <p:sldSz cx="12192000" cy="6858000"/>
   <p:notesSz cx="6858000" cy="9144000"/>
@@ -6180,6 +6189,1448 @@
 </p:sld>
 </file>
 
+<file path=ppt/slides/slide10.xml><?xml version="1.0" encoding="utf-8"?>
+<p:sld xmlns:a="http://schemas.openxmlformats.org/drawingml/2006/main" xmlns:r="http://schemas.openxmlformats.org/officeDocument/2006/relationships" xmlns:p="http://schemas.openxmlformats.org/presentationml/2006/main">
+  <p:cSld>
+    <p:spTree>
+      <p:nvGrpSpPr>
+        <p:cNvPr id="1" name="">
+          <a:extLst>
+            <a:ext uri="{FF2B5EF4-FFF2-40B4-BE49-F238E27FC236}">
+              <a16:creationId xmlns:a16="http://schemas.microsoft.com/office/drawing/2014/main" id="{A6046009-C073-64E2-E57C-083FE3B884D8}"/>
+            </a:ext>
+          </a:extLst>
+        </p:cNvPr>
+        <p:cNvGrpSpPr/>
+        <p:nvPr/>
+      </p:nvGrpSpPr>
+      <p:grpSpPr>
+        <a:xfrm>
+          <a:off x="0" y="0"/>
+          <a:ext cx="0" cy="0"/>
+          <a:chOff x="0" y="0"/>
+          <a:chExt cx="0" cy="0"/>
+        </a:xfrm>
+      </p:grpSpPr>
+      <p:sp>
+        <p:nvSpPr>
+          <p:cNvPr id="2" name="Título 1">
+            <a:extLst>
+              <a:ext uri="{FF2B5EF4-FFF2-40B4-BE49-F238E27FC236}">
+                <a16:creationId xmlns:a16="http://schemas.microsoft.com/office/drawing/2014/main" id="{358CAC76-6343-F83B-4F87-59C2F76B0515}"/>
+              </a:ext>
+            </a:extLst>
+          </p:cNvPr>
+          <p:cNvSpPr>
+            <a:spLocks noGrp="1"/>
+          </p:cNvSpPr>
+          <p:nvPr>
+            <p:ph type="title"/>
+          </p:nvPr>
+        </p:nvSpPr>
+        <p:spPr>
+          <a:xfrm>
+            <a:off x="1154953" y="1007807"/>
+            <a:ext cx="7261460" cy="997974"/>
+          </a:xfrm>
+        </p:spPr>
+        <p:txBody>
+          <a:bodyPr/>
+          <a:lstStyle/>
+          <a:p>
+            <a:r>
+              <a:rPr lang="eu-ES" sz="3200" dirty="0"/>
+              <a:t>SISTEMA ERAGILEAK EZARTZEA</a:t>
+            </a:r>
+            <a:endParaRPr lang="eu-ES" sz="3200" noProof="0" dirty="0"/>
+          </a:p>
+        </p:txBody>
+      </p:sp>
+      <p:sp>
+        <p:nvSpPr>
+          <p:cNvPr id="3" name="Marcador de contenido 2">
+            <a:extLst>
+              <a:ext uri="{FF2B5EF4-FFF2-40B4-BE49-F238E27FC236}">
+                <a16:creationId xmlns:a16="http://schemas.microsoft.com/office/drawing/2014/main" id="{5F686A67-F90D-4C32-D386-E0593643B6EF}"/>
+              </a:ext>
+            </a:extLst>
+          </p:cNvPr>
+          <p:cNvSpPr>
+            <a:spLocks noGrp="1"/>
+          </p:cNvSpPr>
+          <p:nvPr>
+            <p:ph idx="1"/>
+          </p:nvPr>
+        </p:nvSpPr>
+        <p:spPr>
+          <a:xfrm>
+            <a:off x="1195583" y="3045377"/>
+            <a:ext cx="2314533" cy="2003323"/>
+          </a:xfrm>
+        </p:spPr>
+        <p:txBody>
+          <a:bodyPr>
+            <a:normAutofit/>
+          </a:bodyPr>
+          <a:lstStyle/>
+          <a:p>
+            <a:pPr marL="0" indent="0">
+              <a:buNone/>
+            </a:pPr>
+            <a:r>
+              <a:rPr lang="eu-ES" sz="1400" b="1" noProof="0" dirty="0"/>
+              <a:t>Emandako Espezifikazioak:</a:t>
+            </a:r>
+          </a:p>
+          <a:p>
+            <a:pPr>
+              <a:buFontTx/>
+              <a:buChar char="-"/>
+            </a:pPr>
+            <a:r>
+              <a:rPr lang="eu-ES" sz="1400" b="1" dirty="0"/>
+              <a:t>4gb</a:t>
+            </a:r>
+          </a:p>
+          <a:p>
+            <a:pPr>
+              <a:buFontTx/>
+              <a:buChar char="-"/>
+            </a:pPr>
+            <a:r>
+              <a:rPr lang="eu-ES" sz="1400" b="1" dirty="0"/>
+              <a:t>2 </a:t>
+            </a:r>
+            <a:r>
+              <a:rPr lang="eu-ES" sz="1400" b="1" dirty="0" err="1"/>
+              <a:t>cpu</a:t>
+            </a:r>
+            <a:endParaRPr lang="eu-ES" sz="1400" b="1" dirty="0"/>
+          </a:p>
+          <a:p>
+            <a:pPr>
+              <a:buFontTx/>
+              <a:buChar char="-"/>
+            </a:pPr>
+            <a:r>
+              <a:rPr lang="eu-ES" sz="1400" b="1" dirty="0"/>
+              <a:t>50gb sistema eragile</a:t>
+            </a:r>
+          </a:p>
+          <a:p>
+            <a:pPr>
+              <a:buFontTx/>
+              <a:buChar char="-"/>
+            </a:pPr>
+            <a:endParaRPr lang="eu-ES" sz="1400" b="1" dirty="0"/>
+          </a:p>
+        </p:txBody>
+      </p:sp>
+      <p:sp>
+        <p:nvSpPr>
+          <p:cNvPr id="4" name="Marcador de texto 3">
+            <a:extLst>
+              <a:ext uri="{FF2B5EF4-FFF2-40B4-BE49-F238E27FC236}">
+                <a16:creationId xmlns:a16="http://schemas.microsoft.com/office/drawing/2014/main" id="{ED889C4D-0C3F-3D89-6C11-7084BDB04DB4}"/>
+              </a:ext>
+            </a:extLst>
+          </p:cNvPr>
+          <p:cNvSpPr>
+            <a:spLocks noGrp="1"/>
+          </p:cNvSpPr>
+          <p:nvPr>
+            <p:ph type="body" sz="half" idx="2"/>
+          </p:nvPr>
+        </p:nvSpPr>
+        <p:spPr>
+          <a:xfrm>
+            <a:off x="1195583" y="2445774"/>
+            <a:ext cx="9669062" cy="425245"/>
+          </a:xfrm>
+        </p:spPr>
+        <p:txBody>
+          <a:bodyPr>
+            <a:normAutofit/>
+          </a:bodyPr>
+          <a:lstStyle/>
+          <a:p>
+            <a:r>
+              <a:rPr lang="es-ES" sz="2000" dirty="0"/>
+              <a:t>3. </a:t>
+            </a:r>
+            <a:r>
+              <a:rPr lang="es-ES" sz="2000" dirty="0" err="1"/>
+              <a:t>Segurtasun</a:t>
+            </a:r>
+            <a:r>
+              <a:rPr lang="es-ES" sz="2000" dirty="0"/>
+              <a:t> </a:t>
+            </a:r>
+            <a:r>
+              <a:rPr lang="es-ES" sz="2000" dirty="0" err="1"/>
+              <a:t>politikak</a:t>
+            </a:r>
+            <a:r>
+              <a:rPr lang="es-ES" sz="2000" dirty="0"/>
+              <a:t> (</a:t>
+            </a:r>
+            <a:r>
+              <a:rPr lang="es-ES" sz="2000" dirty="0" err="1"/>
+              <a:t>Pasahitzak</a:t>
+            </a:r>
+            <a:r>
+              <a:rPr lang="es-ES" sz="2000" dirty="0"/>
+              <a:t>)</a:t>
+            </a:r>
+          </a:p>
+          <a:p>
+            <a:endParaRPr lang="es-ES" sz="2000" dirty="0"/>
+          </a:p>
+          <a:p>
+            <a:endParaRPr lang="es-ES" sz="2000" dirty="0"/>
+          </a:p>
+        </p:txBody>
+      </p:sp>
+    </p:spTree>
+    <p:extLst>
+      <p:ext uri="{BB962C8B-B14F-4D97-AF65-F5344CB8AC3E}">
+        <p14:creationId xmlns:p14="http://schemas.microsoft.com/office/powerpoint/2010/main" val="1436633333"/>
+      </p:ext>
+    </p:extLst>
+  </p:cSld>
+  <p:clrMapOvr>
+    <a:masterClrMapping/>
+  </p:clrMapOvr>
+</p:sld>
+</file>
+
+<file path=ppt/slides/slide11.xml><?xml version="1.0" encoding="utf-8"?>
+<p:sld xmlns:a="http://schemas.openxmlformats.org/drawingml/2006/main" xmlns:r="http://schemas.openxmlformats.org/officeDocument/2006/relationships" xmlns:p="http://schemas.openxmlformats.org/presentationml/2006/main">
+  <p:cSld>
+    <p:spTree>
+      <p:nvGrpSpPr>
+        <p:cNvPr id="1" name="">
+          <a:extLst>
+            <a:ext uri="{FF2B5EF4-FFF2-40B4-BE49-F238E27FC236}">
+              <a16:creationId xmlns:a16="http://schemas.microsoft.com/office/drawing/2014/main" id="{609D3527-2C8C-5C46-C067-79A4C672E7DA}"/>
+            </a:ext>
+          </a:extLst>
+        </p:cNvPr>
+        <p:cNvGrpSpPr/>
+        <p:nvPr/>
+      </p:nvGrpSpPr>
+      <p:grpSpPr>
+        <a:xfrm>
+          <a:off x="0" y="0"/>
+          <a:ext cx="0" cy="0"/>
+          <a:chOff x="0" y="0"/>
+          <a:chExt cx="0" cy="0"/>
+        </a:xfrm>
+      </p:grpSpPr>
+      <p:sp>
+        <p:nvSpPr>
+          <p:cNvPr id="2" name="Título 1">
+            <a:extLst>
+              <a:ext uri="{FF2B5EF4-FFF2-40B4-BE49-F238E27FC236}">
+                <a16:creationId xmlns:a16="http://schemas.microsoft.com/office/drawing/2014/main" id="{70A91DEA-968F-4A4F-2F71-A9A26C18A277}"/>
+              </a:ext>
+            </a:extLst>
+          </p:cNvPr>
+          <p:cNvSpPr>
+            <a:spLocks noGrp="1"/>
+          </p:cNvSpPr>
+          <p:nvPr>
+            <p:ph type="title"/>
+          </p:nvPr>
+        </p:nvSpPr>
+        <p:spPr>
+          <a:xfrm>
+            <a:off x="1154953" y="1007807"/>
+            <a:ext cx="7261460" cy="997974"/>
+          </a:xfrm>
+        </p:spPr>
+        <p:txBody>
+          <a:bodyPr/>
+          <a:lstStyle/>
+          <a:p>
+            <a:r>
+              <a:rPr lang="eu-ES" sz="3200" dirty="0"/>
+              <a:t>SISTEMA ERAGILEAK EZARTZEA</a:t>
+            </a:r>
+            <a:endParaRPr lang="eu-ES" sz="3200" noProof="0" dirty="0"/>
+          </a:p>
+        </p:txBody>
+      </p:sp>
+      <p:sp>
+        <p:nvSpPr>
+          <p:cNvPr id="3" name="Marcador de contenido 2">
+            <a:extLst>
+              <a:ext uri="{FF2B5EF4-FFF2-40B4-BE49-F238E27FC236}">
+                <a16:creationId xmlns:a16="http://schemas.microsoft.com/office/drawing/2014/main" id="{B3F214DF-5E8A-73C0-C7A0-0A92BFDF6E5B}"/>
+              </a:ext>
+            </a:extLst>
+          </p:cNvPr>
+          <p:cNvSpPr>
+            <a:spLocks noGrp="1"/>
+          </p:cNvSpPr>
+          <p:nvPr>
+            <p:ph idx="1"/>
+          </p:nvPr>
+        </p:nvSpPr>
+        <p:spPr>
+          <a:xfrm>
+            <a:off x="1195583" y="3045377"/>
+            <a:ext cx="2314533" cy="2003323"/>
+          </a:xfrm>
+        </p:spPr>
+        <p:txBody>
+          <a:bodyPr>
+            <a:normAutofit/>
+          </a:bodyPr>
+          <a:lstStyle/>
+          <a:p>
+            <a:pPr marL="0" indent="0">
+              <a:buNone/>
+            </a:pPr>
+            <a:r>
+              <a:rPr lang="eu-ES" sz="1400" b="1" noProof="0" dirty="0"/>
+              <a:t>Emandako Espezifikazioak:</a:t>
+            </a:r>
+          </a:p>
+          <a:p>
+            <a:pPr>
+              <a:buFontTx/>
+              <a:buChar char="-"/>
+            </a:pPr>
+            <a:r>
+              <a:rPr lang="eu-ES" sz="1400" b="1" dirty="0"/>
+              <a:t>4gb</a:t>
+            </a:r>
+          </a:p>
+          <a:p>
+            <a:pPr>
+              <a:buFontTx/>
+              <a:buChar char="-"/>
+            </a:pPr>
+            <a:r>
+              <a:rPr lang="eu-ES" sz="1400" b="1" dirty="0"/>
+              <a:t>2 </a:t>
+            </a:r>
+            <a:r>
+              <a:rPr lang="eu-ES" sz="1400" b="1" dirty="0" err="1"/>
+              <a:t>cpu</a:t>
+            </a:r>
+            <a:endParaRPr lang="eu-ES" sz="1400" b="1" dirty="0"/>
+          </a:p>
+          <a:p>
+            <a:pPr>
+              <a:buFontTx/>
+              <a:buChar char="-"/>
+            </a:pPr>
+            <a:r>
+              <a:rPr lang="eu-ES" sz="1400" b="1" dirty="0"/>
+              <a:t>50gb sistema eragile</a:t>
+            </a:r>
+          </a:p>
+          <a:p>
+            <a:pPr>
+              <a:buFontTx/>
+              <a:buChar char="-"/>
+            </a:pPr>
+            <a:endParaRPr lang="eu-ES" sz="1400" b="1" dirty="0"/>
+          </a:p>
+        </p:txBody>
+      </p:sp>
+      <p:sp>
+        <p:nvSpPr>
+          <p:cNvPr id="4" name="Marcador de texto 3">
+            <a:extLst>
+              <a:ext uri="{FF2B5EF4-FFF2-40B4-BE49-F238E27FC236}">
+                <a16:creationId xmlns:a16="http://schemas.microsoft.com/office/drawing/2014/main" id="{FC8E45CC-5AFC-FA3F-0588-A69CE3344BAB}"/>
+              </a:ext>
+            </a:extLst>
+          </p:cNvPr>
+          <p:cNvSpPr>
+            <a:spLocks noGrp="1"/>
+          </p:cNvSpPr>
+          <p:nvPr>
+            <p:ph type="body" sz="half" idx="2"/>
+          </p:nvPr>
+        </p:nvSpPr>
+        <p:spPr>
+          <a:xfrm>
+            <a:off x="1195583" y="2445774"/>
+            <a:ext cx="9669062" cy="425245"/>
+          </a:xfrm>
+        </p:spPr>
+        <p:txBody>
+          <a:bodyPr>
+            <a:normAutofit/>
+          </a:bodyPr>
+          <a:lstStyle/>
+          <a:p>
+            <a:r>
+              <a:rPr lang="es-ES" sz="2000" dirty="0"/>
+              <a:t>4. </a:t>
+            </a:r>
+            <a:r>
+              <a:rPr lang="es-ES" sz="2000" dirty="0" err="1"/>
+              <a:t>Diskoak</a:t>
+            </a:r>
+            <a:r>
+              <a:rPr lang="es-ES" sz="2000" dirty="0"/>
+              <a:t> eta </a:t>
+            </a:r>
+            <a:r>
+              <a:rPr lang="es-ES" sz="2000" dirty="0" err="1"/>
+              <a:t>bolumenak</a:t>
+            </a:r>
+            <a:endParaRPr lang="es-ES" sz="2000" dirty="0"/>
+          </a:p>
+        </p:txBody>
+      </p:sp>
+    </p:spTree>
+    <p:extLst>
+      <p:ext uri="{BB962C8B-B14F-4D97-AF65-F5344CB8AC3E}">
+        <p14:creationId xmlns:p14="http://schemas.microsoft.com/office/powerpoint/2010/main" val="582900634"/>
+      </p:ext>
+    </p:extLst>
+  </p:cSld>
+  <p:clrMapOvr>
+    <a:masterClrMapping/>
+  </p:clrMapOvr>
+</p:sld>
+</file>
+
+<file path=ppt/slides/slide12.xml><?xml version="1.0" encoding="utf-8"?>
+<p:sld xmlns:a="http://schemas.openxmlformats.org/drawingml/2006/main" xmlns:r="http://schemas.openxmlformats.org/officeDocument/2006/relationships" xmlns:p="http://schemas.openxmlformats.org/presentationml/2006/main">
+  <p:cSld>
+    <p:spTree>
+      <p:nvGrpSpPr>
+        <p:cNvPr id="1" name="">
+          <a:extLst>
+            <a:ext uri="{FF2B5EF4-FFF2-40B4-BE49-F238E27FC236}">
+              <a16:creationId xmlns:a16="http://schemas.microsoft.com/office/drawing/2014/main" id="{7CC36787-DAB2-8D2D-625F-C2857D8A6D89}"/>
+            </a:ext>
+          </a:extLst>
+        </p:cNvPr>
+        <p:cNvGrpSpPr/>
+        <p:nvPr/>
+      </p:nvGrpSpPr>
+      <p:grpSpPr>
+        <a:xfrm>
+          <a:off x="0" y="0"/>
+          <a:ext cx="0" cy="0"/>
+          <a:chOff x="0" y="0"/>
+          <a:chExt cx="0" cy="0"/>
+        </a:xfrm>
+      </p:grpSpPr>
+      <p:sp>
+        <p:nvSpPr>
+          <p:cNvPr id="2" name="Título 1">
+            <a:extLst>
+              <a:ext uri="{FF2B5EF4-FFF2-40B4-BE49-F238E27FC236}">
+                <a16:creationId xmlns:a16="http://schemas.microsoft.com/office/drawing/2014/main" id="{5CDE17B4-AFE0-CCA8-2EDD-5D0A44DDB1DB}"/>
+              </a:ext>
+            </a:extLst>
+          </p:cNvPr>
+          <p:cNvSpPr>
+            <a:spLocks noGrp="1"/>
+          </p:cNvSpPr>
+          <p:nvPr>
+            <p:ph type="title"/>
+          </p:nvPr>
+        </p:nvSpPr>
+        <p:spPr>
+          <a:xfrm>
+            <a:off x="1154953" y="1007807"/>
+            <a:ext cx="7261460" cy="997974"/>
+          </a:xfrm>
+        </p:spPr>
+        <p:txBody>
+          <a:bodyPr/>
+          <a:lstStyle/>
+          <a:p>
+            <a:r>
+              <a:rPr lang="eu-ES" sz="3200" dirty="0"/>
+              <a:t>SISTEMA ERAGILEAK EZARTZEA</a:t>
+            </a:r>
+            <a:endParaRPr lang="eu-ES" sz="3200" noProof="0" dirty="0"/>
+          </a:p>
+        </p:txBody>
+      </p:sp>
+      <p:sp>
+        <p:nvSpPr>
+          <p:cNvPr id="3" name="Marcador de contenido 2">
+            <a:extLst>
+              <a:ext uri="{FF2B5EF4-FFF2-40B4-BE49-F238E27FC236}">
+                <a16:creationId xmlns:a16="http://schemas.microsoft.com/office/drawing/2014/main" id="{EE222A8F-7BD9-2A4F-D550-11FAA11ECEC0}"/>
+              </a:ext>
+            </a:extLst>
+          </p:cNvPr>
+          <p:cNvSpPr>
+            <a:spLocks noGrp="1"/>
+          </p:cNvSpPr>
+          <p:nvPr>
+            <p:ph idx="1"/>
+          </p:nvPr>
+        </p:nvSpPr>
+        <p:spPr>
+          <a:xfrm>
+            <a:off x="1195583" y="3045377"/>
+            <a:ext cx="2314533" cy="2003323"/>
+          </a:xfrm>
+        </p:spPr>
+        <p:txBody>
+          <a:bodyPr>
+            <a:normAutofit/>
+          </a:bodyPr>
+          <a:lstStyle/>
+          <a:p>
+            <a:pPr marL="0" indent="0">
+              <a:buNone/>
+            </a:pPr>
+            <a:r>
+              <a:rPr lang="eu-ES" sz="1400" b="1" noProof="0" dirty="0"/>
+              <a:t>Emandako Espezifikazioak:</a:t>
+            </a:r>
+          </a:p>
+          <a:p>
+            <a:pPr>
+              <a:buFontTx/>
+              <a:buChar char="-"/>
+            </a:pPr>
+            <a:r>
+              <a:rPr lang="eu-ES" sz="1400" b="1" dirty="0"/>
+              <a:t>4gb</a:t>
+            </a:r>
+          </a:p>
+          <a:p>
+            <a:pPr>
+              <a:buFontTx/>
+              <a:buChar char="-"/>
+            </a:pPr>
+            <a:r>
+              <a:rPr lang="eu-ES" sz="1400" b="1" dirty="0"/>
+              <a:t>2 </a:t>
+            </a:r>
+            <a:r>
+              <a:rPr lang="eu-ES" sz="1400" b="1" dirty="0" err="1"/>
+              <a:t>cpu</a:t>
+            </a:r>
+            <a:endParaRPr lang="eu-ES" sz="1400" b="1" dirty="0"/>
+          </a:p>
+          <a:p>
+            <a:pPr>
+              <a:buFontTx/>
+              <a:buChar char="-"/>
+            </a:pPr>
+            <a:r>
+              <a:rPr lang="eu-ES" sz="1400" b="1" dirty="0"/>
+              <a:t>50gb sistema eragile</a:t>
+            </a:r>
+          </a:p>
+          <a:p>
+            <a:pPr>
+              <a:buFontTx/>
+              <a:buChar char="-"/>
+            </a:pPr>
+            <a:endParaRPr lang="eu-ES" sz="1400" b="1" dirty="0"/>
+          </a:p>
+        </p:txBody>
+      </p:sp>
+      <p:sp>
+        <p:nvSpPr>
+          <p:cNvPr id="4" name="Marcador de texto 3">
+            <a:extLst>
+              <a:ext uri="{FF2B5EF4-FFF2-40B4-BE49-F238E27FC236}">
+                <a16:creationId xmlns:a16="http://schemas.microsoft.com/office/drawing/2014/main" id="{B7CC7C5A-C44C-B9CE-7A9C-D8E0076C4713}"/>
+              </a:ext>
+            </a:extLst>
+          </p:cNvPr>
+          <p:cNvSpPr>
+            <a:spLocks noGrp="1"/>
+          </p:cNvSpPr>
+          <p:nvPr>
+            <p:ph type="body" sz="half" idx="2"/>
+          </p:nvPr>
+        </p:nvSpPr>
+        <p:spPr>
+          <a:xfrm>
+            <a:off x="1195583" y="2445774"/>
+            <a:ext cx="9669062" cy="425245"/>
+          </a:xfrm>
+        </p:spPr>
+        <p:txBody>
+          <a:bodyPr>
+            <a:normAutofit/>
+          </a:bodyPr>
+          <a:lstStyle/>
+          <a:p>
+            <a:r>
+              <a:rPr lang="es-ES" sz="2000" dirty="0"/>
+              <a:t>5. RAID</a:t>
+            </a:r>
+          </a:p>
+        </p:txBody>
+      </p:sp>
+    </p:spTree>
+    <p:extLst>
+      <p:ext uri="{BB962C8B-B14F-4D97-AF65-F5344CB8AC3E}">
+        <p14:creationId xmlns:p14="http://schemas.microsoft.com/office/powerpoint/2010/main" val="1076737990"/>
+      </p:ext>
+    </p:extLst>
+  </p:cSld>
+  <p:clrMapOvr>
+    <a:masterClrMapping/>
+  </p:clrMapOvr>
+</p:sld>
+</file>
+
+<file path=ppt/slides/slide13.xml><?xml version="1.0" encoding="utf-8"?>
+<p:sld xmlns:a="http://schemas.openxmlformats.org/drawingml/2006/main" xmlns:r="http://schemas.openxmlformats.org/officeDocument/2006/relationships" xmlns:p="http://schemas.openxmlformats.org/presentationml/2006/main">
+  <p:cSld>
+    <p:spTree>
+      <p:nvGrpSpPr>
+        <p:cNvPr id="1" name="">
+          <a:extLst>
+            <a:ext uri="{FF2B5EF4-FFF2-40B4-BE49-F238E27FC236}">
+              <a16:creationId xmlns:a16="http://schemas.microsoft.com/office/drawing/2014/main" id="{F76A24BD-85D3-39DA-1F41-4215649189C5}"/>
+            </a:ext>
+          </a:extLst>
+        </p:cNvPr>
+        <p:cNvGrpSpPr/>
+        <p:nvPr/>
+      </p:nvGrpSpPr>
+      <p:grpSpPr>
+        <a:xfrm>
+          <a:off x="0" y="0"/>
+          <a:ext cx="0" cy="0"/>
+          <a:chOff x="0" y="0"/>
+          <a:chExt cx="0" cy="0"/>
+        </a:xfrm>
+      </p:grpSpPr>
+      <p:sp>
+        <p:nvSpPr>
+          <p:cNvPr id="2" name="Título 1">
+            <a:extLst>
+              <a:ext uri="{FF2B5EF4-FFF2-40B4-BE49-F238E27FC236}">
+                <a16:creationId xmlns:a16="http://schemas.microsoft.com/office/drawing/2014/main" id="{1CE1441B-FF19-CF67-E5B5-12CA6170292A}"/>
+              </a:ext>
+            </a:extLst>
+          </p:cNvPr>
+          <p:cNvSpPr>
+            <a:spLocks noGrp="1"/>
+          </p:cNvSpPr>
+          <p:nvPr>
+            <p:ph type="title"/>
+          </p:nvPr>
+        </p:nvSpPr>
+        <p:spPr>
+          <a:xfrm>
+            <a:off x="1154953" y="1007807"/>
+            <a:ext cx="7261460" cy="997974"/>
+          </a:xfrm>
+        </p:spPr>
+        <p:txBody>
+          <a:bodyPr/>
+          <a:lstStyle/>
+          <a:p>
+            <a:r>
+              <a:rPr lang="eu-ES" sz="3200" dirty="0"/>
+              <a:t>SISTEMA ERAGILEAK EZARTZEA</a:t>
+            </a:r>
+            <a:endParaRPr lang="eu-ES" sz="3200" noProof="0" dirty="0"/>
+          </a:p>
+        </p:txBody>
+      </p:sp>
+      <p:sp>
+        <p:nvSpPr>
+          <p:cNvPr id="3" name="Marcador de contenido 2">
+            <a:extLst>
+              <a:ext uri="{FF2B5EF4-FFF2-40B4-BE49-F238E27FC236}">
+                <a16:creationId xmlns:a16="http://schemas.microsoft.com/office/drawing/2014/main" id="{DBC755A1-7F9D-B071-D05C-6E3DAC10B366}"/>
+              </a:ext>
+            </a:extLst>
+          </p:cNvPr>
+          <p:cNvSpPr>
+            <a:spLocks noGrp="1"/>
+          </p:cNvSpPr>
+          <p:nvPr>
+            <p:ph idx="1"/>
+          </p:nvPr>
+        </p:nvSpPr>
+        <p:spPr>
+          <a:xfrm>
+            <a:off x="1195583" y="3045377"/>
+            <a:ext cx="2314533" cy="2003323"/>
+          </a:xfrm>
+        </p:spPr>
+        <p:txBody>
+          <a:bodyPr>
+            <a:normAutofit/>
+          </a:bodyPr>
+          <a:lstStyle/>
+          <a:p>
+            <a:pPr marL="0" indent="0">
+              <a:buNone/>
+            </a:pPr>
+            <a:r>
+              <a:rPr lang="eu-ES" sz="1400" b="1" noProof="0" dirty="0"/>
+              <a:t>Emandako Espezifikazioak:</a:t>
+            </a:r>
+          </a:p>
+          <a:p>
+            <a:pPr>
+              <a:buFontTx/>
+              <a:buChar char="-"/>
+            </a:pPr>
+            <a:r>
+              <a:rPr lang="eu-ES" sz="1400" b="1" dirty="0"/>
+              <a:t>4gb</a:t>
+            </a:r>
+          </a:p>
+          <a:p>
+            <a:pPr>
+              <a:buFontTx/>
+              <a:buChar char="-"/>
+            </a:pPr>
+            <a:r>
+              <a:rPr lang="eu-ES" sz="1400" b="1" dirty="0"/>
+              <a:t>2 </a:t>
+            </a:r>
+            <a:r>
+              <a:rPr lang="eu-ES" sz="1400" b="1" dirty="0" err="1"/>
+              <a:t>cpu</a:t>
+            </a:r>
+            <a:endParaRPr lang="eu-ES" sz="1400" b="1" dirty="0"/>
+          </a:p>
+          <a:p>
+            <a:pPr>
+              <a:buFontTx/>
+              <a:buChar char="-"/>
+            </a:pPr>
+            <a:r>
+              <a:rPr lang="eu-ES" sz="1400" b="1" dirty="0"/>
+              <a:t>50gb sistema eragile</a:t>
+            </a:r>
+          </a:p>
+          <a:p>
+            <a:pPr>
+              <a:buFontTx/>
+              <a:buChar char="-"/>
+            </a:pPr>
+            <a:endParaRPr lang="eu-ES" sz="1400" b="1" dirty="0"/>
+          </a:p>
+        </p:txBody>
+      </p:sp>
+      <p:sp>
+        <p:nvSpPr>
+          <p:cNvPr id="4" name="Marcador de texto 3">
+            <a:extLst>
+              <a:ext uri="{FF2B5EF4-FFF2-40B4-BE49-F238E27FC236}">
+                <a16:creationId xmlns:a16="http://schemas.microsoft.com/office/drawing/2014/main" id="{CE37D166-14B7-0CB9-191F-A17CC120FD3F}"/>
+              </a:ext>
+            </a:extLst>
+          </p:cNvPr>
+          <p:cNvSpPr>
+            <a:spLocks noGrp="1"/>
+          </p:cNvSpPr>
+          <p:nvPr>
+            <p:ph type="body" sz="half" idx="2"/>
+          </p:nvPr>
+        </p:nvSpPr>
+        <p:spPr>
+          <a:xfrm>
+            <a:off x="1195583" y="2445774"/>
+            <a:ext cx="9669062" cy="425245"/>
+          </a:xfrm>
+        </p:spPr>
+        <p:txBody>
+          <a:bodyPr>
+            <a:normAutofit/>
+          </a:bodyPr>
+          <a:lstStyle/>
+          <a:p>
+            <a:r>
+              <a:rPr lang="es-ES" sz="2000" dirty="0"/>
+              <a:t>6. </a:t>
+            </a:r>
+            <a:r>
+              <a:rPr lang="es-ES" sz="2000" dirty="0" err="1"/>
+              <a:t>Sistemaren</a:t>
+            </a:r>
+            <a:r>
+              <a:rPr lang="es-ES" sz="2000" dirty="0"/>
+              <a:t> Rol-</a:t>
+            </a:r>
+            <a:r>
+              <a:rPr lang="es-ES" sz="2000" dirty="0" err="1"/>
+              <a:t>ak</a:t>
+            </a:r>
+            <a:r>
+              <a:rPr lang="es-ES" sz="2000" dirty="0"/>
+              <a:t> eta </a:t>
+            </a:r>
+            <a:r>
+              <a:rPr lang="es-ES" sz="2000" dirty="0" err="1"/>
+              <a:t>ezaugarriak</a:t>
+            </a:r>
+            <a:r>
+              <a:rPr lang="es-ES" sz="2000" dirty="0"/>
+              <a:t> </a:t>
+            </a:r>
+            <a:r>
+              <a:rPr lang="es-ES" sz="2000" dirty="0" err="1"/>
+              <a:t>gehitu</a:t>
+            </a:r>
+            <a:r>
+              <a:rPr lang="es-ES" sz="2000" dirty="0"/>
+              <a:t> (IIS, </a:t>
+            </a:r>
+            <a:r>
+              <a:rPr lang="es-ES" sz="2000" dirty="0" err="1"/>
+              <a:t>iSCSI</a:t>
+            </a:r>
+            <a:r>
+              <a:rPr lang="es-ES" sz="2000" dirty="0"/>
+              <a:t> eta </a:t>
+            </a:r>
+            <a:r>
+              <a:rPr lang="es-ES" sz="2000" dirty="0" err="1"/>
+              <a:t>Segurtasun</a:t>
+            </a:r>
+            <a:r>
+              <a:rPr lang="es-ES" sz="2000" dirty="0"/>
+              <a:t> </a:t>
+            </a:r>
+            <a:r>
+              <a:rPr lang="es-ES" sz="2000" dirty="0" err="1"/>
+              <a:t>kopiak</a:t>
+            </a:r>
+            <a:r>
+              <a:rPr lang="es-ES" sz="2000" dirty="0"/>
+              <a:t>)</a:t>
+            </a:r>
+          </a:p>
+        </p:txBody>
+      </p:sp>
+    </p:spTree>
+    <p:extLst>
+      <p:ext uri="{BB962C8B-B14F-4D97-AF65-F5344CB8AC3E}">
+        <p14:creationId xmlns:p14="http://schemas.microsoft.com/office/powerpoint/2010/main" val="2667532906"/>
+      </p:ext>
+    </p:extLst>
+  </p:cSld>
+  <p:clrMapOvr>
+    <a:masterClrMapping/>
+  </p:clrMapOvr>
+</p:sld>
+</file>
+
+<file path=ppt/slides/slide14.xml><?xml version="1.0" encoding="utf-8"?>
+<p:sld xmlns:a="http://schemas.openxmlformats.org/drawingml/2006/main" xmlns:r="http://schemas.openxmlformats.org/officeDocument/2006/relationships" xmlns:p="http://schemas.openxmlformats.org/presentationml/2006/main">
+  <p:cSld>
+    <p:spTree>
+      <p:nvGrpSpPr>
+        <p:cNvPr id="1" name="">
+          <a:extLst>
+            <a:ext uri="{FF2B5EF4-FFF2-40B4-BE49-F238E27FC236}">
+              <a16:creationId xmlns:a16="http://schemas.microsoft.com/office/drawing/2014/main" id="{237B2FF9-7914-2866-33B2-C14C49B0EA4E}"/>
+            </a:ext>
+          </a:extLst>
+        </p:cNvPr>
+        <p:cNvGrpSpPr/>
+        <p:nvPr/>
+      </p:nvGrpSpPr>
+      <p:grpSpPr>
+        <a:xfrm>
+          <a:off x="0" y="0"/>
+          <a:ext cx="0" cy="0"/>
+          <a:chOff x="0" y="0"/>
+          <a:chExt cx="0" cy="0"/>
+        </a:xfrm>
+      </p:grpSpPr>
+      <p:sp>
+        <p:nvSpPr>
+          <p:cNvPr id="2" name="Título 1">
+            <a:extLst>
+              <a:ext uri="{FF2B5EF4-FFF2-40B4-BE49-F238E27FC236}">
+                <a16:creationId xmlns:a16="http://schemas.microsoft.com/office/drawing/2014/main" id="{DC8EB4C0-C18E-1D27-E7DC-ABE9A5700500}"/>
+              </a:ext>
+            </a:extLst>
+          </p:cNvPr>
+          <p:cNvSpPr>
+            <a:spLocks noGrp="1"/>
+          </p:cNvSpPr>
+          <p:nvPr>
+            <p:ph type="title"/>
+          </p:nvPr>
+        </p:nvSpPr>
+        <p:spPr>
+          <a:xfrm>
+            <a:off x="1154953" y="1007807"/>
+            <a:ext cx="7261460" cy="997974"/>
+          </a:xfrm>
+        </p:spPr>
+        <p:txBody>
+          <a:bodyPr/>
+          <a:lstStyle/>
+          <a:p>
+            <a:r>
+              <a:rPr lang="eu-ES" sz="3200" dirty="0"/>
+              <a:t>SISTEMA ERAGILEAK EZARTZEA</a:t>
+            </a:r>
+            <a:endParaRPr lang="eu-ES" sz="3200" noProof="0" dirty="0"/>
+          </a:p>
+        </p:txBody>
+      </p:sp>
+      <p:sp>
+        <p:nvSpPr>
+          <p:cNvPr id="3" name="Marcador de contenido 2">
+            <a:extLst>
+              <a:ext uri="{FF2B5EF4-FFF2-40B4-BE49-F238E27FC236}">
+                <a16:creationId xmlns:a16="http://schemas.microsoft.com/office/drawing/2014/main" id="{017A1D9C-E1E2-F7CE-1E12-9123CEEF6704}"/>
+              </a:ext>
+            </a:extLst>
+          </p:cNvPr>
+          <p:cNvSpPr>
+            <a:spLocks noGrp="1"/>
+          </p:cNvSpPr>
+          <p:nvPr>
+            <p:ph idx="1"/>
+          </p:nvPr>
+        </p:nvSpPr>
+        <p:spPr>
+          <a:xfrm>
+            <a:off x="1195583" y="3045377"/>
+            <a:ext cx="2314533" cy="2003323"/>
+          </a:xfrm>
+        </p:spPr>
+        <p:txBody>
+          <a:bodyPr>
+            <a:normAutofit/>
+          </a:bodyPr>
+          <a:lstStyle/>
+          <a:p>
+            <a:pPr marL="0" indent="0">
+              <a:buNone/>
+            </a:pPr>
+            <a:r>
+              <a:rPr lang="eu-ES" sz="1400" b="1" noProof="0" dirty="0"/>
+              <a:t>Emandako Espezifikazioak:</a:t>
+            </a:r>
+          </a:p>
+          <a:p>
+            <a:pPr>
+              <a:buFontTx/>
+              <a:buChar char="-"/>
+            </a:pPr>
+            <a:r>
+              <a:rPr lang="eu-ES" sz="1400" b="1" dirty="0"/>
+              <a:t>4gb</a:t>
+            </a:r>
+          </a:p>
+          <a:p>
+            <a:pPr>
+              <a:buFontTx/>
+              <a:buChar char="-"/>
+            </a:pPr>
+            <a:r>
+              <a:rPr lang="eu-ES" sz="1400" b="1" dirty="0"/>
+              <a:t>2 </a:t>
+            </a:r>
+            <a:r>
+              <a:rPr lang="eu-ES" sz="1400" b="1" dirty="0" err="1"/>
+              <a:t>cpu</a:t>
+            </a:r>
+            <a:endParaRPr lang="eu-ES" sz="1400" b="1" dirty="0"/>
+          </a:p>
+          <a:p>
+            <a:pPr>
+              <a:buFontTx/>
+              <a:buChar char="-"/>
+            </a:pPr>
+            <a:r>
+              <a:rPr lang="eu-ES" sz="1400" b="1" dirty="0"/>
+              <a:t>50gb sistema eragile</a:t>
+            </a:r>
+          </a:p>
+          <a:p>
+            <a:pPr>
+              <a:buFontTx/>
+              <a:buChar char="-"/>
+            </a:pPr>
+            <a:endParaRPr lang="eu-ES" sz="1400" b="1" dirty="0"/>
+          </a:p>
+        </p:txBody>
+      </p:sp>
+      <p:sp>
+        <p:nvSpPr>
+          <p:cNvPr id="4" name="Marcador de texto 3">
+            <a:extLst>
+              <a:ext uri="{FF2B5EF4-FFF2-40B4-BE49-F238E27FC236}">
+                <a16:creationId xmlns:a16="http://schemas.microsoft.com/office/drawing/2014/main" id="{F87ED0D8-BFFB-C76D-EDB7-A17DDC2DA629}"/>
+              </a:ext>
+            </a:extLst>
+          </p:cNvPr>
+          <p:cNvSpPr>
+            <a:spLocks noGrp="1"/>
+          </p:cNvSpPr>
+          <p:nvPr>
+            <p:ph type="body" sz="half" idx="2"/>
+          </p:nvPr>
+        </p:nvSpPr>
+        <p:spPr>
+          <a:xfrm>
+            <a:off x="1195583" y="2445774"/>
+            <a:ext cx="9669062" cy="425245"/>
+          </a:xfrm>
+        </p:spPr>
+        <p:txBody>
+          <a:bodyPr>
+            <a:normAutofit/>
+          </a:bodyPr>
+          <a:lstStyle/>
+          <a:p>
+            <a:r>
+              <a:rPr lang="es-ES" sz="2000" dirty="0"/>
+              <a:t>7. </a:t>
+            </a:r>
+            <a:r>
+              <a:rPr lang="es-ES" sz="2000" dirty="0" err="1"/>
+              <a:t>Erabiltzaileak</a:t>
+            </a:r>
+            <a:r>
+              <a:rPr lang="es-ES" sz="2000" dirty="0"/>
+              <a:t> eta </a:t>
+            </a:r>
+            <a:r>
+              <a:rPr lang="es-ES" sz="2000" dirty="0" err="1"/>
+              <a:t>taldeak</a:t>
+            </a:r>
+            <a:r>
+              <a:rPr lang="es-ES" sz="2000" dirty="0"/>
+              <a:t> (</a:t>
+            </a:r>
+            <a:r>
+              <a:rPr lang="es-ES" sz="2000" dirty="0" err="1"/>
+              <a:t>Baimenak</a:t>
+            </a:r>
+            <a:r>
+              <a:rPr lang="es-ES" sz="2000" dirty="0"/>
+              <a:t> + </a:t>
+            </a:r>
+            <a:r>
+              <a:rPr lang="es-ES" sz="2000" dirty="0" err="1"/>
+              <a:t>Kuotak</a:t>
+            </a:r>
+            <a:r>
+              <a:rPr lang="es-ES" sz="2000" dirty="0"/>
+              <a:t>)</a:t>
+            </a:r>
+          </a:p>
+        </p:txBody>
+      </p:sp>
+    </p:spTree>
+    <p:extLst>
+      <p:ext uri="{BB962C8B-B14F-4D97-AF65-F5344CB8AC3E}">
+        <p14:creationId xmlns:p14="http://schemas.microsoft.com/office/powerpoint/2010/main" val="2852114069"/>
+      </p:ext>
+    </p:extLst>
+  </p:cSld>
+  <p:clrMapOvr>
+    <a:masterClrMapping/>
+  </p:clrMapOvr>
+</p:sld>
+</file>
+
+<file path=ppt/slides/slide15.xml><?xml version="1.0" encoding="utf-8"?>
+<p:sld xmlns:a="http://schemas.openxmlformats.org/drawingml/2006/main" xmlns:r="http://schemas.openxmlformats.org/officeDocument/2006/relationships" xmlns:p="http://schemas.openxmlformats.org/presentationml/2006/main">
+  <p:cSld>
+    <p:spTree>
+      <p:nvGrpSpPr>
+        <p:cNvPr id="1" name="">
+          <a:extLst>
+            <a:ext uri="{FF2B5EF4-FFF2-40B4-BE49-F238E27FC236}">
+              <a16:creationId xmlns:a16="http://schemas.microsoft.com/office/drawing/2014/main" id="{AB6C06A1-0A11-5EBB-8B99-4692DDADDB9C}"/>
+            </a:ext>
+          </a:extLst>
+        </p:cNvPr>
+        <p:cNvGrpSpPr/>
+        <p:nvPr/>
+      </p:nvGrpSpPr>
+      <p:grpSpPr>
+        <a:xfrm>
+          <a:off x="0" y="0"/>
+          <a:ext cx="0" cy="0"/>
+          <a:chOff x="0" y="0"/>
+          <a:chExt cx="0" cy="0"/>
+        </a:xfrm>
+      </p:grpSpPr>
+      <p:sp>
+        <p:nvSpPr>
+          <p:cNvPr id="2" name="Título 1">
+            <a:extLst>
+              <a:ext uri="{FF2B5EF4-FFF2-40B4-BE49-F238E27FC236}">
+                <a16:creationId xmlns:a16="http://schemas.microsoft.com/office/drawing/2014/main" id="{FEF5EE06-213A-C39C-0EDD-C8D2479AA571}"/>
+              </a:ext>
+            </a:extLst>
+          </p:cNvPr>
+          <p:cNvSpPr>
+            <a:spLocks noGrp="1"/>
+          </p:cNvSpPr>
+          <p:nvPr>
+            <p:ph type="title"/>
+          </p:nvPr>
+        </p:nvSpPr>
+        <p:spPr>
+          <a:xfrm>
+            <a:off x="1154953" y="1007807"/>
+            <a:ext cx="7261460" cy="997974"/>
+          </a:xfrm>
+        </p:spPr>
+        <p:txBody>
+          <a:bodyPr/>
+          <a:lstStyle/>
+          <a:p>
+            <a:r>
+              <a:rPr lang="eu-ES" sz="3200" dirty="0"/>
+              <a:t>SISTEMA ERAGILEAK EZARTZEA</a:t>
+            </a:r>
+            <a:endParaRPr lang="eu-ES" sz="3200" noProof="0" dirty="0"/>
+          </a:p>
+        </p:txBody>
+      </p:sp>
+      <p:sp>
+        <p:nvSpPr>
+          <p:cNvPr id="3" name="Marcador de contenido 2">
+            <a:extLst>
+              <a:ext uri="{FF2B5EF4-FFF2-40B4-BE49-F238E27FC236}">
+                <a16:creationId xmlns:a16="http://schemas.microsoft.com/office/drawing/2014/main" id="{01A9E29D-F63B-03AA-915F-77ABFA4F8DB0}"/>
+              </a:ext>
+            </a:extLst>
+          </p:cNvPr>
+          <p:cNvSpPr>
+            <a:spLocks noGrp="1"/>
+          </p:cNvSpPr>
+          <p:nvPr>
+            <p:ph idx="1"/>
+          </p:nvPr>
+        </p:nvSpPr>
+        <p:spPr>
+          <a:xfrm>
+            <a:off x="1195583" y="3045377"/>
+            <a:ext cx="2314533" cy="2003323"/>
+          </a:xfrm>
+        </p:spPr>
+        <p:txBody>
+          <a:bodyPr>
+            <a:normAutofit/>
+          </a:bodyPr>
+          <a:lstStyle/>
+          <a:p>
+            <a:pPr marL="0" indent="0">
+              <a:buNone/>
+            </a:pPr>
+            <a:r>
+              <a:rPr lang="eu-ES" sz="1400" b="1" noProof="0" dirty="0"/>
+              <a:t>Emandako Espezifikazioak:</a:t>
+            </a:r>
+          </a:p>
+          <a:p>
+            <a:pPr>
+              <a:buFontTx/>
+              <a:buChar char="-"/>
+            </a:pPr>
+            <a:r>
+              <a:rPr lang="eu-ES" sz="1400" b="1" dirty="0"/>
+              <a:t>4gb</a:t>
+            </a:r>
+          </a:p>
+          <a:p>
+            <a:pPr>
+              <a:buFontTx/>
+              <a:buChar char="-"/>
+            </a:pPr>
+            <a:r>
+              <a:rPr lang="eu-ES" sz="1400" b="1" dirty="0"/>
+              <a:t>2 </a:t>
+            </a:r>
+            <a:r>
+              <a:rPr lang="eu-ES" sz="1400" b="1" dirty="0" err="1"/>
+              <a:t>cpu</a:t>
+            </a:r>
+            <a:endParaRPr lang="eu-ES" sz="1400" b="1" dirty="0"/>
+          </a:p>
+          <a:p>
+            <a:pPr>
+              <a:buFontTx/>
+              <a:buChar char="-"/>
+            </a:pPr>
+            <a:r>
+              <a:rPr lang="eu-ES" sz="1400" b="1" dirty="0"/>
+              <a:t>50gb sistema eragile</a:t>
+            </a:r>
+          </a:p>
+          <a:p>
+            <a:pPr>
+              <a:buFontTx/>
+              <a:buChar char="-"/>
+            </a:pPr>
+            <a:endParaRPr lang="eu-ES" sz="1400" b="1" dirty="0"/>
+          </a:p>
+        </p:txBody>
+      </p:sp>
+      <p:sp>
+        <p:nvSpPr>
+          <p:cNvPr id="4" name="Marcador de texto 3">
+            <a:extLst>
+              <a:ext uri="{FF2B5EF4-FFF2-40B4-BE49-F238E27FC236}">
+                <a16:creationId xmlns:a16="http://schemas.microsoft.com/office/drawing/2014/main" id="{9B28AC23-126B-3A2A-1F84-443600B787A5}"/>
+              </a:ext>
+            </a:extLst>
+          </p:cNvPr>
+          <p:cNvSpPr>
+            <a:spLocks noGrp="1"/>
+          </p:cNvSpPr>
+          <p:nvPr>
+            <p:ph type="body" sz="half" idx="2"/>
+          </p:nvPr>
+        </p:nvSpPr>
+        <p:spPr>
+          <a:xfrm>
+            <a:off x="1195583" y="2445774"/>
+            <a:ext cx="9669062" cy="425245"/>
+          </a:xfrm>
+        </p:spPr>
+        <p:txBody>
+          <a:bodyPr>
+            <a:normAutofit/>
+          </a:bodyPr>
+          <a:lstStyle/>
+          <a:p>
+            <a:r>
+              <a:rPr lang="es-ES" sz="2000" dirty="0"/>
+              <a:t>8. Web </a:t>
+            </a:r>
+            <a:r>
+              <a:rPr lang="es-ES" sz="2000" dirty="0" err="1"/>
+              <a:t>Zerbitzaria</a:t>
+            </a:r>
+            <a:r>
+              <a:rPr lang="es-ES" sz="2000" dirty="0"/>
+              <a:t> (IIS)</a:t>
+            </a:r>
+          </a:p>
+        </p:txBody>
+      </p:sp>
+    </p:spTree>
+    <p:extLst>
+      <p:ext uri="{BB962C8B-B14F-4D97-AF65-F5344CB8AC3E}">
+        <p14:creationId xmlns:p14="http://schemas.microsoft.com/office/powerpoint/2010/main" val="1603241262"/>
+      </p:ext>
+    </p:extLst>
+  </p:cSld>
+  <p:clrMapOvr>
+    <a:masterClrMapping/>
+  </p:clrMapOvr>
+</p:sld>
+</file>
+
+<file path=ppt/slides/slide16.xml><?xml version="1.0" encoding="utf-8"?>
+<p:sld xmlns:a="http://schemas.openxmlformats.org/drawingml/2006/main" xmlns:r="http://schemas.openxmlformats.org/officeDocument/2006/relationships" xmlns:p="http://schemas.openxmlformats.org/presentationml/2006/main">
+  <p:cSld>
+    <p:spTree>
+      <p:nvGrpSpPr>
+        <p:cNvPr id="1" name="">
+          <a:extLst>
+            <a:ext uri="{FF2B5EF4-FFF2-40B4-BE49-F238E27FC236}">
+              <a16:creationId xmlns:a16="http://schemas.microsoft.com/office/drawing/2014/main" id="{96A402C1-1318-B7F7-BE32-9568E3DCE29A}"/>
+            </a:ext>
+          </a:extLst>
+        </p:cNvPr>
+        <p:cNvGrpSpPr/>
+        <p:nvPr/>
+      </p:nvGrpSpPr>
+      <p:grpSpPr>
+        <a:xfrm>
+          <a:off x="0" y="0"/>
+          <a:ext cx="0" cy="0"/>
+          <a:chOff x="0" y="0"/>
+          <a:chExt cx="0" cy="0"/>
+        </a:xfrm>
+      </p:grpSpPr>
+      <p:sp>
+        <p:nvSpPr>
+          <p:cNvPr id="2" name="Título 1">
+            <a:extLst>
+              <a:ext uri="{FF2B5EF4-FFF2-40B4-BE49-F238E27FC236}">
+                <a16:creationId xmlns:a16="http://schemas.microsoft.com/office/drawing/2014/main" id="{814A6CD1-53D2-C1E0-A991-737210E13413}"/>
+              </a:ext>
+            </a:extLst>
+          </p:cNvPr>
+          <p:cNvSpPr>
+            <a:spLocks noGrp="1"/>
+          </p:cNvSpPr>
+          <p:nvPr>
+            <p:ph type="title"/>
+          </p:nvPr>
+        </p:nvSpPr>
+        <p:spPr>
+          <a:xfrm>
+            <a:off x="1154953" y="1007807"/>
+            <a:ext cx="7261460" cy="997974"/>
+          </a:xfrm>
+        </p:spPr>
+        <p:txBody>
+          <a:bodyPr/>
+          <a:lstStyle/>
+          <a:p>
+            <a:r>
+              <a:rPr lang="eu-ES" sz="3200" dirty="0"/>
+              <a:t>SISTEMA ERAGILEAK EZARTZEA</a:t>
+            </a:r>
+            <a:endParaRPr lang="eu-ES" sz="3200" noProof="0" dirty="0"/>
+          </a:p>
+        </p:txBody>
+      </p:sp>
+      <p:sp>
+        <p:nvSpPr>
+          <p:cNvPr id="3" name="Marcador de contenido 2">
+            <a:extLst>
+              <a:ext uri="{FF2B5EF4-FFF2-40B4-BE49-F238E27FC236}">
+                <a16:creationId xmlns:a16="http://schemas.microsoft.com/office/drawing/2014/main" id="{E03B0347-A9ED-01A6-EECD-6ACAB9BA7AF0}"/>
+              </a:ext>
+            </a:extLst>
+          </p:cNvPr>
+          <p:cNvSpPr>
+            <a:spLocks noGrp="1"/>
+          </p:cNvSpPr>
+          <p:nvPr>
+            <p:ph idx="1"/>
+          </p:nvPr>
+        </p:nvSpPr>
+        <p:spPr>
+          <a:xfrm>
+            <a:off x="1195583" y="3045377"/>
+            <a:ext cx="2314533" cy="2003323"/>
+          </a:xfrm>
+        </p:spPr>
+        <p:txBody>
+          <a:bodyPr>
+            <a:normAutofit/>
+          </a:bodyPr>
+          <a:lstStyle/>
+          <a:p>
+            <a:pPr marL="0" indent="0">
+              <a:buNone/>
+            </a:pPr>
+            <a:r>
+              <a:rPr lang="eu-ES" sz="1400" b="1" noProof="0" dirty="0"/>
+              <a:t>Emandako Espezifikazioak:</a:t>
+            </a:r>
+          </a:p>
+          <a:p>
+            <a:pPr>
+              <a:buFontTx/>
+              <a:buChar char="-"/>
+            </a:pPr>
+            <a:r>
+              <a:rPr lang="eu-ES" sz="1400" b="1" dirty="0"/>
+              <a:t>4gb</a:t>
+            </a:r>
+          </a:p>
+          <a:p>
+            <a:pPr>
+              <a:buFontTx/>
+              <a:buChar char="-"/>
+            </a:pPr>
+            <a:r>
+              <a:rPr lang="eu-ES" sz="1400" b="1" dirty="0"/>
+              <a:t>2 </a:t>
+            </a:r>
+            <a:r>
+              <a:rPr lang="eu-ES" sz="1400" b="1" dirty="0" err="1"/>
+              <a:t>cpu</a:t>
+            </a:r>
+            <a:endParaRPr lang="eu-ES" sz="1400" b="1" dirty="0"/>
+          </a:p>
+          <a:p>
+            <a:pPr>
+              <a:buFontTx/>
+              <a:buChar char="-"/>
+            </a:pPr>
+            <a:r>
+              <a:rPr lang="eu-ES" sz="1400" b="1" dirty="0"/>
+              <a:t>50gb sistema eragile</a:t>
+            </a:r>
+          </a:p>
+          <a:p>
+            <a:pPr>
+              <a:buFontTx/>
+              <a:buChar char="-"/>
+            </a:pPr>
+            <a:endParaRPr lang="eu-ES" sz="1400" b="1" dirty="0"/>
+          </a:p>
+        </p:txBody>
+      </p:sp>
+      <p:sp>
+        <p:nvSpPr>
+          <p:cNvPr id="4" name="Marcador de texto 3">
+            <a:extLst>
+              <a:ext uri="{FF2B5EF4-FFF2-40B4-BE49-F238E27FC236}">
+                <a16:creationId xmlns:a16="http://schemas.microsoft.com/office/drawing/2014/main" id="{FDCB4657-A40B-7750-9540-3C8EA93E37E3}"/>
+              </a:ext>
+            </a:extLst>
+          </p:cNvPr>
+          <p:cNvSpPr>
+            <a:spLocks noGrp="1"/>
+          </p:cNvSpPr>
+          <p:nvPr>
+            <p:ph type="body" sz="half" idx="2"/>
+          </p:nvPr>
+        </p:nvSpPr>
+        <p:spPr>
+          <a:xfrm>
+            <a:off x="1195583" y="2445774"/>
+            <a:ext cx="9669062" cy="425245"/>
+          </a:xfrm>
+        </p:spPr>
+        <p:txBody>
+          <a:bodyPr>
+            <a:normAutofit/>
+          </a:bodyPr>
+          <a:lstStyle/>
+          <a:p>
+            <a:r>
+              <a:rPr lang="es-ES" sz="2000" dirty="0"/>
+              <a:t>9. </a:t>
+            </a:r>
+            <a:r>
+              <a:rPr lang="es-ES" sz="2000" dirty="0" err="1"/>
+              <a:t>Segurtasun</a:t>
+            </a:r>
+            <a:r>
+              <a:rPr lang="es-ES" sz="2000" dirty="0"/>
+              <a:t> Kopiak</a:t>
+            </a:r>
+          </a:p>
+        </p:txBody>
+      </p:sp>
+    </p:spTree>
+    <p:extLst>
+      <p:ext uri="{BB962C8B-B14F-4D97-AF65-F5344CB8AC3E}">
+        <p14:creationId xmlns:p14="http://schemas.microsoft.com/office/powerpoint/2010/main" val="2348976790"/>
+      </p:ext>
+    </p:extLst>
+  </p:cSld>
+  <p:clrMapOvr>
+    <a:masterClrMapping/>
+  </p:clrMapOvr>
+</p:sld>
+</file>
+
 <file path=ppt/slides/slide2.xml><?xml version="1.0" encoding="utf-8"?>
 <p:sld xmlns:a="http://schemas.openxmlformats.org/drawingml/2006/main" xmlns:r="http://schemas.openxmlformats.org/officeDocument/2006/relationships" xmlns:p="http://schemas.openxmlformats.org/presentationml/2006/main">
   <p:cSld>
@@ -7016,23 +8467,252 @@
         <p:spPr>
           <a:xfrm>
             <a:off x="1154953" y="2357120"/>
-            <a:ext cx="5195997" cy="2003323"/>
-          </a:xfrm>
-        </p:spPr>
-        <p:txBody>
-          <a:bodyPr/>
-          <a:lstStyle/>
-          <a:p>
-            <a:pPr marL="0" indent="0">
-              <a:buNone/>
+            <a:ext cx="9788350" cy="4043680"/>
+          </a:xfrm>
+        </p:spPr>
+        <p:txBody>
+          <a:bodyPr>
+            <a:normAutofit/>
+          </a:bodyPr>
+          <a:lstStyle/>
+          <a:p>
+            <a:pPr>
+              <a:buFont typeface="Arial" panose="020B0604020202020204" pitchFamily="34" charset="0"/>
+              <a:buChar char="•"/>
             </a:pPr>
             <a:r>
-              <a:rPr lang="eu-ES" b="1" noProof="0" dirty="0"/>
-              <a:t>Zertarako?</a:t>
-            </a:r>
-            <a:r>
-              <a:rPr lang="eu-ES" noProof="0" dirty="0"/>
-              <a:t> Guztiok sarean modu txukunean eta antolatuan lan egiteko, erronkako helburuak taldeari garbi adierazteko eta gure lana (dokumentazioa) publikatzeko.</a:t>
+              <a:rPr lang="es-ES" dirty="0"/>
+              <a:t>Windows Server-en </a:t>
+            </a:r>
+            <a:r>
+              <a:rPr lang="es-ES" dirty="0" err="1"/>
+              <a:t>Instalazioa</a:t>
+            </a:r>
+            <a:r>
+              <a:rPr lang="es-ES" dirty="0"/>
+              <a:t> eta </a:t>
+            </a:r>
+            <a:r>
+              <a:rPr lang="es-ES" dirty="0" err="1"/>
+              <a:t>Oinarrizko</a:t>
+            </a:r>
+            <a:r>
+              <a:rPr lang="es-ES" dirty="0"/>
+              <a:t> </a:t>
+            </a:r>
+            <a:r>
+              <a:rPr lang="es-ES" dirty="0" err="1"/>
+              <a:t>Konfigurazioa</a:t>
+            </a:r>
+            <a:r>
+              <a:rPr lang="es-ES" dirty="0"/>
+              <a:t> (VirtualBox)</a:t>
+            </a:r>
+          </a:p>
+          <a:p>
+            <a:pPr>
+              <a:buFont typeface="Arial" panose="020B0604020202020204" pitchFamily="34" charset="0"/>
+              <a:buChar char="•"/>
+            </a:pPr>
+            <a:r>
+              <a:rPr lang="es-ES" dirty="0"/>
+              <a:t>IP-a </a:t>
+            </a:r>
+            <a:r>
+              <a:rPr lang="es-ES" dirty="0" err="1"/>
+              <a:t>konfiguratu</a:t>
+            </a:r>
+            <a:endParaRPr lang="es-ES" dirty="0"/>
+          </a:p>
+          <a:p>
+            <a:pPr>
+              <a:buFont typeface="Arial" panose="020B0604020202020204" pitchFamily="34" charset="0"/>
+              <a:buChar char="•"/>
+            </a:pPr>
+            <a:r>
+              <a:rPr lang="es-ES" dirty="0" err="1"/>
+              <a:t>Segurtasun</a:t>
+            </a:r>
+            <a:r>
+              <a:rPr lang="es-ES" dirty="0"/>
+              <a:t> </a:t>
+            </a:r>
+            <a:r>
+              <a:rPr lang="es-ES" dirty="0" err="1"/>
+              <a:t>politikak</a:t>
+            </a:r>
+            <a:r>
+              <a:rPr lang="es-ES" dirty="0"/>
+              <a:t> (</a:t>
+            </a:r>
+            <a:r>
+              <a:rPr lang="es-ES" dirty="0" err="1"/>
+              <a:t>Pasahitzak</a:t>
+            </a:r>
+            <a:r>
+              <a:rPr lang="es-ES" dirty="0"/>
+              <a:t>)</a:t>
+            </a:r>
+          </a:p>
+          <a:p>
+            <a:pPr>
+              <a:buFont typeface="Arial" panose="020B0604020202020204" pitchFamily="34" charset="0"/>
+              <a:buChar char="•"/>
+            </a:pPr>
+            <a:r>
+              <a:rPr lang="es-ES" dirty="0" err="1"/>
+              <a:t>Diskoak</a:t>
+            </a:r>
+            <a:r>
+              <a:rPr lang="es-ES" dirty="0"/>
+              <a:t> eta </a:t>
+            </a:r>
+            <a:r>
+              <a:rPr lang="es-ES" dirty="0" err="1"/>
+              <a:t>bolumenak</a:t>
+            </a:r>
+            <a:endParaRPr lang="es-ES" dirty="0"/>
+          </a:p>
+          <a:p>
+            <a:pPr>
+              <a:buFont typeface="Arial" panose="020B0604020202020204" pitchFamily="34" charset="0"/>
+              <a:buChar char="•"/>
+            </a:pPr>
+            <a:r>
+              <a:rPr lang="es-ES" dirty="0"/>
+              <a:t>RAID</a:t>
+            </a:r>
+          </a:p>
+          <a:p>
+            <a:pPr>
+              <a:buFont typeface="Arial" panose="020B0604020202020204" pitchFamily="34" charset="0"/>
+              <a:buChar char="•"/>
+            </a:pPr>
+            <a:r>
+              <a:rPr lang="es-ES" dirty="0" err="1"/>
+              <a:t>Sistemaren</a:t>
+            </a:r>
+            <a:r>
+              <a:rPr lang="es-ES" dirty="0"/>
+              <a:t> Rol-</a:t>
+            </a:r>
+            <a:r>
+              <a:rPr lang="es-ES" dirty="0" err="1"/>
+              <a:t>ak</a:t>
+            </a:r>
+            <a:r>
+              <a:rPr lang="es-ES" dirty="0"/>
+              <a:t> eta </a:t>
+            </a:r>
+            <a:r>
+              <a:rPr lang="es-ES" dirty="0" err="1"/>
+              <a:t>ezaugarriak</a:t>
+            </a:r>
+            <a:r>
+              <a:rPr lang="es-ES" dirty="0"/>
+              <a:t> </a:t>
+            </a:r>
+            <a:r>
+              <a:rPr lang="es-ES" dirty="0" err="1"/>
+              <a:t>gehitu</a:t>
+            </a:r>
+            <a:r>
+              <a:rPr lang="es-ES" dirty="0"/>
+              <a:t> (IIS, </a:t>
+            </a:r>
+            <a:r>
+              <a:rPr lang="es-ES" dirty="0" err="1"/>
+              <a:t>iSCSI</a:t>
+            </a:r>
+            <a:r>
+              <a:rPr lang="es-ES" dirty="0"/>
+              <a:t> eta </a:t>
+            </a:r>
+            <a:r>
+              <a:rPr lang="es-ES" dirty="0" err="1"/>
+              <a:t>Segurtasun</a:t>
+            </a:r>
+            <a:r>
+              <a:rPr lang="es-ES" dirty="0"/>
+              <a:t> </a:t>
+            </a:r>
+            <a:r>
+              <a:rPr lang="es-ES" dirty="0" err="1"/>
+              <a:t>kopiak</a:t>
+            </a:r>
+            <a:r>
+              <a:rPr lang="es-ES" dirty="0"/>
+              <a:t>)</a:t>
+            </a:r>
+          </a:p>
+          <a:p>
+            <a:pPr>
+              <a:buFont typeface="Arial" panose="020B0604020202020204" pitchFamily="34" charset="0"/>
+              <a:buChar char="•"/>
+            </a:pPr>
+            <a:r>
+              <a:rPr lang="es-ES" dirty="0" err="1"/>
+              <a:t>Erabiltzaileak</a:t>
+            </a:r>
+            <a:r>
+              <a:rPr lang="es-ES" dirty="0"/>
+              <a:t> eta </a:t>
+            </a:r>
+            <a:r>
+              <a:rPr lang="es-ES" dirty="0" err="1"/>
+              <a:t>taldeak</a:t>
+            </a:r>
+            <a:r>
+              <a:rPr lang="es-ES" dirty="0"/>
+              <a:t> (</a:t>
+            </a:r>
+            <a:r>
+              <a:rPr lang="es-ES" dirty="0" err="1"/>
+              <a:t>Baimenak</a:t>
+            </a:r>
+            <a:r>
+              <a:rPr lang="es-ES" dirty="0"/>
+              <a:t> + </a:t>
+            </a:r>
+            <a:r>
+              <a:rPr lang="es-ES" dirty="0" err="1"/>
+              <a:t>Kuotak</a:t>
+            </a:r>
+            <a:r>
+              <a:rPr lang="es-ES" dirty="0"/>
+              <a:t>)</a:t>
+            </a:r>
+          </a:p>
+          <a:p>
+            <a:pPr>
+              <a:buFont typeface="Arial" panose="020B0604020202020204" pitchFamily="34" charset="0"/>
+              <a:buChar char="•"/>
+            </a:pPr>
+            <a:r>
+              <a:rPr lang="es-ES" dirty="0"/>
+              <a:t>Web </a:t>
+            </a:r>
+            <a:r>
+              <a:rPr lang="es-ES" dirty="0" err="1"/>
+              <a:t>Zerbitzaria</a:t>
+            </a:r>
+            <a:r>
+              <a:rPr lang="es-ES" dirty="0"/>
+              <a:t> (IIS)</a:t>
+            </a:r>
+          </a:p>
+          <a:p>
+            <a:pPr>
+              <a:buFont typeface="Arial" panose="020B0604020202020204" pitchFamily="34" charset="0"/>
+              <a:buChar char="•"/>
+            </a:pPr>
+            <a:r>
+              <a:rPr lang="es-ES" dirty="0" err="1"/>
+              <a:t>Segurtasun</a:t>
+            </a:r>
+            <a:r>
+              <a:rPr lang="es-ES" dirty="0"/>
+              <a:t> Kopiak</a:t>
             </a:r>
           </a:p>
         </p:txBody>
@@ -7041,6 +8721,408 @@
     <p:extLst>
       <p:ext uri="{BB962C8B-B14F-4D97-AF65-F5344CB8AC3E}">
         <p14:creationId xmlns:p14="http://schemas.microsoft.com/office/powerpoint/2010/main" val="1850726310"/>
+      </p:ext>
+    </p:extLst>
+  </p:cSld>
+  <p:clrMapOvr>
+    <a:masterClrMapping/>
+  </p:clrMapOvr>
+</p:sld>
+</file>
+
+<file path=ppt/slides/slide8.xml><?xml version="1.0" encoding="utf-8"?>
+<p:sld xmlns:a="http://schemas.openxmlformats.org/drawingml/2006/main" xmlns:r="http://schemas.openxmlformats.org/officeDocument/2006/relationships" xmlns:p="http://schemas.openxmlformats.org/presentationml/2006/main">
+  <p:cSld>
+    <p:spTree>
+      <p:nvGrpSpPr>
+        <p:cNvPr id="1" name="">
+          <a:extLst>
+            <a:ext uri="{FF2B5EF4-FFF2-40B4-BE49-F238E27FC236}">
+              <a16:creationId xmlns:a16="http://schemas.microsoft.com/office/drawing/2014/main" id="{7DF9D6B9-CE8B-0901-C241-6F4CA1778D59}"/>
+            </a:ext>
+          </a:extLst>
+        </p:cNvPr>
+        <p:cNvGrpSpPr/>
+        <p:nvPr/>
+      </p:nvGrpSpPr>
+      <p:grpSpPr>
+        <a:xfrm>
+          <a:off x="0" y="0"/>
+          <a:ext cx="0" cy="0"/>
+          <a:chOff x="0" y="0"/>
+          <a:chExt cx="0" cy="0"/>
+        </a:xfrm>
+      </p:grpSpPr>
+      <p:sp>
+        <p:nvSpPr>
+          <p:cNvPr id="2" name="Título 1">
+            <a:extLst>
+              <a:ext uri="{FF2B5EF4-FFF2-40B4-BE49-F238E27FC236}">
+                <a16:creationId xmlns:a16="http://schemas.microsoft.com/office/drawing/2014/main" id="{FC0FCDAB-423C-E90E-18C4-E1B0999F3628}"/>
+              </a:ext>
+            </a:extLst>
+          </p:cNvPr>
+          <p:cNvSpPr>
+            <a:spLocks noGrp="1"/>
+          </p:cNvSpPr>
+          <p:nvPr>
+            <p:ph type="title"/>
+          </p:nvPr>
+        </p:nvSpPr>
+        <p:spPr>
+          <a:xfrm>
+            <a:off x="1154953" y="1007807"/>
+            <a:ext cx="7261460" cy="997974"/>
+          </a:xfrm>
+        </p:spPr>
+        <p:txBody>
+          <a:bodyPr/>
+          <a:lstStyle/>
+          <a:p>
+            <a:r>
+              <a:rPr lang="eu-ES" sz="3200" dirty="0"/>
+              <a:t>SISTEMA ERAGILEAK EZARTZEA</a:t>
+            </a:r>
+            <a:endParaRPr lang="eu-ES" sz="3200" noProof="0" dirty="0"/>
+          </a:p>
+        </p:txBody>
+      </p:sp>
+      <p:sp>
+        <p:nvSpPr>
+          <p:cNvPr id="3" name="Marcador de contenido 2">
+            <a:extLst>
+              <a:ext uri="{FF2B5EF4-FFF2-40B4-BE49-F238E27FC236}">
+                <a16:creationId xmlns:a16="http://schemas.microsoft.com/office/drawing/2014/main" id="{C3C87448-6213-7BED-CB8C-834563B8ABC6}"/>
+              </a:ext>
+            </a:extLst>
+          </p:cNvPr>
+          <p:cNvSpPr>
+            <a:spLocks noGrp="1"/>
+          </p:cNvSpPr>
+          <p:nvPr>
+            <p:ph idx="1"/>
+          </p:nvPr>
+        </p:nvSpPr>
+        <p:spPr>
+          <a:xfrm>
+            <a:off x="1195583" y="3045377"/>
+            <a:ext cx="2314533" cy="2003323"/>
+          </a:xfrm>
+        </p:spPr>
+        <p:txBody>
+          <a:bodyPr>
+            <a:normAutofit/>
+          </a:bodyPr>
+          <a:lstStyle/>
+          <a:p>
+            <a:pPr marL="0" indent="0">
+              <a:buNone/>
+            </a:pPr>
+            <a:r>
+              <a:rPr lang="eu-ES" sz="1400" b="1" noProof="0" dirty="0"/>
+              <a:t>Emandako Espezifikazioak:</a:t>
+            </a:r>
+          </a:p>
+          <a:p>
+            <a:pPr>
+              <a:buFontTx/>
+              <a:buChar char="-"/>
+            </a:pPr>
+            <a:r>
+              <a:rPr lang="eu-ES" sz="1400" b="1" dirty="0"/>
+              <a:t>4gb</a:t>
+            </a:r>
+          </a:p>
+          <a:p>
+            <a:pPr>
+              <a:buFontTx/>
+              <a:buChar char="-"/>
+            </a:pPr>
+            <a:r>
+              <a:rPr lang="eu-ES" sz="1400" b="1" dirty="0"/>
+              <a:t>2 </a:t>
+            </a:r>
+            <a:r>
+              <a:rPr lang="eu-ES" sz="1400" b="1" dirty="0" err="1"/>
+              <a:t>cpu</a:t>
+            </a:r>
+            <a:endParaRPr lang="eu-ES" sz="1400" b="1" dirty="0"/>
+          </a:p>
+          <a:p>
+            <a:pPr>
+              <a:buFontTx/>
+              <a:buChar char="-"/>
+            </a:pPr>
+            <a:r>
+              <a:rPr lang="eu-ES" sz="1400" b="1" dirty="0"/>
+              <a:t>50gb sistema eragile</a:t>
+            </a:r>
+          </a:p>
+          <a:p>
+            <a:pPr>
+              <a:buFontTx/>
+              <a:buChar char="-"/>
+            </a:pPr>
+            <a:endParaRPr lang="eu-ES" sz="1400" b="1" dirty="0"/>
+          </a:p>
+        </p:txBody>
+      </p:sp>
+      <p:sp>
+        <p:nvSpPr>
+          <p:cNvPr id="4" name="Marcador de texto 3">
+            <a:extLst>
+              <a:ext uri="{FF2B5EF4-FFF2-40B4-BE49-F238E27FC236}">
+                <a16:creationId xmlns:a16="http://schemas.microsoft.com/office/drawing/2014/main" id="{6F8F5F40-08C2-1065-24D0-18E3DB8D3668}"/>
+              </a:ext>
+            </a:extLst>
+          </p:cNvPr>
+          <p:cNvSpPr>
+            <a:spLocks noGrp="1"/>
+          </p:cNvSpPr>
+          <p:nvPr>
+            <p:ph type="body" sz="half" idx="2"/>
+          </p:nvPr>
+        </p:nvSpPr>
+        <p:spPr>
+          <a:xfrm>
+            <a:off x="1195583" y="2445774"/>
+            <a:ext cx="9669062" cy="727423"/>
+          </a:xfrm>
+        </p:spPr>
+        <p:txBody>
+          <a:bodyPr>
+            <a:normAutofit/>
+          </a:bodyPr>
+          <a:lstStyle/>
+          <a:p>
+            <a:r>
+              <a:rPr lang="es-ES" sz="2000" dirty="0"/>
+              <a:t>1. Windows Server-en </a:t>
+            </a:r>
+            <a:r>
+              <a:rPr lang="es-ES" sz="2000" dirty="0" err="1"/>
+              <a:t>Instalazioa</a:t>
+            </a:r>
+            <a:r>
+              <a:rPr lang="es-ES" sz="2000" dirty="0"/>
+              <a:t> eta </a:t>
+            </a:r>
+            <a:r>
+              <a:rPr lang="es-ES" sz="2000" dirty="0" err="1"/>
+              <a:t>Oinarrizko</a:t>
+            </a:r>
+            <a:r>
+              <a:rPr lang="es-ES" sz="2000" dirty="0"/>
+              <a:t> </a:t>
+            </a:r>
+            <a:r>
+              <a:rPr lang="es-ES" sz="2000" dirty="0" err="1"/>
+              <a:t>Konfigurazioa</a:t>
+            </a:r>
+            <a:r>
+              <a:rPr lang="es-ES" sz="2000" dirty="0"/>
+              <a:t> (VirtualBox)</a:t>
+            </a:r>
+          </a:p>
+        </p:txBody>
+      </p:sp>
+    </p:spTree>
+    <p:extLst>
+      <p:ext uri="{BB962C8B-B14F-4D97-AF65-F5344CB8AC3E}">
+        <p14:creationId xmlns:p14="http://schemas.microsoft.com/office/powerpoint/2010/main" val="3848552227"/>
+      </p:ext>
+    </p:extLst>
+  </p:cSld>
+  <p:clrMapOvr>
+    <a:masterClrMapping/>
+  </p:clrMapOvr>
+</p:sld>
+</file>
+
+<file path=ppt/slides/slide9.xml><?xml version="1.0" encoding="utf-8"?>
+<p:sld xmlns:a="http://schemas.openxmlformats.org/drawingml/2006/main" xmlns:r="http://schemas.openxmlformats.org/officeDocument/2006/relationships" xmlns:p="http://schemas.openxmlformats.org/presentationml/2006/main">
+  <p:cSld>
+    <p:spTree>
+      <p:nvGrpSpPr>
+        <p:cNvPr id="1" name="">
+          <a:extLst>
+            <a:ext uri="{FF2B5EF4-FFF2-40B4-BE49-F238E27FC236}">
+              <a16:creationId xmlns:a16="http://schemas.microsoft.com/office/drawing/2014/main" id="{02D6CF1C-099D-C058-4E63-D634BA112985}"/>
+            </a:ext>
+          </a:extLst>
+        </p:cNvPr>
+        <p:cNvGrpSpPr/>
+        <p:nvPr/>
+      </p:nvGrpSpPr>
+      <p:grpSpPr>
+        <a:xfrm>
+          <a:off x="0" y="0"/>
+          <a:ext cx="0" cy="0"/>
+          <a:chOff x="0" y="0"/>
+          <a:chExt cx="0" cy="0"/>
+        </a:xfrm>
+      </p:grpSpPr>
+      <p:sp>
+        <p:nvSpPr>
+          <p:cNvPr id="2" name="Título 1">
+            <a:extLst>
+              <a:ext uri="{FF2B5EF4-FFF2-40B4-BE49-F238E27FC236}">
+                <a16:creationId xmlns:a16="http://schemas.microsoft.com/office/drawing/2014/main" id="{B836F0EB-4AFF-4DD1-4441-6C23A912980E}"/>
+              </a:ext>
+            </a:extLst>
+          </p:cNvPr>
+          <p:cNvSpPr>
+            <a:spLocks noGrp="1"/>
+          </p:cNvSpPr>
+          <p:nvPr>
+            <p:ph type="title"/>
+          </p:nvPr>
+        </p:nvSpPr>
+        <p:spPr>
+          <a:xfrm>
+            <a:off x="1154953" y="1007807"/>
+            <a:ext cx="7261460" cy="997974"/>
+          </a:xfrm>
+        </p:spPr>
+        <p:txBody>
+          <a:bodyPr/>
+          <a:lstStyle/>
+          <a:p>
+            <a:r>
+              <a:rPr lang="eu-ES" sz="3200" dirty="0"/>
+              <a:t>SISTEMA ERAGILEAK EZARTZEA</a:t>
+            </a:r>
+            <a:endParaRPr lang="eu-ES" sz="3200" noProof="0" dirty="0"/>
+          </a:p>
+        </p:txBody>
+      </p:sp>
+      <p:sp>
+        <p:nvSpPr>
+          <p:cNvPr id="3" name="Marcador de contenido 2">
+            <a:extLst>
+              <a:ext uri="{FF2B5EF4-FFF2-40B4-BE49-F238E27FC236}">
+                <a16:creationId xmlns:a16="http://schemas.microsoft.com/office/drawing/2014/main" id="{F2821E9E-BE89-384F-9D61-77828537DD90}"/>
+              </a:ext>
+            </a:extLst>
+          </p:cNvPr>
+          <p:cNvSpPr>
+            <a:spLocks noGrp="1"/>
+          </p:cNvSpPr>
+          <p:nvPr>
+            <p:ph idx="1"/>
+          </p:nvPr>
+        </p:nvSpPr>
+        <p:spPr>
+          <a:xfrm>
+            <a:off x="1195583" y="3045377"/>
+            <a:ext cx="2314533" cy="2003323"/>
+          </a:xfrm>
+        </p:spPr>
+        <p:txBody>
+          <a:bodyPr>
+            <a:normAutofit/>
+          </a:bodyPr>
+          <a:lstStyle/>
+          <a:p>
+            <a:pPr marL="0" indent="0">
+              <a:buNone/>
+            </a:pPr>
+            <a:r>
+              <a:rPr lang="eu-ES" sz="1400" b="1" noProof="0" dirty="0"/>
+              <a:t>Emandako Espezifikazioak:</a:t>
+            </a:r>
+          </a:p>
+          <a:p>
+            <a:pPr>
+              <a:buFontTx/>
+              <a:buChar char="-"/>
+            </a:pPr>
+            <a:r>
+              <a:rPr lang="eu-ES" sz="1400" b="1" dirty="0"/>
+              <a:t>4gb</a:t>
+            </a:r>
+          </a:p>
+          <a:p>
+            <a:pPr>
+              <a:buFontTx/>
+              <a:buChar char="-"/>
+            </a:pPr>
+            <a:r>
+              <a:rPr lang="eu-ES" sz="1400" b="1" dirty="0"/>
+              <a:t>2 </a:t>
+            </a:r>
+            <a:r>
+              <a:rPr lang="eu-ES" sz="1400" b="1" dirty="0" err="1"/>
+              <a:t>cpu</a:t>
+            </a:r>
+            <a:endParaRPr lang="eu-ES" sz="1400" b="1" dirty="0"/>
+          </a:p>
+          <a:p>
+            <a:pPr>
+              <a:buFontTx/>
+              <a:buChar char="-"/>
+            </a:pPr>
+            <a:r>
+              <a:rPr lang="eu-ES" sz="1400" b="1" dirty="0"/>
+              <a:t>50gb sistema eragile</a:t>
+            </a:r>
+          </a:p>
+          <a:p>
+            <a:pPr>
+              <a:buFontTx/>
+              <a:buChar char="-"/>
+            </a:pPr>
+            <a:endParaRPr lang="eu-ES" sz="1400" b="1" dirty="0"/>
+          </a:p>
+        </p:txBody>
+      </p:sp>
+      <p:sp>
+        <p:nvSpPr>
+          <p:cNvPr id="4" name="Marcador de texto 3">
+            <a:extLst>
+              <a:ext uri="{FF2B5EF4-FFF2-40B4-BE49-F238E27FC236}">
+                <a16:creationId xmlns:a16="http://schemas.microsoft.com/office/drawing/2014/main" id="{D9B8A1D4-49A4-26D5-7FF0-B361CB7F97AD}"/>
+              </a:ext>
+            </a:extLst>
+          </p:cNvPr>
+          <p:cNvSpPr>
+            <a:spLocks noGrp="1"/>
+          </p:cNvSpPr>
+          <p:nvPr>
+            <p:ph type="body" sz="half" idx="2"/>
+          </p:nvPr>
+        </p:nvSpPr>
+        <p:spPr>
+          <a:xfrm>
+            <a:off x="1195583" y="2445774"/>
+            <a:ext cx="9669062" cy="425245"/>
+          </a:xfrm>
+        </p:spPr>
+        <p:txBody>
+          <a:bodyPr>
+            <a:normAutofit/>
+          </a:bodyPr>
+          <a:lstStyle/>
+          <a:p>
+            <a:r>
+              <a:rPr lang="es-ES" sz="2000" dirty="0"/>
+              <a:t>2. IP-a </a:t>
+            </a:r>
+            <a:r>
+              <a:rPr lang="es-ES" sz="2000" dirty="0" err="1"/>
+              <a:t>konfiguratu</a:t>
+            </a:r>
+            <a:endParaRPr lang="es-ES" sz="2000" dirty="0"/>
+          </a:p>
+          <a:p>
+            <a:endParaRPr lang="es-ES" sz="2000" dirty="0"/>
+          </a:p>
+        </p:txBody>
+      </p:sp>
+    </p:spTree>
+    <p:extLst>
+      <p:ext uri="{BB962C8B-B14F-4D97-AF65-F5344CB8AC3E}">
+        <p14:creationId xmlns:p14="http://schemas.microsoft.com/office/powerpoint/2010/main" val="1167637688"/>
       </p:ext>
     </p:extLst>
   </p:cSld>

--- a/Aurkezpena/1.Erronka Aurkezpena.pptx
+++ b/Aurkezpena/1.Erronka Aurkezpena.pptx
@@ -313,7 +313,7 @@
           <a:p>
             <a:fld id="{1C60CDA0-A541-4C6F-AA03-59A25C3812BD}" type="datetimeFigureOut">
               <a:rPr lang="es-ES" smtClean="0"/>
-              <a:t>27/10/2026</a:t>
+              <a:t>28/10/2026</a:t>
             </a:fld>
             <a:endParaRPr lang="es-ES"/>
           </a:p>
@@ -588,7 +588,7 @@
           <a:p>
             <a:fld id="{1C60CDA0-A541-4C6F-AA03-59A25C3812BD}" type="datetimeFigureOut">
               <a:rPr lang="es-ES" smtClean="0"/>
-              <a:t>27/10/2026</a:t>
+              <a:t>28/10/2026</a:t>
             </a:fld>
             <a:endParaRPr lang="es-ES"/>
           </a:p>
@@ -782,7 +782,7 @@
           <a:p>
             <a:fld id="{1C60CDA0-A541-4C6F-AA03-59A25C3812BD}" type="datetimeFigureOut">
               <a:rPr lang="es-ES" smtClean="0"/>
-              <a:t>27/10/2026</a:t>
+              <a:t>28/10/2026</a:t>
             </a:fld>
             <a:endParaRPr lang="es-ES"/>
           </a:p>
@@ -1055,7 +1055,7 @@
           <a:p>
             <a:fld id="{1C60CDA0-A541-4C6F-AA03-59A25C3812BD}" type="datetimeFigureOut">
               <a:rPr lang="es-ES" smtClean="0"/>
-              <a:t>27/10/2026</a:t>
+              <a:t>28/10/2026</a:t>
             </a:fld>
             <a:endParaRPr lang="es-ES"/>
           </a:p>
@@ -1396,7 +1396,7 @@
           <a:p>
             <a:fld id="{1C60CDA0-A541-4C6F-AA03-59A25C3812BD}" type="datetimeFigureOut">
               <a:rPr lang="es-ES" smtClean="0"/>
-              <a:t>27/10/2026</a:t>
+              <a:t>28/10/2026</a:t>
             </a:fld>
             <a:endParaRPr lang="es-ES"/>
           </a:p>
@@ -2019,7 +2019,7 @@
           <a:p>
             <a:fld id="{1C60CDA0-A541-4C6F-AA03-59A25C3812BD}" type="datetimeFigureOut">
               <a:rPr lang="es-ES" smtClean="0"/>
-              <a:t>27/10/2026</a:t>
+              <a:t>28/10/2026</a:t>
             </a:fld>
             <a:endParaRPr lang="es-ES"/>
           </a:p>
@@ -2879,7 +2879,7 @@
           <a:p>
             <a:fld id="{1C60CDA0-A541-4C6F-AA03-59A25C3812BD}" type="datetimeFigureOut">
               <a:rPr lang="es-ES" smtClean="0"/>
-              <a:t>27/10/2026</a:t>
+              <a:t>28/10/2026</a:t>
             </a:fld>
             <a:endParaRPr lang="es-ES"/>
           </a:p>
@@ -3049,7 +3049,7 @@
           <a:p>
             <a:fld id="{1C60CDA0-A541-4C6F-AA03-59A25C3812BD}" type="datetimeFigureOut">
               <a:rPr lang="es-ES" smtClean="0"/>
-              <a:t>27/10/2026</a:t>
+              <a:t>28/10/2026</a:t>
             </a:fld>
             <a:endParaRPr lang="es-ES"/>
           </a:p>
@@ -3229,7 +3229,7 @@
           <a:p>
             <a:fld id="{1C60CDA0-A541-4C6F-AA03-59A25C3812BD}" type="datetimeFigureOut">
               <a:rPr lang="es-ES" smtClean="0"/>
-              <a:t>27/10/2026</a:t>
+              <a:t>28/10/2026</a:t>
             </a:fld>
             <a:endParaRPr lang="es-ES"/>
           </a:p>
@@ -3399,7 +3399,7 @@
           <a:p>
             <a:fld id="{1C60CDA0-A541-4C6F-AA03-59A25C3812BD}" type="datetimeFigureOut">
               <a:rPr lang="es-ES" smtClean="0"/>
-              <a:t>27/10/2026</a:t>
+              <a:t>28/10/2026</a:t>
             </a:fld>
             <a:endParaRPr lang="es-ES"/>
           </a:p>
@@ -3646,7 +3646,7 @@
           <a:p>
             <a:fld id="{1C60CDA0-A541-4C6F-AA03-59A25C3812BD}" type="datetimeFigureOut">
               <a:rPr lang="es-ES" smtClean="0"/>
-              <a:t>27/10/2026</a:t>
+              <a:t>28/10/2026</a:t>
             </a:fld>
             <a:endParaRPr lang="es-ES"/>
           </a:p>
@@ -3938,7 +3938,7 @@
           <a:p>
             <a:fld id="{1C60CDA0-A541-4C6F-AA03-59A25C3812BD}" type="datetimeFigureOut">
               <a:rPr lang="es-ES" smtClean="0"/>
-              <a:t>27/10/2026</a:t>
+              <a:t>28/10/2026</a:t>
             </a:fld>
             <a:endParaRPr lang="es-ES"/>
           </a:p>
@@ -4382,7 +4382,7 @@
           <a:p>
             <a:fld id="{1C60CDA0-A541-4C6F-AA03-59A25C3812BD}" type="datetimeFigureOut">
               <a:rPr lang="es-ES" smtClean="0"/>
-              <a:t>27/10/2026</a:t>
+              <a:t>28/10/2026</a:t>
             </a:fld>
             <a:endParaRPr lang="es-ES"/>
           </a:p>
@@ -4500,7 +4500,7 @@
           <a:p>
             <a:fld id="{1C60CDA0-A541-4C6F-AA03-59A25C3812BD}" type="datetimeFigureOut">
               <a:rPr lang="es-ES" smtClean="0"/>
-              <a:t>27/10/2026</a:t>
+              <a:t>28/10/2026</a:t>
             </a:fld>
             <a:endParaRPr lang="es-ES"/>
           </a:p>
@@ -4595,7 +4595,7 @@
           <a:p>
             <a:fld id="{1C60CDA0-A541-4C6F-AA03-59A25C3812BD}" type="datetimeFigureOut">
               <a:rPr lang="es-ES" smtClean="0"/>
-              <a:t>27/10/2026</a:t>
+              <a:t>28/10/2026</a:t>
             </a:fld>
             <a:endParaRPr lang="es-ES"/>
           </a:p>
@@ -4874,7 +4874,7 @@
           <a:p>
             <a:fld id="{1C60CDA0-A541-4C6F-AA03-59A25C3812BD}" type="datetimeFigureOut">
               <a:rPr lang="es-ES" smtClean="0"/>
-              <a:t>27/10/2026</a:t>
+              <a:t>28/10/2026</a:t>
             </a:fld>
             <a:endParaRPr lang="es-ES"/>
           </a:p>
@@ -5149,7 +5149,7 @@
           <a:p>
             <a:fld id="{1C60CDA0-A541-4C6F-AA03-59A25C3812BD}" type="datetimeFigureOut">
               <a:rPr lang="es-ES" smtClean="0"/>
-              <a:t>27/10/2026</a:t>
+              <a:t>28/10/2026</a:t>
             </a:fld>
             <a:endParaRPr lang="es-ES"/>
           </a:p>
@@ -5578,7 +5578,7 @@
           <a:p>
             <a:fld id="{1C60CDA0-A541-4C6F-AA03-59A25C3812BD}" type="datetimeFigureOut">
               <a:rPr lang="es-ES" smtClean="0"/>
-              <a:t>27/10/2026</a:t>
+              <a:t>28/10/2026</a:t>
             </a:fld>
             <a:endParaRPr lang="es-ES"/>
           </a:p>
@@ -6480,7 +6480,7 @@
         <p:spPr>
           <a:xfrm>
             <a:off x="1195583" y="3045377"/>
-            <a:ext cx="2314533" cy="2003323"/>
+            <a:ext cx="6129449" cy="1035010"/>
           </a:xfrm>
         </p:spPr>
         <p:txBody>
@@ -6494,50 +6494,23 @@
             </a:pPr>
             <a:r>
               <a:rPr lang="eu-ES" sz="1400" b="1" noProof="0" dirty="0"/>
-              <a:t>Emandako Espezifikazioak:</a:t>
-            </a:r>
-          </a:p>
-          <a:p>
-            <a:pPr>
-              <a:buFontTx/>
-              <a:buChar char="-"/>
+              <a:t>Hardwarea: 3 disko gogor, bakoitza 50GB </a:t>
+            </a:r>
+            <a:r>
+              <a:rPr lang="eu-ES" sz="1400" b="1" noProof="0" dirty="0" err="1"/>
+              <a:t>koa</a:t>
+            </a:r>
+            <a:endParaRPr lang="eu-ES" sz="1400" b="1" noProof="0" dirty="0"/>
+          </a:p>
+          <a:p>
+            <a:pPr marL="0" indent="0">
+              <a:buNone/>
             </a:pPr>
             <a:r>
               <a:rPr lang="eu-ES" sz="1400" b="1" dirty="0"/>
-              <a:t>4gb</a:t>
-            </a:r>
-          </a:p>
-          <a:p>
-            <a:pPr>
-              <a:buFontTx/>
-              <a:buChar char="-"/>
-            </a:pPr>
-            <a:r>
-              <a:rPr lang="eu-ES" sz="1400" b="1" dirty="0"/>
-              <a:t>2 </a:t>
-            </a:r>
-            <a:r>
-              <a:rPr lang="eu-ES" sz="1400" b="1" dirty="0" err="1"/>
-              <a:t>cpu</a:t>
-            </a:r>
-            <a:endParaRPr lang="eu-ES" sz="1400" b="1" dirty="0"/>
-          </a:p>
-          <a:p>
-            <a:pPr>
-              <a:buFontTx/>
-              <a:buChar char="-"/>
-            </a:pPr>
-            <a:r>
-              <a:rPr lang="eu-ES" sz="1400" b="1" dirty="0"/>
-              <a:t>50gb sistema eragile</a:t>
-            </a:r>
-          </a:p>
-          <a:p>
-            <a:pPr>
-              <a:buFontTx/>
-              <a:buChar char="-"/>
-            </a:pPr>
-            <a:endParaRPr lang="eu-ES" sz="1400" b="1" dirty="0"/>
+              <a:t>Bolumen kopurua: 1 (100GB)</a:t>
+            </a:r>
+            <a:endParaRPr lang="eu-ES" sz="1400" b="1" noProof="0" dirty="0"/>
           </a:p>
         </p:txBody>
       </p:sp>
@@ -6589,6 +6562,42 @@
           </a:p>
         </p:txBody>
       </p:sp>
+      <p:pic>
+        <p:nvPicPr>
+          <p:cNvPr id="6" name="Imagen 5">
+            <a:extLst>
+              <a:ext uri="{FF2B5EF4-FFF2-40B4-BE49-F238E27FC236}">
+                <a16:creationId xmlns:a16="http://schemas.microsoft.com/office/drawing/2014/main" id="{52F9C7EC-0306-2D75-F887-9F3456C40F87}"/>
+              </a:ext>
+            </a:extLst>
+          </p:cNvPr>
+          <p:cNvPicPr>
+            <a:picLocks noChangeAspect="1"/>
+          </p:cNvPicPr>
+          <p:nvPr/>
+        </p:nvPicPr>
+        <p:blipFill>
+          <a:blip r:embed="rId2">
+            <a:extLst>
+              <a:ext uri="{28A0092B-C50C-407E-A947-70E740481C1C}">
+                <a14:useLocalDpi xmlns:a14="http://schemas.microsoft.com/office/drawing/2010/main" val="0"/>
+              </a:ext>
+            </a:extLst>
+          </a:blip>
+          <a:stretch>
+            <a:fillRect/>
+          </a:stretch>
+        </p:blipFill>
+        <p:spPr>
+          <a:xfrm>
+            <a:off x="6764593" y="2015613"/>
+            <a:ext cx="4272453" cy="4002045"/>
+          </a:xfrm>
+          <a:prstGeom prst="rect">
+            <a:avLst/>
+          </a:prstGeom>
+        </p:spPr>
+      </p:pic>
     </p:spTree>
     <p:extLst>
       <p:ext uri="{BB962C8B-B14F-4D97-AF65-F5344CB8AC3E}">
@@ -6678,7 +6687,7 @@
         <p:spPr>
           <a:xfrm>
             <a:off x="1195583" y="3045377"/>
-            <a:ext cx="2314533" cy="2003323"/>
+            <a:ext cx="4526792" cy="2003323"/>
           </a:xfrm>
         </p:spPr>
         <p:txBody>
@@ -6692,7 +6701,7 @@
             </a:pPr>
             <a:r>
               <a:rPr lang="eu-ES" sz="1400" b="1" noProof="0" dirty="0"/>
-              <a:t>Emandako Espezifikazioak:</a:t>
+              <a:t>Sortu dugun RAID = RAID 5</a:t>
             </a:r>
           </a:p>
           <a:p>
@@ -6702,7 +6711,15 @@
             </a:pPr>
             <a:r>
               <a:rPr lang="eu-ES" sz="1400" b="1" dirty="0"/>
-              <a:t>4gb</a:t>
+              <a:t>Segurtasuna (</a:t>
+            </a:r>
+            <a:r>
+              <a:rPr lang="eu-ES" sz="1400" b="1" dirty="0" err="1"/>
+              <a:t>Parietatea</a:t>
+            </a:r>
+            <a:r>
+              <a:rPr lang="eu-ES" sz="1400" b="1" dirty="0"/>
+              <a:t>)</a:t>
             </a:r>
           </a:p>
           <a:p>
@@ -6712,13 +6729,16 @@
             </a:pPr>
             <a:r>
               <a:rPr lang="eu-ES" sz="1400" b="1" dirty="0"/>
-              <a:t>2 </a:t>
+              <a:t>3 diskoetatik 2ren memoria erabilgarri dugu (3.na </a:t>
             </a:r>
             <a:r>
               <a:rPr lang="eu-ES" sz="1400" b="1" dirty="0" err="1"/>
-              <a:t>cpu</a:t>
-            </a:r>
-            <a:endParaRPr lang="eu-ES" sz="1400" b="1" dirty="0"/>
+              <a:t>parietaterako</a:t>
+            </a:r>
+            <a:r>
+              <a:rPr lang="eu-ES" sz="1400" b="1" dirty="0"/>
+              <a:t> geratuko da.)</a:t>
+            </a:r>
           </a:p>
           <a:p>
             <a:pPr>
@@ -6727,15 +6747,8 @@
             </a:pPr>
             <a:r>
               <a:rPr lang="eu-ES" sz="1400" b="1" dirty="0"/>
-              <a:t>50gb sistema eragile</a:t>
-            </a:r>
-          </a:p>
-          <a:p>
-            <a:pPr>
-              <a:buFontTx/>
-              <a:buChar char="-"/>
-            </a:pPr>
-            <a:endParaRPr lang="eu-ES" sz="1400" b="1" dirty="0"/>
+              <a:t>Disko 1 apurtzen bada, sistemak martxan jarraitu dezake datuak galdu gabe disko gogorra aldatu arte.</a:t>
+            </a:r>
           </a:p>
         </p:txBody>
       </p:sp>
@@ -6774,6 +6787,42 @@
           </a:p>
         </p:txBody>
       </p:sp>
+      <p:pic>
+        <p:nvPicPr>
+          <p:cNvPr id="6" name="Imagen 5">
+            <a:extLst>
+              <a:ext uri="{FF2B5EF4-FFF2-40B4-BE49-F238E27FC236}">
+                <a16:creationId xmlns:a16="http://schemas.microsoft.com/office/drawing/2014/main" id="{DF95EDD8-B103-FE11-CCCD-5FC19E404847}"/>
+              </a:ext>
+            </a:extLst>
+          </p:cNvPr>
+          <p:cNvPicPr>
+            <a:picLocks noChangeAspect="1"/>
+          </p:cNvPicPr>
+          <p:nvPr/>
+        </p:nvPicPr>
+        <p:blipFill>
+          <a:blip r:embed="rId2">
+            <a:extLst>
+              <a:ext uri="{28A0092B-C50C-407E-A947-70E740481C1C}">
+                <a14:useLocalDpi xmlns:a14="http://schemas.microsoft.com/office/drawing/2010/main" val="0"/>
+              </a:ext>
+            </a:extLst>
+          </a:blip>
+          <a:stretch>
+            <a:fillRect/>
+          </a:stretch>
+        </p:blipFill>
+        <p:spPr>
+          <a:xfrm>
+            <a:off x="6874223" y="2445774"/>
+            <a:ext cx="4206732" cy="3783227"/>
+          </a:xfrm>
+          <a:prstGeom prst="rect">
+            <a:avLst/>
+          </a:prstGeom>
+        </p:spPr>
+      </p:pic>
     </p:spTree>
     <p:extLst>
       <p:ext uri="{BB962C8B-B14F-4D97-AF65-F5344CB8AC3E}">
@@ -6863,22 +6912,19 @@
         <p:spPr>
           <a:xfrm>
             <a:off x="1195583" y="3045377"/>
-            <a:ext cx="2314533" cy="2003323"/>
+            <a:ext cx="4379307" cy="2003323"/>
           </a:xfrm>
         </p:spPr>
         <p:txBody>
           <a:bodyPr>
-            <a:normAutofit/>
+            <a:normAutofit lnSpcReduction="10000"/>
           </a:bodyPr>
           <a:lstStyle/>
           <a:p>
             <a:pPr marL="0" indent="0">
               <a:buNone/>
             </a:pPr>
-            <a:r>
-              <a:rPr lang="eu-ES" sz="1400" b="1" noProof="0" dirty="0"/>
-              <a:t>Emandako Espezifikazioak:</a:t>
-            </a:r>
+            <a:endParaRPr lang="eu-ES" sz="1400" b="1" noProof="0" dirty="0"/>
           </a:p>
           <a:p>
             <a:pPr>
@@ -6886,8 +6932,8 @@
               <a:buChar char="-"/>
             </a:pPr>
             <a:r>
-              <a:rPr lang="eu-ES" sz="1400" b="1" dirty="0"/>
-              <a:t>4gb</a:t>
+              <a:rPr lang="eu-ES" sz="2400" b="1" dirty="0"/>
+              <a:t>IIS web zerbitzaria</a:t>
             </a:r>
           </a:p>
           <a:p>
@@ -6896,14 +6942,13 @@
               <a:buChar char="-"/>
             </a:pPr>
             <a:r>
-              <a:rPr lang="eu-ES" sz="1400" b="1" dirty="0"/>
-              <a:t>2 </a:t>
-            </a:r>
-            <a:r>
-              <a:rPr lang="eu-ES" sz="1400" b="1" dirty="0" err="1"/>
-              <a:t>cpu</a:t>
-            </a:r>
-            <a:endParaRPr lang="eu-ES" sz="1400" b="1" dirty="0"/>
+              <a:rPr lang="eu-ES" sz="2400" b="1" dirty="0" err="1"/>
+              <a:t>Iscsi</a:t>
+            </a:r>
+            <a:r>
+              <a:rPr lang="eu-ES" sz="2400" b="1" dirty="0"/>
+              <a:t> (Karpeten kuoten administratzailea)</a:t>
+            </a:r>
           </a:p>
           <a:p>
             <a:pPr>
@@ -6911,16 +6956,22 @@
               <a:buChar char="-"/>
             </a:pPr>
             <a:r>
-              <a:rPr lang="eu-ES" sz="1400" b="1" dirty="0"/>
-              <a:t>50gb sistema eragile</a:t>
-            </a:r>
-          </a:p>
-          <a:p>
-            <a:pPr>
-              <a:buFontTx/>
-              <a:buChar char="-"/>
-            </a:pPr>
-            <a:endParaRPr lang="eu-ES" sz="1400" b="1" dirty="0"/>
+              <a:rPr lang="eu-ES" sz="2400" b="1" dirty="0"/>
+              <a:t>Windows </a:t>
+            </a:r>
+            <a:r>
+              <a:rPr lang="eu-ES" sz="2400" b="1" dirty="0" err="1"/>
+              <a:t>server</a:t>
+            </a:r>
+            <a:r>
+              <a:rPr lang="eu-ES" sz="2400" b="1" dirty="0"/>
+              <a:t> </a:t>
+            </a:r>
+            <a:r>
+              <a:rPr lang="eu-ES" sz="2400" b="1" dirty="0" err="1"/>
+              <a:t>backup</a:t>
+            </a:r>
+            <a:endParaRPr lang="eu-ES" sz="2400" b="1" dirty="0"/>
           </a:p>
         </p:txBody>
       </p:sp>
@@ -6984,37 +7035,46 @@
               <a:rPr lang="es-ES" sz="2000" dirty="0" err="1"/>
               <a:t>gehitu</a:t>
             </a:r>
-            <a:r>
-              <a:rPr lang="es-ES" sz="2000" dirty="0"/>
-              <a:t> (IIS, </a:t>
-            </a:r>
-            <a:r>
-              <a:rPr lang="es-ES" sz="2000" dirty="0" err="1"/>
-              <a:t>iSCSI</a:t>
-            </a:r>
-            <a:r>
-              <a:rPr lang="es-ES" sz="2000" dirty="0"/>
-              <a:t> eta </a:t>
-            </a:r>
-            <a:r>
-              <a:rPr lang="es-ES" sz="2000" dirty="0" err="1"/>
-              <a:t>Segurtasun</a:t>
-            </a:r>
-            <a:r>
-              <a:rPr lang="es-ES" sz="2000" dirty="0"/>
-              <a:t> </a:t>
-            </a:r>
-            <a:r>
-              <a:rPr lang="es-ES" sz="2000" dirty="0" err="1"/>
-              <a:t>kopiak</a:t>
-            </a:r>
-            <a:r>
-              <a:rPr lang="es-ES" sz="2000" dirty="0"/>
-              <a:t>)</a:t>
-            </a:r>
-          </a:p>
-        </p:txBody>
-      </p:sp>
+            <a:endParaRPr lang="es-ES" sz="2000" dirty="0"/>
+          </a:p>
+        </p:txBody>
+      </p:sp>
+      <p:pic>
+        <p:nvPicPr>
+          <p:cNvPr id="6" name="Imagen 5">
+            <a:extLst>
+              <a:ext uri="{FF2B5EF4-FFF2-40B4-BE49-F238E27FC236}">
+                <a16:creationId xmlns:a16="http://schemas.microsoft.com/office/drawing/2014/main" id="{4343D234-A3DE-9FF8-A439-848D5F5BEE81}"/>
+              </a:ext>
+            </a:extLst>
+          </p:cNvPr>
+          <p:cNvPicPr>
+            <a:picLocks noChangeAspect="1"/>
+          </p:cNvPicPr>
+          <p:nvPr/>
+        </p:nvPicPr>
+        <p:blipFill>
+          <a:blip r:embed="rId2">
+            <a:extLst>
+              <a:ext uri="{28A0092B-C50C-407E-A947-70E740481C1C}">
+                <a14:useLocalDpi xmlns:a14="http://schemas.microsoft.com/office/drawing/2010/main" val="0"/>
+              </a:ext>
+            </a:extLst>
+          </a:blip>
+          <a:stretch>
+            <a:fillRect/>
+          </a:stretch>
+        </p:blipFill>
+        <p:spPr>
+          <a:xfrm>
+            <a:off x="6882601" y="2445774"/>
+            <a:ext cx="4113816" cy="3849328"/>
+          </a:xfrm>
+          <a:prstGeom prst="rect">
+            <a:avLst/>
+          </a:prstGeom>
+        </p:spPr>
+      </p:pic>
     </p:spTree>
     <p:extLst>
       <p:ext uri="{BB962C8B-B14F-4D97-AF65-F5344CB8AC3E}">
@@ -7320,8 +7380,8 @@
         </p:nvSpPr>
         <p:spPr>
           <a:xfrm>
-            <a:off x="1195583" y="3045377"/>
-            <a:ext cx="2314533" cy="2003323"/>
+            <a:off x="989105" y="3311012"/>
+            <a:ext cx="5506387" cy="1981201"/>
           </a:xfrm>
         </p:spPr>
         <p:txBody>
@@ -7329,23 +7389,14 @@
             <a:normAutofit/>
           </a:bodyPr>
           <a:lstStyle/>
-          <a:p>
-            <a:pPr marL="0" indent="0">
-              <a:buNone/>
-            </a:pPr>
-            <a:r>
-              <a:rPr lang="eu-ES" sz="1400" b="1" noProof="0" dirty="0"/>
-              <a:t>Emandako Espezifikazioak:</a:t>
-            </a:r>
-          </a:p>
           <a:p>
             <a:pPr>
               <a:buFontTx/>
               <a:buChar char="-"/>
             </a:pPr>
             <a:r>
-              <a:rPr lang="eu-ES" sz="1400" b="1" dirty="0"/>
-              <a:t>4gb</a:t>
+              <a:rPr lang="eu-ES" sz="1800" b="1" dirty="0"/>
+              <a:t>ISS ADMINSITRATZAILETIK KONFIGURATU </a:t>
             </a:r>
           </a:p>
           <a:p>
@@ -7354,14 +7405,9 @@
               <a:buChar char="-"/>
             </a:pPr>
             <a:r>
-              <a:rPr lang="eu-ES" sz="1400" b="1" dirty="0"/>
-              <a:t>2 </a:t>
-            </a:r>
-            <a:r>
-              <a:rPr lang="eu-ES" sz="1400" b="1" dirty="0" err="1"/>
-              <a:t>cpu</a:t>
-            </a:r>
-            <a:endParaRPr lang="eu-ES" sz="1400" b="1" dirty="0"/>
+              <a:rPr lang="eu-ES" sz="1800" b="1" dirty="0"/>
+              <a:t>ZERBITZARIKO ERABILTZAILEEN BAIMENAK MUGATU + KANPOKO ERABILTZAILEEI BAIMENAK EMAN (IUSR)</a:t>
+            </a:r>
           </a:p>
           <a:p>
             <a:pPr>
@@ -7369,16 +7415,9 @@
               <a:buChar char="-"/>
             </a:pPr>
             <a:r>
-              <a:rPr lang="eu-ES" sz="1400" b="1" dirty="0"/>
-              <a:t>50gb sistema eragile</a:t>
-            </a:r>
-          </a:p>
-          <a:p>
-            <a:pPr>
-              <a:buFontTx/>
-              <a:buChar char="-"/>
-            </a:pPr>
-            <a:endParaRPr lang="eu-ES" sz="1400" b="1" dirty="0"/>
+              <a:rPr lang="eu-ES" sz="1800" b="1" dirty="0"/>
+              <a:t>FIREWALL SALBUESPENA JARRI (8080 PORTUA)</a:t>
+            </a:r>
           </a:p>
         </p:txBody>
       </p:sp>
@@ -7425,6 +7464,42 @@
           </a:p>
         </p:txBody>
       </p:sp>
+      <p:pic>
+        <p:nvPicPr>
+          <p:cNvPr id="6" name="Imagen 5">
+            <a:extLst>
+              <a:ext uri="{FF2B5EF4-FFF2-40B4-BE49-F238E27FC236}">
+                <a16:creationId xmlns:a16="http://schemas.microsoft.com/office/drawing/2014/main" id="{1CC413D6-1A67-AA2C-808F-EA7A3D774B5A}"/>
+              </a:ext>
+            </a:extLst>
+          </p:cNvPr>
+          <p:cNvPicPr>
+            <a:picLocks noChangeAspect="1"/>
+          </p:cNvPicPr>
+          <p:nvPr/>
+        </p:nvPicPr>
+        <p:blipFill>
+          <a:blip r:embed="rId2">
+            <a:extLst>
+              <a:ext uri="{28A0092B-C50C-407E-A947-70E740481C1C}">
+                <a14:useLocalDpi xmlns:a14="http://schemas.microsoft.com/office/drawing/2010/main" val="0"/>
+              </a:ext>
+            </a:extLst>
+          </a:blip>
+          <a:stretch>
+            <a:fillRect/>
+          </a:stretch>
+        </p:blipFill>
+        <p:spPr>
+          <a:xfrm>
+            <a:off x="6701970" y="2140726"/>
+            <a:ext cx="4162675" cy="3812623"/>
+          </a:xfrm>
+          <a:prstGeom prst="rect">
+            <a:avLst/>
+          </a:prstGeom>
+        </p:spPr>
+      </p:pic>
     </p:spTree>
     <p:extLst>
       <p:ext uri="{BB962C8B-B14F-4D97-AF65-F5344CB8AC3E}">
@@ -8806,7 +8881,7 @@
         <p:spPr>
           <a:xfrm>
             <a:off x="1195583" y="3045377"/>
-            <a:ext cx="2314533" cy="2003323"/>
+            <a:ext cx="2690942" cy="1841255"/>
           </a:xfrm>
         </p:spPr>
         <p:txBody>
@@ -8830,7 +8905,7 @@
             </a:pPr>
             <a:r>
               <a:rPr lang="eu-ES" sz="1400" b="1" dirty="0"/>
-              <a:t>4gb</a:t>
+              <a:t>4GB RAM</a:t>
             </a:r>
           </a:p>
           <a:p>
@@ -8840,13 +8915,8 @@
             </a:pPr>
             <a:r>
               <a:rPr lang="eu-ES" sz="1400" b="1" dirty="0"/>
-              <a:t>2 </a:t>
-            </a:r>
-            <a:r>
-              <a:rPr lang="eu-ES" sz="1400" b="1" dirty="0" err="1"/>
-              <a:t>cpu</a:t>
-            </a:r>
-            <a:endParaRPr lang="eu-ES" sz="1400" b="1" dirty="0"/>
+              <a:t>4 CPU</a:t>
+            </a:r>
           </a:p>
           <a:p>
             <a:pPr>
@@ -8855,7 +8925,7 @@
             </a:pPr>
             <a:r>
               <a:rPr lang="eu-ES" sz="1400" b="1" dirty="0"/>
-              <a:t>50gb sistema eragile</a:t>
+              <a:t>50GB Diskoa (Sistema eragilea)</a:t>
             </a:r>
           </a:p>
           <a:p>
@@ -8926,6 +8996,712 @@
           </a:p>
         </p:txBody>
       </p:sp>
+      <p:sp>
+        <p:nvSpPr>
+          <p:cNvPr id="5" name="Marcador de contenido 2">
+            <a:extLst>
+              <a:ext uri="{FF2B5EF4-FFF2-40B4-BE49-F238E27FC236}">
+                <a16:creationId xmlns:a16="http://schemas.microsoft.com/office/drawing/2014/main" id="{E013BB24-A3B5-D1D6-53C0-D6444932DB42}"/>
+              </a:ext>
+            </a:extLst>
+          </p:cNvPr>
+          <p:cNvSpPr txBox="1">
+            <a:spLocks/>
+          </p:cNvSpPr>
+          <p:nvPr/>
+        </p:nvSpPr>
+        <p:spPr>
+          <a:xfrm>
+            <a:off x="4491522" y="3045377"/>
+            <a:ext cx="3077184" cy="1910082"/>
+          </a:xfrm>
+          <a:prstGeom prst="rect">
+            <a:avLst/>
+          </a:prstGeom>
+        </p:spPr>
+        <p:txBody>
+          <a:bodyPr vert="horz" lIns="91440" tIns="45720" rIns="91440" bIns="45720" rtlCol="0" anchor="ctr">
+            <a:normAutofit/>
+          </a:bodyPr>
+          <a:lstStyle>
+            <a:lvl1pPr marL="342900" indent="-342900" algn="l" defTabSz="457200" rtl="0" eaLnBrk="1" latinLnBrk="0" hangingPunct="1">
+              <a:spcBef>
+                <a:spcPts val="1000"/>
+              </a:spcBef>
+              <a:spcAft>
+                <a:spcPts val="0"/>
+              </a:spcAft>
+              <a:buClr>
+                <a:schemeClr val="bg2">
+                  <a:lumMod val="40000"/>
+                  <a:lumOff val="60000"/>
+                </a:schemeClr>
+              </a:buClr>
+              <a:buSzPct val="80000"/>
+              <a:buFont typeface="Wingdings 3" charset="2"/>
+              <a:buChar char=""/>
+              <a:defRPr sz="2000" b="0" i="0" kern="1200">
+                <a:solidFill>
+                  <a:schemeClr val="tx1"/>
+                </a:solidFill>
+                <a:latin typeface="+mj-lt"/>
+                <a:ea typeface="+mj-ea"/>
+                <a:cs typeface="+mj-cs"/>
+              </a:defRPr>
+            </a:lvl1pPr>
+            <a:lvl2pPr marL="742950" indent="-285750" algn="l" defTabSz="457200" rtl="0" eaLnBrk="1" latinLnBrk="0" hangingPunct="1">
+              <a:spcBef>
+                <a:spcPts val="1000"/>
+              </a:spcBef>
+              <a:spcAft>
+                <a:spcPts val="0"/>
+              </a:spcAft>
+              <a:buClr>
+                <a:schemeClr val="bg2">
+                  <a:lumMod val="40000"/>
+                  <a:lumOff val="60000"/>
+                </a:schemeClr>
+              </a:buClr>
+              <a:buSzPct val="80000"/>
+              <a:buFont typeface="Wingdings 3" charset="2"/>
+              <a:buChar char=""/>
+              <a:defRPr sz="1800" b="0" i="0" kern="1200">
+                <a:solidFill>
+                  <a:schemeClr val="tx1"/>
+                </a:solidFill>
+                <a:latin typeface="+mj-lt"/>
+                <a:ea typeface="+mj-ea"/>
+                <a:cs typeface="+mj-cs"/>
+              </a:defRPr>
+            </a:lvl2pPr>
+            <a:lvl3pPr marL="1143000" indent="-228600" algn="l" defTabSz="457200" rtl="0" eaLnBrk="1" latinLnBrk="0" hangingPunct="1">
+              <a:spcBef>
+                <a:spcPts val="1000"/>
+              </a:spcBef>
+              <a:spcAft>
+                <a:spcPts val="0"/>
+              </a:spcAft>
+              <a:buClr>
+                <a:schemeClr val="bg2">
+                  <a:lumMod val="40000"/>
+                  <a:lumOff val="60000"/>
+                </a:schemeClr>
+              </a:buClr>
+              <a:buSzPct val="80000"/>
+              <a:buFont typeface="Wingdings 3" charset="2"/>
+              <a:buChar char=""/>
+              <a:defRPr sz="1600" b="0" i="0" kern="1200">
+                <a:solidFill>
+                  <a:schemeClr val="tx1"/>
+                </a:solidFill>
+                <a:latin typeface="+mj-lt"/>
+                <a:ea typeface="+mj-ea"/>
+                <a:cs typeface="+mj-cs"/>
+              </a:defRPr>
+            </a:lvl3pPr>
+            <a:lvl4pPr marL="1600200" indent="-228600" algn="l" defTabSz="457200" rtl="0" eaLnBrk="1" latinLnBrk="0" hangingPunct="1">
+              <a:spcBef>
+                <a:spcPts val="1000"/>
+              </a:spcBef>
+              <a:spcAft>
+                <a:spcPts val="0"/>
+              </a:spcAft>
+              <a:buClr>
+                <a:schemeClr val="bg2">
+                  <a:lumMod val="40000"/>
+                  <a:lumOff val="60000"/>
+                </a:schemeClr>
+              </a:buClr>
+              <a:buSzPct val="80000"/>
+              <a:buFont typeface="Wingdings 3" charset="2"/>
+              <a:buChar char=""/>
+              <a:defRPr sz="1400" b="0" i="0" kern="1200">
+                <a:solidFill>
+                  <a:schemeClr val="tx1"/>
+                </a:solidFill>
+                <a:latin typeface="+mj-lt"/>
+                <a:ea typeface="+mj-ea"/>
+                <a:cs typeface="+mj-cs"/>
+              </a:defRPr>
+            </a:lvl4pPr>
+            <a:lvl5pPr marL="2057400" indent="-228600" algn="l" defTabSz="457200" rtl="0" eaLnBrk="1" latinLnBrk="0" hangingPunct="1">
+              <a:spcBef>
+                <a:spcPts val="1000"/>
+              </a:spcBef>
+              <a:spcAft>
+                <a:spcPts val="0"/>
+              </a:spcAft>
+              <a:buClr>
+                <a:schemeClr val="bg2">
+                  <a:lumMod val="40000"/>
+                  <a:lumOff val="60000"/>
+                </a:schemeClr>
+              </a:buClr>
+              <a:buSzPct val="80000"/>
+              <a:buFont typeface="Wingdings 3" charset="2"/>
+              <a:buChar char=""/>
+              <a:defRPr sz="1400" b="0" i="0" kern="1200">
+                <a:solidFill>
+                  <a:schemeClr val="tx1"/>
+                </a:solidFill>
+                <a:latin typeface="+mj-lt"/>
+                <a:ea typeface="+mj-ea"/>
+                <a:cs typeface="+mj-cs"/>
+              </a:defRPr>
+            </a:lvl5pPr>
+            <a:lvl6pPr marL="2506000" indent="-228600" algn="l" defTabSz="457200" rtl="0" eaLnBrk="1" latinLnBrk="0" hangingPunct="1">
+              <a:spcBef>
+                <a:spcPts val="1000"/>
+              </a:spcBef>
+              <a:spcAft>
+                <a:spcPts val="0"/>
+              </a:spcAft>
+              <a:buClr>
+                <a:schemeClr val="bg2">
+                  <a:lumMod val="40000"/>
+                  <a:lumOff val="60000"/>
+                </a:schemeClr>
+              </a:buClr>
+              <a:buSzPct val="80000"/>
+              <a:buFont typeface="Wingdings 3" charset="2"/>
+              <a:buChar char=""/>
+              <a:defRPr sz="1400" b="0" i="0" kern="1200">
+                <a:solidFill>
+                  <a:schemeClr val="tx1"/>
+                </a:solidFill>
+                <a:latin typeface="+mj-lt"/>
+                <a:ea typeface="+mj-ea"/>
+                <a:cs typeface="+mj-cs"/>
+              </a:defRPr>
+            </a:lvl6pPr>
+            <a:lvl7pPr marL="2971800" indent="-228600" algn="l" defTabSz="457200" rtl="0" eaLnBrk="1" latinLnBrk="0" hangingPunct="1">
+              <a:spcBef>
+                <a:spcPts val="1000"/>
+              </a:spcBef>
+              <a:spcAft>
+                <a:spcPts val="0"/>
+              </a:spcAft>
+              <a:buClr>
+                <a:schemeClr val="bg2">
+                  <a:lumMod val="40000"/>
+                  <a:lumOff val="60000"/>
+                </a:schemeClr>
+              </a:buClr>
+              <a:buSzPct val="80000"/>
+              <a:buFont typeface="Wingdings 3" charset="2"/>
+              <a:buChar char=""/>
+              <a:defRPr sz="1400" b="0" i="0" kern="1200">
+                <a:solidFill>
+                  <a:schemeClr val="tx1"/>
+                </a:solidFill>
+                <a:latin typeface="+mj-lt"/>
+                <a:ea typeface="+mj-ea"/>
+                <a:cs typeface="+mj-cs"/>
+              </a:defRPr>
+            </a:lvl7pPr>
+            <a:lvl8pPr marL="3429000" indent="-228600" algn="l" defTabSz="457200" rtl="0" eaLnBrk="1" latinLnBrk="0" hangingPunct="1">
+              <a:spcBef>
+                <a:spcPts val="1000"/>
+              </a:spcBef>
+              <a:spcAft>
+                <a:spcPts val="0"/>
+              </a:spcAft>
+              <a:buClr>
+                <a:schemeClr val="bg2">
+                  <a:lumMod val="40000"/>
+                  <a:lumOff val="60000"/>
+                </a:schemeClr>
+              </a:buClr>
+              <a:buSzPct val="80000"/>
+              <a:buFont typeface="Wingdings 3" charset="2"/>
+              <a:buChar char=""/>
+              <a:defRPr sz="1400" b="0" i="0" kern="1200">
+                <a:solidFill>
+                  <a:schemeClr val="tx1"/>
+                </a:solidFill>
+                <a:latin typeface="+mj-lt"/>
+                <a:ea typeface="+mj-ea"/>
+                <a:cs typeface="+mj-cs"/>
+              </a:defRPr>
+            </a:lvl8pPr>
+            <a:lvl9pPr marL="3886200" indent="-228600" algn="l" defTabSz="457200" rtl="0" eaLnBrk="1" latinLnBrk="0" hangingPunct="1">
+              <a:spcBef>
+                <a:spcPts val="1000"/>
+              </a:spcBef>
+              <a:spcAft>
+                <a:spcPts val="0"/>
+              </a:spcAft>
+              <a:buClr>
+                <a:schemeClr val="bg2">
+                  <a:lumMod val="40000"/>
+                  <a:lumOff val="60000"/>
+                </a:schemeClr>
+              </a:buClr>
+              <a:buSzPct val="80000"/>
+              <a:buFont typeface="Wingdings 3" charset="2"/>
+              <a:buChar char=""/>
+              <a:defRPr sz="1400" b="0" i="0" kern="1200">
+                <a:solidFill>
+                  <a:schemeClr val="tx1"/>
+                </a:solidFill>
+                <a:latin typeface="+mj-lt"/>
+                <a:ea typeface="+mj-ea"/>
+                <a:cs typeface="+mj-cs"/>
+              </a:defRPr>
+            </a:lvl9pPr>
+          </a:lstStyle>
+          <a:p>
+            <a:pPr marL="0" indent="0">
+              <a:buFont typeface="Wingdings 3" charset="2"/>
+              <a:buNone/>
+            </a:pPr>
+            <a:r>
+              <a:rPr lang="eu-ES" sz="1400" b="1" dirty="0"/>
+              <a:t>Instalatu duguna:</a:t>
+            </a:r>
+          </a:p>
+          <a:p>
+            <a:pPr>
+              <a:buFontTx/>
+              <a:buChar char="-"/>
+            </a:pPr>
+            <a:r>
+              <a:rPr lang="de-DE" sz="1400" b="1" dirty="0"/>
+              <a:t>Windows Server 2025 x64 es-ES</a:t>
+            </a:r>
+            <a:r>
+              <a:rPr lang="eu-ES" sz="1400" b="1" dirty="0"/>
+              <a:t>4 CPU</a:t>
+            </a:r>
+          </a:p>
+          <a:p>
+            <a:pPr>
+              <a:buFontTx/>
+              <a:buChar char="-"/>
+            </a:pPr>
+            <a:r>
+              <a:rPr lang="eu-ES" sz="1400" b="1" dirty="0" err="1"/>
+              <a:t>Standard</a:t>
+            </a:r>
+            <a:r>
+              <a:rPr lang="eu-ES" sz="1400" b="1" dirty="0"/>
+              <a:t> </a:t>
+            </a:r>
+            <a:r>
+              <a:rPr lang="eu-ES" sz="1400" b="1" dirty="0" err="1"/>
+              <a:t>Edition</a:t>
+            </a:r>
+            <a:r>
+              <a:rPr lang="eu-ES" sz="1400" b="1" dirty="0"/>
+              <a:t> (</a:t>
+            </a:r>
+            <a:r>
+              <a:rPr lang="eu-ES" sz="1400" b="1" dirty="0" err="1"/>
+              <a:t>Desktop</a:t>
+            </a:r>
+            <a:r>
+              <a:rPr lang="eu-ES" sz="1400" b="1" dirty="0"/>
+              <a:t> </a:t>
+            </a:r>
+            <a:r>
+              <a:rPr lang="eu-ES" sz="1400" b="1" dirty="0" err="1"/>
+              <a:t>Experience</a:t>
+            </a:r>
+            <a:r>
+              <a:rPr lang="eu-ES" sz="1400" b="1" dirty="0"/>
+              <a:t>) / </a:t>
+            </a:r>
+            <a:r>
+              <a:rPr lang="eu-ES" sz="1400" b="1" dirty="0" err="1"/>
+              <a:t>Experiencia</a:t>
+            </a:r>
+            <a:r>
+              <a:rPr lang="eu-ES" sz="1400" b="1" dirty="0"/>
+              <a:t> de </a:t>
+            </a:r>
+            <a:r>
+              <a:rPr lang="eu-ES" sz="1400" b="1" dirty="0" err="1"/>
+              <a:t>escritorio</a:t>
+            </a:r>
+            <a:endParaRPr lang="eu-ES" sz="1400" b="1" dirty="0"/>
+          </a:p>
+          <a:p>
+            <a:pPr>
+              <a:buFontTx/>
+              <a:buChar char="-"/>
+            </a:pPr>
+            <a:endParaRPr lang="eu-ES" sz="1400" b="1" dirty="0"/>
+          </a:p>
+        </p:txBody>
+      </p:sp>
+      <p:sp>
+        <p:nvSpPr>
+          <p:cNvPr id="7" name="Marcador de contenido 2">
+            <a:extLst>
+              <a:ext uri="{FF2B5EF4-FFF2-40B4-BE49-F238E27FC236}">
+                <a16:creationId xmlns:a16="http://schemas.microsoft.com/office/drawing/2014/main" id="{939AC166-7267-0F5B-1984-30F06A759CC0}"/>
+              </a:ext>
+            </a:extLst>
+          </p:cNvPr>
+          <p:cNvSpPr txBox="1">
+            <a:spLocks/>
+          </p:cNvSpPr>
+          <p:nvPr/>
+        </p:nvSpPr>
+        <p:spPr>
+          <a:xfrm>
+            <a:off x="8173703" y="3045376"/>
+            <a:ext cx="3077184" cy="1575786"/>
+          </a:xfrm>
+          <a:prstGeom prst="rect">
+            <a:avLst/>
+          </a:prstGeom>
+        </p:spPr>
+        <p:txBody>
+          <a:bodyPr vert="horz" lIns="91440" tIns="45720" rIns="91440" bIns="45720" rtlCol="0" anchor="ctr">
+            <a:normAutofit/>
+          </a:bodyPr>
+          <a:lstStyle>
+            <a:lvl1pPr marL="342900" indent="-342900" algn="l" defTabSz="457200" rtl="0" eaLnBrk="1" latinLnBrk="0" hangingPunct="1">
+              <a:spcBef>
+                <a:spcPts val="1000"/>
+              </a:spcBef>
+              <a:spcAft>
+                <a:spcPts val="0"/>
+              </a:spcAft>
+              <a:buClr>
+                <a:schemeClr val="bg2">
+                  <a:lumMod val="40000"/>
+                  <a:lumOff val="60000"/>
+                </a:schemeClr>
+              </a:buClr>
+              <a:buSzPct val="80000"/>
+              <a:buFont typeface="Wingdings 3" charset="2"/>
+              <a:buChar char=""/>
+              <a:defRPr sz="2000" b="0" i="0" kern="1200">
+                <a:solidFill>
+                  <a:schemeClr val="tx1"/>
+                </a:solidFill>
+                <a:latin typeface="+mj-lt"/>
+                <a:ea typeface="+mj-ea"/>
+                <a:cs typeface="+mj-cs"/>
+              </a:defRPr>
+            </a:lvl1pPr>
+            <a:lvl2pPr marL="742950" indent="-285750" algn="l" defTabSz="457200" rtl="0" eaLnBrk="1" latinLnBrk="0" hangingPunct="1">
+              <a:spcBef>
+                <a:spcPts val="1000"/>
+              </a:spcBef>
+              <a:spcAft>
+                <a:spcPts val="0"/>
+              </a:spcAft>
+              <a:buClr>
+                <a:schemeClr val="bg2">
+                  <a:lumMod val="40000"/>
+                  <a:lumOff val="60000"/>
+                </a:schemeClr>
+              </a:buClr>
+              <a:buSzPct val="80000"/>
+              <a:buFont typeface="Wingdings 3" charset="2"/>
+              <a:buChar char=""/>
+              <a:defRPr sz="1800" b="0" i="0" kern="1200">
+                <a:solidFill>
+                  <a:schemeClr val="tx1"/>
+                </a:solidFill>
+                <a:latin typeface="+mj-lt"/>
+                <a:ea typeface="+mj-ea"/>
+                <a:cs typeface="+mj-cs"/>
+              </a:defRPr>
+            </a:lvl2pPr>
+            <a:lvl3pPr marL="1143000" indent="-228600" algn="l" defTabSz="457200" rtl="0" eaLnBrk="1" latinLnBrk="0" hangingPunct="1">
+              <a:spcBef>
+                <a:spcPts val="1000"/>
+              </a:spcBef>
+              <a:spcAft>
+                <a:spcPts val="0"/>
+              </a:spcAft>
+              <a:buClr>
+                <a:schemeClr val="bg2">
+                  <a:lumMod val="40000"/>
+                  <a:lumOff val="60000"/>
+                </a:schemeClr>
+              </a:buClr>
+              <a:buSzPct val="80000"/>
+              <a:buFont typeface="Wingdings 3" charset="2"/>
+              <a:buChar char=""/>
+              <a:defRPr sz="1600" b="0" i="0" kern="1200">
+                <a:solidFill>
+                  <a:schemeClr val="tx1"/>
+                </a:solidFill>
+                <a:latin typeface="+mj-lt"/>
+                <a:ea typeface="+mj-ea"/>
+                <a:cs typeface="+mj-cs"/>
+              </a:defRPr>
+            </a:lvl3pPr>
+            <a:lvl4pPr marL="1600200" indent="-228600" algn="l" defTabSz="457200" rtl="0" eaLnBrk="1" latinLnBrk="0" hangingPunct="1">
+              <a:spcBef>
+                <a:spcPts val="1000"/>
+              </a:spcBef>
+              <a:spcAft>
+                <a:spcPts val="0"/>
+              </a:spcAft>
+              <a:buClr>
+                <a:schemeClr val="bg2">
+                  <a:lumMod val="40000"/>
+                  <a:lumOff val="60000"/>
+                </a:schemeClr>
+              </a:buClr>
+              <a:buSzPct val="80000"/>
+              <a:buFont typeface="Wingdings 3" charset="2"/>
+              <a:buChar char=""/>
+              <a:defRPr sz="1400" b="0" i="0" kern="1200">
+                <a:solidFill>
+                  <a:schemeClr val="tx1"/>
+                </a:solidFill>
+                <a:latin typeface="+mj-lt"/>
+                <a:ea typeface="+mj-ea"/>
+                <a:cs typeface="+mj-cs"/>
+              </a:defRPr>
+            </a:lvl4pPr>
+            <a:lvl5pPr marL="2057400" indent="-228600" algn="l" defTabSz="457200" rtl="0" eaLnBrk="1" latinLnBrk="0" hangingPunct="1">
+              <a:spcBef>
+                <a:spcPts val="1000"/>
+              </a:spcBef>
+              <a:spcAft>
+                <a:spcPts val="0"/>
+              </a:spcAft>
+              <a:buClr>
+                <a:schemeClr val="bg2">
+                  <a:lumMod val="40000"/>
+                  <a:lumOff val="60000"/>
+                </a:schemeClr>
+              </a:buClr>
+              <a:buSzPct val="80000"/>
+              <a:buFont typeface="Wingdings 3" charset="2"/>
+              <a:buChar char=""/>
+              <a:defRPr sz="1400" b="0" i="0" kern="1200">
+                <a:solidFill>
+                  <a:schemeClr val="tx1"/>
+                </a:solidFill>
+                <a:latin typeface="+mj-lt"/>
+                <a:ea typeface="+mj-ea"/>
+                <a:cs typeface="+mj-cs"/>
+              </a:defRPr>
+            </a:lvl5pPr>
+            <a:lvl6pPr marL="2506000" indent="-228600" algn="l" defTabSz="457200" rtl="0" eaLnBrk="1" latinLnBrk="0" hangingPunct="1">
+              <a:spcBef>
+                <a:spcPts val="1000"/>
+              </a:spcBef>
+              <a:spcAft>
+                <a:spcPts val="0"/>
+              </a:spcAft>
+              <a:buClr>
+                <a:schemeClr val="bg2">
+                  <a:lumMod val="40000"/>
+                  <a:lumOff val="60000"/>
+                </a:schemeClr>
+              </a:buClr>
+              <a:buSzPct val="80000"/>
+              <a:buFont typeface="Wingdings 3" charset="2"/>
+              <a:buChar char=""/>
+              <a:defRPr sz="1400" b="0" i="0" kern="1200">
+                <a:solidFill>
+                  <a:schemeClr val="tx1"/>
+                </a:solidFill>
+                <a:latin typeface="+mj-lt"/>
+                <a:ea typeface="+mj-ea"/>
+                <a:cs typeface="+mj-cs"/>
+              </a:defRPr>
+            </a:lvl6pPr>
+            <a:lvl7pPr marL="2971800" indent="-228600" algn="l" defTabSz="457200" rtl="0" eaLnBrk="1" latinLnBrk="0" hangingPunct="1">
+              <a:spcBef>
+                <a:spcPts val="1000"/>
+              </a:spcBef>
+              <a:spcAft>
+                <a:spcPts val="0"/>
+              </a:spcAft>
+              <a:buClr>
+                <a:schemeClr val="bg2">
+                  <a:lumMod val="40000"/>
+                  <a:lumOff val="60000"/>
+                </a:schemeClr>
+              </a:buClr>
+              <a:buSzPct val="80000"/>
+              <a:buFont typeface="Wingdings 3" charset="2"/>
+              <a:buChar char=""/>
+              <a:defRPr sz="1400" b="0" i="0" kern="1200">
+                <a:solidFill>
+                  <a:schemeClr val="tx1"/>
+                </a:solidFill>
+                <a:latin typeface="+mj-lt"/>
+                <a:ea typeface="+mj-ea"/>
+                <a:cs typeface="+mj-cs"/>
+              </a:defRPr>
+            </a:lvl7pPr>
+            <a:lvl8pPr marL="3429000" indent="-228600" algn="l" defTabSz="457200" rtl="0" eaLnBrk="1" latinLnBrk="0" hangingPunct="1">
+              <a:spcBef>
+                <a:spcPts val="1000"/>
+              </a:spcBef>
+              <a:spcAft>
+                <a:spcPts val="0"/>
+              </a:spcAft>
+              <a:buClr>
+                <a:schemeClr val="bg2">
+                  <a:lumMod val="40000"/>
+                  <a:lumOff val="60000"/>
+                </a:schemeClr>
+              </a:buClr>
+              <a:buSzPct val="80000"/>
+              <a:buFont typeface="Wingdings 3" charset="2"/>
+              <a:buChar char=""/>
+              <a:defRPr sz="1400" b="0" i="0" kern="1200">
+                <a:solidFill>
+                  <a:schemeClr val="tx1"/>
+                </a:solidFill>
+                <a:latin typeface="+mj-lt"/>
+                <a:ea typeface="+mj-ea"/>
+                <a:cs typeface="+mj-cs"/>
+              </a:defRPr>
+            </a:lvl8pPr>
+            <a:lvl9pPr marL="3886200" indent="-228600" algn="l" defTabSz="457200" rtl="0" eaLnBrk="1" latinLnBrk="0" hangingPunct="1">
+              <a:spcBef>
+                <a:spcPts val="1000"/>
+              </a:spcBef>
+              <a:spcAft>
+                <a:spcPts val="0"/>
+              </a:spcAft>
+              <a:buClr>
+                <a:schemeClr val="bg2">
+                  <a:lumMod val="40000"/>
+                  <a:lumOff val="60000"/>
+                </a:schemeClr>
+              </a:buClr>
+              <a:buSzPct val="80000"/>
+              <a:buFont typeface="Wingdings 3" charset="2"/>
+              <a:buChar char=""/>
+              <a:defRPr sz="1400" b="0" i="0" kern="1200">
+                <a:solidFill>
+                  <a:schemeClr val="tx1"/>
+                </a:solidFill>
+                <a:latin typeface="+mj-lt"/>
+                <a:ea typeface="+mj-ea"/>
+                <a:cs typeface="+mj-cs"/>
+              </a:defRPr>
+            </a:lvl9pPr>
+          </a:lstStyle>
+          <a:p>
+            <a:pPr marL="0" indent="0">
+              <a:buFont typeface="Wingdings 3" charset="2"/>
+              <a:buNone/>
+            </a:pPr>
+            <a:r>
+              <a:rPr lang="eu-ES" sz="1400" b="1" dirty="0"/>
+              <a:t>Hasierako konfigurazioa:</a:t>
+            </a:r>
+          </a:p>
+          <a:p>
+            <a:pPr>
+              <a:buFontTx/>
+              <a:buChar char="-"/>
+            </a:pPr>
+            <a:r>
+              <a:rPr lang="eu-ES" sz="1400" b="1" dirty="0"/>
+              <a:t>Administratzaileari Pasahitza Ezarri</a:t>
+            </a:r>
+          </a:p>
+          <a:p>
+            <a:pPr>
+              <a:buFontTx/>
+              <a:buChar char="-"/>
+            </a:pPr>
+            <a:r>
+              <a:rPr lang="eu-ES" sz="1400" b="1" dirty="0"/>
+              <a:t>Ekipoaren izena aldatu</a:t>
+            </a:r>
+          </a:p>
+          <a:p>
+            <a:pPr>
+              <a:buFontTx/>
+              <a:buChar char="-"/>
+            </a:pPr>
+            <a:r>
+              <a:rPr lang="eu-ES" sz="1400" b="1" dirty="0"/>
+              <a:t>Sistema eguneratu</a:t>
+            </a:r>
+          </a:p>
+        </p:txBody>
+      </p:sp>
+      <p:pic>
+        <p:nvPicPr>
+          <p:cNvPr id="9" name="Imagen 8">
+            <a:extLst>
+              <a:ext uri="{FF2B5EF4-FFF2-40B4-BE49-F238E27FC236}">
+                <a16:creationId xmlns:a16="http://schemas.microsoft.com/office/drawing/2014/main" id="{B57330AB-8B9D-C201-478A-ED5E89E307BF}"/>
+              </a:ext>
+            </a:extLst>
+          </p:cNvPr>
+          <p:cNvPicPr>
+            <a:picLocks noChangeAspect="1"/>
+          </p:cNvPicPr>
+          <p:nvPr/>
+        </p:nvPicPr>
+        <p:blipFill>
+          <a:blip r:embed="rId2">
+            <a:extLst>
+              <a:ext uri="{28A0092B-C50C-407E-A947-70E740481C1C}">
+                <a14:useLocalDpi xmlns:a14="http://schemas.microsoft.com/office/drawing/2010/main" val="0"/>
+              </a:ext>
+            </a:extLst>
+          </a:blip>
+          <a:stretch>
+            <a:fillRect/>
+          </a:stretch>
+        </p:blipFill>
+        <p:spPr>
+          <a:xfrm>
+            <a:off x="3067050" y="5067908"/>
+            <a:ext cx="2035892" cy="1355475"/>
+          </a:xfrm>
+          <a:prstGeom prst="rect">
+            <a:avLst/>
+          </a:prstGeom>
+        </p:spPr>
+      </p:pic>
+      <p:pic>
+        <p:nvPicPr>
+          <p:cNvPr id="11" name="Imagen 10">
+            <a:extLst>
+              <a:ext uri="{FF2B5EF4-FFF2-40B4-BE49-F238E27FC236}">
+                <a16:creationId xmlns:a16="http://schemas.microsoft.com/office/drawing/2014/main" id="{F6DAF512-C1BB-D286-7497-E6007A7D9499}"/>
+              </a:ext>
+            </a:extLst>
+          </p:cNvPr>
+          <p:cNvPicPr>
+            <a:picLocks noChangeAspect="1"/>
+          </p:cNvPicPr>
+          <p:nvPr/>
+        </p:nvPicPr>
+        <p:blipFill>
+          <a:blip r:embed="rId3">
+            <a:extLst>
+              <a:ext uri="{28A0092B-C50C-407E-A947-70E740481C1C}">
+                <a14:useLocalDpi xmlns:a14="http://schemas.microsoft.com/office/drawing/2010/main" val="0"/>
+              </a:ext>
+            </a:extLst>
+          </a:blip>
+          <a:stretch>
+            <a:fillRect/>
+          </a:stretch>
+        </p:blipFill>
+        <p:spPr>
+          <a:xfrm>
+            <a:off x="7089060" y="5067907"/>
+            <a:ext cx="2202424" cy="1355475"/>
+          </a:xfrm>
+          <a:prstGeom prst="rect">
+            <a:avLst/>
+          </a:prstGeom>
+        </p:spPr>
+      </p:pic>
     </p:spTree>
     <p:extLst>
       <p:ext uri="{BB962C8B-B14F-4D97-AF65-F5344CB8AC3E}">
@@ -9015,7 +9791,7 @@
         <p:spPr>
           <a:xfrm>
             <a:off x="1195583" y="3045377"/>
-            <a:ext cx="2314533" cy="2003323"/>
+            <a:ext cx="5854146" cy="2003323"/>
           </a:xfrm>
         </p:spPr>
         <p:txBody>
@@ -9029,42 +9805,16 @@
             </a:pPr>
             <a:r>
               <a:rPr lang="eu-ES" sz="1400" b="1" noProof="0" dirty="0"/>
-              <a:t>Emandako Espezifikazioak:</a:t>
-            </a:r>
-          </a:p>
-          <a:p>
-            <a:pPr>
-              <a:buFontTx/>
-              <a:buChar char="-"/>
+              <a:t>IP FINKOA JARRI DIOGU: 192.168.0.10 (255.255.255.0 Maskara).</a:t>
+            </a:r>
+          </a:p>
+          <a:p>
+            <a:pPr marL="0" indent="0">
+              <a:buNone/>
             </a:pPr>
             <a:r>
               <a:rPr lang="eu-ES" sz="1400" b="1" dirty="0"/>
-              <a:t>4gb</a:t>
-            </a:r>
-          </a:p>
-          <a:p>
-            <a:pPr>
-              <a:buFontTx/>
-              <a:buChar char="-"/>
-            </a:pPr>
-            <a:r>
-              <a:rPr lang="eu-ES" sz="1400" b="1" dirty="0"/>
-              <a:t>2 </a:t>
-            </a:r>
-            <a:r>
-              <a:rPr lang="eu-ES" sz="1400" b="1" dirty="0" err="1"/>
-              <a:t>cpu</a:t>
-            </a:r>
-            <a:endParaRPr lang="eu-ES" sz="1400" b="1" dirty="0"/>
-          </a:p>
-          <a:p>
-            <a:pPr>
-              <a:buFontTx/>
-              <a:buChar char="-"/>
-            </a:pPr>
-            <a:r>
-              <a:rPr lang="eu-ES" sz="1400" b="1" dirty="0"/>
-              <a:t>50gb sistema eragile</a:t>
+              <a:t>ZERTARAKO? Zerbitzariak sarera konektatu bakoitzean IP ezberdina izan ez dezan.</a:t>
             </a:r>
           </a:p>
           <a:p>
@@ -9119,6 +9869,42 @@
           </a:p>
         </p:txBody>
       </p:sp>
+      <p:pic>
+        <p:nvPicPr>
+          <p:cNvPr id="6" name="Imagen 5">
+            <a:extLst>
+              <a:ext uri="{FF2B5EF4-FFF2-40B4-BE49-F238E27FC236}">
+                <a16:creationId xmlns:a16="http://schemas.microsoft.com/office/drawing/2014/main" id="{094EB918-8F44-4A3D-5589-4E385A310C97}"/>
+              </a:ext>
+            </a:extLst>
+          </p:cNvPr>
+          <p:cNvPicPr>
+            <a:picLocks noChangeAspect="1"/>
+          </p:cNvPicPr>
+          <p:nvPr/>
+        </p:nvPicPr>
+        <p:blipFill>
+          <a:blip r:embed="rId2">
+            <a:extLst>
+              <a:ext uri="{28A0092B-C50C-407E-A947-70E740481C1C}">
+                <a14:useLocalDpi xmlns:a14="http://schemas.microsoft.com/office/drawing/2010/main" val="0"/>
+              </a:ext>
+            </a:extLst>
+          </a:blip>
+          <a:stretch>
+            <a:fillRect/>
+          </a:stretch>
+        </p:blipFill>
+        <p:spPr>
+          <a:xfrm>
+            <a:off x="7049729" y="2260111"/>
+            <a:ext cx="4228296" cy="3880133"/>
+          </a:xfrm>
+          <a:prstGeom prst="rect">
+            <a:avLst/>
+          </a:prstGeom>
+        </p:spPr>
+      </p:pic>
     </p:spTree>
     <p:extLst>
       <p:ext uri="{BB962C8B-B14F-4D97-AF65-F5344CB8AC3E}">

--- a/Aurkezpena/1.Erronka Aurkezpena.pptx
+++ b/Aurkezpena/1.Erronka Aurkezpena.pptx
@@ -313,7 +313,7 @@
           <a:p>
             <a:fld id="{1C60CDA0-A541-4C6F-AA03-59A25C3812BD}" type="datetimeFigureOut">
               <a:rPr lang="es-ES" smtClean="0"/>
-              <a:t>28/10/2026</a:t>
+              <a:t>29/10/2026</a:t>
             </a:fld>
             <a:endParaRPr lang="es-ES"/>
           </a:p>
@@ -588,7 +588,7 @@
           <a:p>
             <a:fld id="{1C60CDA0-A541-4C6F-AA03-59A25C3812BD}" type="datetimeFigureOut">
               <a:rPr lang="es-ES" smtClean="0"/>
-              <a:t>28/10/2026</a:t>
+              <a:t>29/10/2026</a:t>
             </a:fld>
             <a:endParaRPr lang="es-ES"/>
           </a:p>
@@ -782,7 +782,7 @@
           <a:p>
             <a:fld id="{1C60CDA0-A541-4C6F-AA03-59A25C3812BD}" type="datetimeFigureOut">
               <a:rPr lang="es-ES" smtClean="0"/>
-              <a:t>28/10/2026</a:t>
+              <a:t>29/10/2026</a:t>
             </a:fld>
             <a:endParaRPr lang="es-ES"/>
           </a:p>
@@ -1055,7 +1055,7 @@
           <a:p>
             <a:fld id="{1C60CDA0-A541-4C6F-AA03-59A25C3812BD}" type="datetimeFigureOut">
               <a:rPr lang="es-ES" smtClean="0"/>
-              <a:t>28/10/2026</a:t>
+              <a:t>29/10/2026</a:t>
             </a:fld>
             <a:endParaRPr lang="es-ES"/>
           </a:p>
@@ -1396,7 +1396,7 @@
           <a:p>
             <a:fld id="{1C60CDA0-A541-4C6F-AA03-59A25C3812BD}" type="datetimeFigureOut">
               <a:rPr lang="es-ES" smtClean="0"/>
-              <a:t>28/10/2026</a:t>
+              <a:t>29/10/2026</a:t>
             </a:fld>
             <a:endParaRPr lang="es-ES"/>
           </a:p>
@@ -2019,7 +2019,7 @@
           <a:p>
             <a:fld id="{1C60CDA0-A541-4C6F-AA03-59A25C3812BD}" type="datetimeFigureOut">
               <a:rPr lang="es-ES" smtClean="0"/>
-              <a:t>28/10/2026</a:t>
+              <a:t>29/10/2026</a:t>
             </a:fld>
             <a:endParaRPr lang="es-ES"/>
           </a:p>
@@ -2879,7 +2879,7 @@
           <a:p>
             <a:fld id="{1C60CDA0-A541-4C6F-AA03-59A25C3812BD}" type="datetimeFigureOut">
               <a:rPr lang="es-ES" smtClean="0"/>
-              <a:t>28/10/2026</a:t>
+              <a:t>29/10/2026</a:t>
             </a:fld>
             <a:endParaRPr lang="es-ES"/>
           </a:p>
@@ -3049,7 +3049,7 @@
           <a:p>
             <a:fld id="{1C60CDA0-A541-4C6F-AA03-59A25C3812BD}" type="datetimeFigureOut">
               <a:rPr lang="es-ES" smtClean="0"/>
-              <a:t>28/10/2026</a:t>
+              <a:t>29/10/2026</a:t>
             </a:fld>
             <a:endParaRPr lang="es-ES"/>
           </a:p>
@@ -3229,7 +3229,7 @@
           <a:p>
             <a:fld id="{1C60CDA0-A541-4C6F-AA03-59A25C3812BD}" type="datetimeFigureOut">
               <a:rPr lang="es-ES" smtClean="0"/>
-              <a:t>28/10/2026</a:t>
+              <a:t>29/10/2026</a:t>
             </a:fld>
             <a:endParaRPr lang="es-ES"/>
           </a:p>
@@ -3399,7 +3399,7 @@
           <a:p>
             <a:fld id="{1C60CDA0-A541-4C6F-AA03-59A25C3812BD}" type="datetimeFigureOut">
               <a:rPr lang="es-ES" smtClean="0"/>
-              <a:t>28/10/2026</a:t>
+              <a:t>29/10/2026</a:t>
             </a:fld>
             <a:endParaRPr lang="es-ES"/>
           </a:p>
@@ -3646,7 +3646,7 @@
           <a:p>
             <a:fld id="{1C60CDA0-A541-4C6F-AA03-59A25C3812BD}" type="datetimeFigureOut">
               <a:rPr lang="es-ES" smtClean="0"/>
-              <a:t>28/10/2026</a:t>
+              <a:t>29/10/2026</a:t>
             </a:fld>
             <a:endParaRPr lang="es-ES"/>
           </a:p>
@@ -3938,7 +3938,7 @@
           <a:p>
             <a:fld id="{1C60CDA0-A541-4C6F-AA03-59A25C3812BD}" type="datetimeFigureOut">
               <a:rPr lang="es-ES" smtClean="0"/>
-              <a:t>28/10/2026</a:t>
+              <a:t>29/10/2026</a:t>
             </a:fld>
             <a:endParaRPr lang="es-ES"/>
           </a:p>
@@ -4382,7 +4382,7 @@
           <a:p>
             <a:fld id="{1C60CDA0-A541-4C6F-AA03-59A25C3812BD}" type="datetimeFigureOut">
               <a:rPr lang="es-ES" smtClean="0"/>
-              <a:t>28/10/2026</a:t>
+              <a:t>29/10/2026</a:t>
             </a:fld>
             <a:endParaRPr lang="es-ES"/>
           </a:p>
@@ -4500,7 +4500,7 @@
           <a:p>
             <a:fld id="{1C60CDA0-A541-4C6F-AA03-59A25C3812BD}" type="datetimeFigureOut">
               <a:rPr lang="es-ES" smtClean="0"/>
-              <a:t>28/10/2026</a:t>
+              <a:t>29/10/2026</a:t>
             </a:fld>
             <a:endParaRPr lang="es-ES"/>
           </a:p>
@@ -4595,7 +4595,7 @@
           <a:p>
             <a:fld id="{1C60CDA0-A541-4C6F-AA03-59A25C3812BD}" type="datetimeFigureOut">
               <a:rPr lang="es-ES" smtClean="0"/>
-              <a:t>28/10/2026</a:t>
+              <a:t>29/10/2026</a:t>
             </a:fld>
             <a:endParaRPr lang="es-ES"/>
           </a:p>
@@ -4874,7 +4874,7 @@
           <a:p>
             <a:fld id="{1C60CDA0-A541-4C6F-AA03-59A25C3812BD}" type="datetimeFigureOut">
               <a:rPr lang="es-ES" smtClean="0"/>
-              <a:t>28/10/2026</a:t>
+              <a:t>29/10/2026</a:t>
             </a:fld>
             <a:endParaRPr lang="es-ES"/>
           </a:p>
@@ -5149,7 +5149,7 @@
           <a:p>
             <a:fld id="{1C60CDA0-A541-4C6F-AA03-59A25C3812BD}" type="datetimeFigureOut">
               <a:rPr lang="es-ES" smtClean="0"/>
-              <a:t>28/10/2026</a:t>
+              <a:t>29/10/2026</a:t>
             </a:fld>
             <a:endParaRPr lang="es-ES"/>
           </a:p>
@@ -5578,7 +5578,7 @@
           <a:p>
             <a:fld id="{1C60CDA0-A541-4C6F-AA03-59A25C3812BD}" type="datetimeFigureOut">
               <a:rPr lang="es-ES" smtClean="0"/>
-              <a:t>28/10/2026</a:t>
+              <a:t>29/10/2026</a:t>
             </a:fld>
             <a:endParaRPr lang="es-ES"/>
           </a:p>
@@ -6265,56 +6265,356 @@
         <p:spPr>
           <a:xfrm>
             <a:off x="1195583" y="3045377"/>
-            <a:ext cx="2314533" cy="2003323"/>
+            <a:ext cx="6257269" cy="2873642"/>
           </a:xfrm>
         </p:spPr>
         <p:txBody>
           <a:bodyPr>
-            <a:normAutofit/>
+            <a:normAutofit fontScale="62500" lnSpcReduction="20000"/>
           </a:bodyPr>
           <a:lstStyle/>
           <a:p>
-            <a:pPr marL="0" indent="0">
-              <a:buNone/>
+            <a:pPr>
+              <a:buFont typeface="Arial" panose="020B0604020202020204" pitchFamily="34" charset="0"/>
+              <a:buChar char="•"/>
             </a:pPr>
             <a:r>
-              <a:rPr lang="eu-ES" sz="1400" b="1" noProof="0" dirty="0"/>
-              <a:t>Emandako Espezifikazioak:</a:t>
+              <a:rPr lang="es-ES" sz="2500" dirty="0" err="1"/>
+              <a:t>Gutxienez</a:t>
+            </a:r>
+            <a:r>
+              <a:rPr lang="es-ES" sz="2500" dirty="0"/>
+              <a:t> 8 </a:t>
+            </a:r>
+            <a:r>
+              <a:rPr lang="es-ES" sz="2500" dirty="0" err="1"/>
+              <a:t>karaktereko</a:t>
+            </a:r>
+            <a:r>
+              <a:rPr lang="es-ES" sz="2500" dirty="0"/>
+              <a:t> </a:t>
+            </a:r>
+            <a:r>
+              <a:rPr lang="es-ES" sz="2500" dirty="0" err="1"/>
+              <a:t>pasahitzak</a:t>
+            </a:r>
+            <a:r>
+              <a:rPr lang="es-ES" sz="2500" dirty="0"/>
+              <a:t>.</a:t>
             </a:r>
           </a:p>
           <a:p>
             <a:pPr>
-              <a:buFontTx/>
-              <a:buChar char="-"/>
+              <a:buFont typeface="Arial" panose="020B0604020202020204" pitchFamily="34" charset="0"/>
+              <a:buChar char="•"/>
             </a:pPr>
             <a:r>
-              <a:rPr lang="eu-ES" sz="1400" b="1" dirty="0"/>
-              <a:t>4gb</a:t>
+              <a:rPr lang="es-ES" sz="2500" dirty="0" err="1"/>
+              <a:t>Azken</a:t>
+            </a:r>
+            <a:r>
+              <a:rPr lang="es-ES" sz="2500" dirty="0"/>
+              <a:t> 12 </a:t>
+            </a:r>
+            <a:r>
+              <a:rPr lang="es-ES" sz="2500" dirty="0" err="1"/>
+              <a:t>pasahitz</a:t>
+            </a:r>
+            <a:r>
+              <a:rPr lang="es-ES" sz="2500" dirty="0"/>
+              <a:t> </a:t>
+            </a:r>
+            <a:r>
+              <a:rPr lang="es-ES" sz="2500" dirty="0" err="1"/>
+              <a:t>gogoratuko</a:t>
+            </a:r>
+            <a:r>
+              <a:rPr lang="es-ES" sz="2500" dirty="0"/>
+              <a:t> </a:t>
+            </a:r>
+            <a:r>
+              <a:rPr lang="es-ES" sz="2500" dirty="0" err="1"/>
+              <a:t>dira</a:t>
+            </a:r>
+            <a:r>
+              <a:rPr lang="es-ES" sz="2500" dirty="0"/>
+              <a:t> (Historial de contraseñas).</a:t>
             </a:r>
           </a:p>
           <a:p>
             <a:pPr>
-              <a:buFontTx/>
-              <a:buChar char="-"/>
+              <a:buFont typeface="Arial" panose="020B0604020202020204" pitchFamily="34" charset="0"/>
+              <a:buChar char="•"/>
             </a:pPr>
             <a:r>
-              <a:rPr lang="eu-ES" sz="1400" b="1" dirty="0"/>
-              <a:t>2 </a:t>
-            </a:r>
-            <a:r>
-              <a:rPr lang="eu-ES" sz="1400" b="1" dirty="0" err="1"/>
-              <a:t>cpu</a:t>
-            </a:r>
-            <a:endParaRPr lang="eu-ES" sz="1400" b="1" dirty="0"/>
+              <a:rPr lang="es-ES" sz="2500" dirty="0" err="1"/>
+              <a:t>Konplexutasuna</a:t>
+            </a:r>
+            <a:r>
+              <a:rPr lang="es-ES" sz="2500" dirty="0"/>
+              <a:t> bai (</a:t>
+            </a:r>
+            <a:r>
+              <a:rPr lang="es-ES" sz="2500" dirty="0" err="1"/>
+              <a:t>Karaktere</a:t>
+            </a:r>
+            <a:r>
+              <a:rPr lang="es-ES" sz="2500" dirty="0"/>
+              <a:t> </a:t>
+            </a:r>
+            <a:r>
+              <a:rPr lang="es-ES" sz="2500" dirty="0" err="1"/>
+              <a:t>berezien</a:t>
+            </a:r>
+            <a:r>
+              <a:rPr lang="es-ES" sz="2500" dirty="0"/>
+              <a:t> </a:t>
+            </a:r>
+            <a:r>
+              <a:rPr lang="es-ES" sz="2500" dirty="0" err="1"/>
+              <a:t>erabilera</a:t>
+            </a:r>
+            <a:r>
+              <a:rPr lang="es-ES" sz="2500" dirty="0"/>
+              <a:t>, </a:t>
+            </a:r>
+            <a:r>
+              <a:rPr lang="es-ES" sz="2500" dirty="0" err="1"/>
+              <a:t>maiuskulak</a:t>
+            </a:r>
+            <a:r>
+              <a:rPr lang="es-ES" sz="2500" dirty="0"/>
+              <a:t> eta </a:t>
+            </a:r>
+            <a:r>
+              <a:rPr lang="es-ES" sz="2500" dirty="0" err="1"/>
+              <a:t>zenbakiak</a:t>
+            </a:r>
+            <a:r>
+              <a:rPr lang="es-ES" sz="2500" dirty="0"/>
+              <a:t> </a:t>
+            </a:r>
+            <a:r>
+              <a:rPr lang="es-ES" sz="2500" dirty="0" err="1"/>
+              <a:t>erabili</a:t>
+            </a:r>
+            <a:r>
+              <a:rPr lang="es-ES" sz="2500" dirty="0"/>
+              <a:t> </a:t>
+            </a:r>
+            <a:r>
+              <a:rPr lang="es-ES" sz="2500" dirty="0" err="1"/>
+              <a:t>beharra</a:t>
+            </a:r>
+            <a:r>
+              <a:rPr lang="es-ES" sz="2500" dirty="0"/>
+              <a:t>).</a:t>
+            </a:r>
           </a:p>
           <a:p>
             <a:pPr>
-              <a:buFontTx/>
-              <a:buChar char="-"/>
+              <a:buFont typeface="Arial" panose="020B0604020202020204" pitchFamily="34" charset="0"/>
+              <a:buChar char="•"/>
             </a:pPr>
             <a:r>
-              <a:rPr lang="eu-ES" sz="1400" b="1" dirty="0"/>
-              <a:t>50gb sistema eragile</a:t>
+              <a:rPr lang="es-ES" sz="2500" dirty="0"/>
+              <a:t>60 </a:t>
+            </a:r>
+            <a:r>
+              <a:rPr lang="es-ES" sz="2500" dirty="0" err="1"/>
+              <a:t>egunean</a:t>
+            </a:r>
+            <a:r>
+              <a:rPr lang="es-ES" sz="2500" dirty="0"/>
+              <a:t> </a:t>
+            </a:r>
+            <a:r>
+              <a:rPr lang="es-ES" sz="2500" dirty="0" err="1"/>
+              <a:t>behin</a:t>
+            </a:r>
+            <a:r>
+              <a:rPr lang="es-ES" sz="2500" dirty="0"/>
+              <a:t> </a:t>
+            </a:r>
+            <a:r>
+              <a:rPr lang="es-ES" sz="2500" dirty="0" err="1"/>
+              <a:t>pasahitza</a:t>
+            </a:r>
+            <a:r>
+              <a:rPr lang="es-ES" sz="2500" dirty="0"/>
+              <a:t> </a:t>
+            </a:r>
+            <a:r>
+              <a:rPr lang="es-ES" sz="2500" dirty="0" err="1"/>
+              <a:t>aldatu</a:t>
+            </a:r>
+            <a:r>
+              <a:rPr lang="es-ES" sz="2500" dirty="0"/>
+              <a:t> </a:t>
+            </a:r>
+            <a:r>
+              <a:rPr lang="es-ES" sz="2500" dirty="0" err="1"/>
+              <a:t>behar</a:t>
+            </a:r>
+            <a:r>
+              <a:rPr lang="es-ES" sz="2500" dirty="0"/>
+              <a:t> da.</a:t>
+            </a:r>
+          </a:p>
+          <a:p>
+            <a:pPr>
+              <a:buFont typeface="Arial" panose="020B0604020202020204" pitchFamily="34" charset="0"/>
+              <a:buChar char="•"/>
+            </a:pPr>
+            <a:r>
+              <a:rPr lang="es-ES" sz="2500" dirty="0" err="1"/>
+              <a:t>Pasahitza</a:t>
+            </a:r>
+            <a:r>
+              <a:rPr lang="es-ES" sz="2500" dirty="0"/>
+              <a:t> 5 </a:t>
+            </a:r>
+            <a:r>
+              <a:rPr lang="es-ES" sz="2500" dirty="0" err="1"/>
+              <a:t>aldiz</a:t>
+            </a:r>
+            <a:r>
+              <a:rPr lang="es-ES" sz="2500" dirty="0"/>
+              <a:t> </a:t>
+            </a:r>
+            <a:r>
+              <a:rPr lang="es-ES" sz="2500" dirty="0" err="1"/>
+              <a:t>jarraian</a:t>
+            </a:r>
+            <a:r>
+              <a:rPr lang="es-ES" sz="2500" dirty="0"/>
+              <a:t> </a:t>
+            </a:r>
+            <a:r>
+              <a:rPr lang="es-ES" sz="2500" dirty="0" err="1"/>
+              <a:t>gaizki</a:t>
+            </a:r>
+            <a:r>
+              <a:rPr lang="es-ES" sz="2500" dirty="0"/>
+              <a:t> </a:t>
+            </a:r>
+            <a:r>
+              <a:rPr lang="es-ES" sz="2500" dirty="0" err="1"/>
+              <a:t>sartzen</a:t>
+            </a:r>
+            <a:r>
+              <a:rPr lang="es-ES" sz="2500" dirty="0"/>
+              <a:t> </a:t>
+            </a:r>
+            <a:r>
+              <a:rPr lang="es-ES" sz="2500" dirty="0" err="1"/>
+              <a:t>bada</a:t>
+            </a:r>
+            <a:r>
+              <a:rPr lang="es-ES" sz="2500" dirty="0"/>
+              <a:t>, </a:t>
+            </a:r>
+            <a:r>
+              <a:rPr lang="es-ES" sz="2500" dirty="0" err="1"/>
+              <a:t>kontua</a:t>
+            </a:r>
+            <a:r>
+              <a:rPr lang="es-ES" sz="2500" dirty="0"/>
+              <a:t> 30 </a:t>
+            </a:r>
+            <a:r>
+              <a:rPr lang="es-ES" sz="2500" dirty="0" err="1"/>
+              <a:t>minutuz</a:t>
+            </a:r>
+            <a:r>
+              <a:rPr lang="es-ES" sz="2500" dirty="0"/>
+              <a:t> </a:t>
+            </a:r>
+            <a:r>
+              <a:rPr lang="es-ES" sz="2500" dirty="0" err="1"/>
+              <a:t>blokeatuta</a:t>
+            </a:r>
+            <a:r>
+              <a:rPr lang="es-ES" sz="2500" dirty="0"/>
+              <a:t> izango da.</a:t>
+            </a:r>
+          </a:p>
+          <a:p>
+            <a:pPr>
+              <a:buFont typeface="Arial" panose="020B0604020202020204" pitchFamily="34" charset="0"/>
+              <a:buChar char="•"/>
+            </a:pPr>
+            <a:r>
+              <a:rPr lang="es-ES" sz="2500" dirty="0" err="1"/>
+              <a:t>Administratzailearen</a:t>
+            </a:r>
+            <a:r>
+              <a:rPr lang="es-ES" sz="2500" dirty="0"/>
+              <a:t> </a:t>
+            </a:r>
+            <a:r>
+              <a:rPr lang="es-ES" sz="2500" dirty="0" err="1"/>
+              <a:t>kontuan</a:t>
+            </a:r>
+            <a:r>
+              <a:rPr lang="es-ES" sz="2500" dirty="0"/>
+              <a:t> ere </a:t>
+            </a:r>
+            <a:r>
+              <a:rPr lang="es-ES" sz="2500" dirty="0" err="1"/>
+              <a:t>politika</a:t>
+            </a:r>
+            <a:r>
+              <a:rPr lang="es-ES" sz="2500" dirty="0"/>
+              <a:t> </a:t>
+            </a:r>
+            <a:r>
+              <a:rPr lang="es-ES" sz="2500" dirty="0" err="1"/>
+              <a:t>hauek</a:t>
+            </a:r>
+            <a:r>
+              <a:rPr lang="es-ES" sz="2500" dirty="0"/>
+              <a:t> </a:t>
+            </a:r>
+            <a:r>
+              <a:rPr lang="es-ES" sz="2500" dirty="0" err="1"/>
+              <a:t>eragina</a:t>
+            </a:r>
+            <a:r>
+              <a:rPr lang="es-ES" sz="2500" dirty="0"/>
+              <a:t> </a:t>
+            </a:r>
+            <a:r>
+              <a:rPr lang="es-ES" sz="2500" dirty="0" err="1"/>
+              <a:t>izatea</a:t>
+            </a:r>
+            <a:r>
+              <a:rPr lang="es-ES" sz="2500" dirty="0"/>
+              <a:t> </a:t>
+            </a:r>
+            <a:r>
+              <a:rPr lang="es-ES" sz="2500" dirty="0" err="1"/>
+              <a:t>ahalbidetu</a:t>
+            </a:r>
+            <a:r>
+              <a:rPr lang="es-ES" sz="2500" dirty="0"/>
+              <a:t> </a:t>
+            </a:r>
+            <a:r>
+              <a:rPr lang="es-ES" sz="2500" dirty="0" err="1"/>
+              <a:t>egin</a:t>
+            </a:r>
+            <a:r>
+              <a:rPr lang="es-ES" sz="2500" dirty="0"/>
+              <a:t> </a:t>
+            </a:r>
+            <a:r>
+              <a:rPr lang="es-ES" sz="2500" dirty="0" err="1"/>
+              <a:t>dugu</a:t>
+            </a:r>
+            <a:r>
+              <a:rPr lang="es-ES" sz="2500" dirty="0"/>
+              <a:t>.</a:t>
             </a:r>
           </a:p>
           <a:p>
@@ -6391,6 +6691,42 @@
           </a:p>
         </p:txBody>
       </p:sp>
+      <p:pic>
+        <p:nvPicPr>
+          <p:cNvPr id="6" name="Imagen 5">
+            <a:extLst>
+              <a:ext uri="{FF2B5EF4-FFF2-40B4-BE49-F238E27FC236}">
+                <a16:creationId xmlns:a16="http://schemas.microsoft.com/office/drawing/2014/main" id="{53CDB0D2-499A-9373-9E56-50A99A1AC7A2}"/>
+              </a:ext>
+            </a:extLst>
+          </p:cNvPr>
+          <p:cNvPicPr>
+            <a:picLocks noChangeAspect="1"/>
+          </p:cNvPicPr>
+          <p:nvPr/>
+        </p:nvPicPr>
+        <p:blipFill>
+          <a:blip r:embed="rId2">
+            <a:extLst>
+              <a:ext uri="{28A0092B-C50C-407E-A947-70E740481C1C}">
+                <a14:useLocalDpi xmlns:a14="http://schemas.microsoft.com/office/drawing/2010/main" val="0"/>
+              </a:ext>
+            </a:extLst>
+          </a:blip>
+          <a:stretch>
+            <a:fillRect/>
+          </a:stretch>
+        </p:blipFill>
+        <p:spPr>
+          <a:xfrm>
+            <a:off x="7452852" y="2445774"/>
+            <a:ext cx="4242608" cy="3721510"/>
+          </a:xfrm>
+          <a:prstGeom prst="rect">
+            <a:avLst/>
+          </a:prstGeom>
+        </p:spPr>
+      </p:pic>
     </p:spTree>
     <p:extLst>
       <p:ext uri="{BB962C8B-B14F-4D97-AF65-F5344CB8AC3E}">

--- a/Aurkezpena/1.Erronka Aurkezpena.pptx
+++ b/Aurkezpena/1.Erronka Aurkezpena.pptx
@@ -19,8 +19,9 @@
     <p:sldId id="268" r:id="rId13"/>
     <p:sldId id="269" r:id="rId14"/>
     <p:sldId id="270" r:id="rId15"/>
-    <p:sldId id="271" r:id="rId16"/>
-    <p:sldId id="272" r:id="rId17"/>
+    <p:sldId id="273" r:id="rId16"/>
+    <p:sldId id="271" r:id="rId17"/>
+    <p:sldId id="272" r:id="rId18"/>
   </p:sldIdLst>
   <p:sldSz cx="12192000" cy="6858000"/>
   <p:notesSz cx="6858000" cy="9144000"/>
@@ -6239,10 +6240,9 @@
           <a:lstStyle/>
           <a:p>
             <a:r>
-              <a:rPr lang="eu-ES" sz="3200" dirty="0"/>
+              <a:rPr lang="eu-ES" sz="3200" noProof="0" dirty="0"/>
               <a:t>SISTEMA ERAGILEAK EZARTZEA</a:t>
             </a:r>
-            <a:endParaRPr lang="eu-ES" sz="3200" noProof="0" dirty="0"/>
           </a:p>
         </p:txBody>
       </p:sp>
@@ -6265,7 +6265,7 @@
         <p:spPr>
           <a:xfrm>
             <a:off x="1195583" y="3045377"/>
-            <a:ext cx="6257269" cy="2873642"/>
+            <a:ext cx="5657501" cy="2873642"/>
           </a:xfrm>
         </p:spPr>
         <p:txBody>
@@ -6279,28 +6279,8 @@
               <a:buChar char="•"/>
             </a:pPr>
             <a:r>
-              <a:rPr lang="es-ES" sz="2500" dirty="0" err="1"/>
-              <a:t>Gutxienez</a:t>
-            </a:r>
-            <a:r>
-              <a:rPr lang="es-ES" sz="2500" dirty="0"/>
-              <a:t> 8 </a:t>
-            </a:r>
-            <a:r>
-              <a:rPr lang="es-ES" sz="2500" dirty="0" err="1"/>
-              <a:t>karaktereko</a:t>
-            </a:r>
-            <a:r>
-              <a:rPr lang="es-ES" sz="2500" dirty="0"/>
-              <a:t> </a:t>
-            </a:r>
-            <a:r>
-              <a:rPr lang="es-ES" sz="2500" dirty="0" err="1"/>
-              <a:t>pasahitzak</a:t>
-            </a:r>
-            <a:r>
-              <a:rPr lang="es-ES" sz="2500" dirty="0"/>
-              <a:t>.</a:t>
+              <a:rPr lang="eu-ES" sz="2500" noProof="0" dirty="0"/>
+              <a:t>Gutxienez 8 karaktereko pasahitzak.</a:t>
             </a:r>
           </a:p>
           <a:p>
@@ -6309,36 +6289,16 @@
               <a:buChar char="•"/>
             </a:pPr>
             <a:r>
-              <a:rPr lang="es-ES" sz="2500" dirty="0" err="1"/>
-              <a:t>Azken</a:t>
-            </a:r>
-            <a:r>
-              <a:rPr lang="es-ES" sz="2500" dirty="0"/>
-              <a:t> 12 </a:t>
-            </a:r>
-            <a:r>
-              <a:rPr lang="es-ES" sz="2500" dirty="0" err="1"/>
-              <a:t>pasahitz</a:t>
-            </a:r>
-            <a:r>
-              <a:rPr lang="es-ES" sz="2500" dirty="0"/>
-              <a:t> </a:t>
-            </a:r>
-            <a:r>
-              <a:rPr lang="es-ES" sz="2500" dirty="0" err="1"/>
-              <a:t>gogoratuko</a:t>
-            </a:r>
-            <a:r>
-              <a:rPr lang="es-ES" sz="2500" dirty="0"/>
-              <a:t> </a:t>
-            </a:r>
-            <a:r>
-              <a:rPr lang="es-ES" sz="2500" dirty="0" err="1"/>
-              <a:t>dira</a:t>
-            </a:r>
-            <a:r>
-              <a:rPr lang="es-ES" sz="2500" dirty="0"/>
-              <a:t> (Historial de contraseñas).</a:t>
+              <a:rPr lang="eu-ES" sz="2500" noProof="0" dirty="0"/>
+              <a:t>Azken 12 pasahitz gogoratuko dira (Historial de </a:t>
+            </a:r>
+            <a:r>
+              <a:rPr lang="eu-ES" sz="2500" noProof="0" dirty="0" err="1"/>
+              <a:t>contraseñas</a:t>
+            </a:r>
+            <a:r>
+              <a:rPr lang="eu-ES" sz="2500" noProof="0" dirty="0"/>
+              <a:t>).</a:t>
             </a:r>
           </a:p>
           <a:p>
@@ -6347,68 +6307,8 @@
               <a:buChar char="•"/>
             </a:pPr>
             <a:r>
-              <a:rPr lang="es-ES" sz="2500" dirty="0" err="1"/>
-              <a:t>Konplexutasuna</a:t>
-            </a:r>
-            <a:r>
-              <a:rPr lang="es-ES" sz="2500" dirty="0"/>
-              <a:t> bai (</a:t>
-            </a:r>
-            <a:r>
-              <a:rPr lang="es-ES" sz="2500" dirty="0" err="1"/>
-              <a:t>Karaktere</a:t>
-            </a:r>
-            <a:r>
-              <a:rPr lang="es-ES" sz="2500" dirty="0"/>
-              <a:t> </a:t>
-            </a:r>
-            <a:r>
-              <a:rPr lang="es-ES" sz="2500" dirty="0" err="1"/>
-              <a:t>berezien</a:t>
-            </a:r>
-            <a:r>
-              <a:rPr lang="es-ES" sz="2500" dirty="0"/>
-              <a:t> </a:t>
-            </a:r>
-            <a:r>
-              <a:rPr lang="es-ES" sz="2500" dirty="0" err="1"/>
-              <a:t>erabilera</a:t>
-            </a:r>
-            <a:r>
-              <a:rPr lang="es-ES" sz="2500" dirty="0"/>
-              <a:t>, </a:t>
-            </a:r>
-            <a:r>
-              <a:rPr lang="es-ES" sz="2500" dirty="0" err="1"/>
-              <a:t>maiuskulak</a:t>
-            </a:r>
-            <a:r>
-              <a:rPr lang="es-ES" sz="2500" dirty="0"/>
-              <a:t> eta </a:t>
-            </a:r>
-            <a:r>
-              <a:rPr lang="es-ES" sz="2500" dirty="0" err="1"/>
-              <a:t>zenbakiak</a:t>
-            </a:r>
-            <a:r>
-              <a:rPr lang="es-ES" sz="2500" dirty="0"/>
-              <a:t> </a:t>
-            </a:r>
-            <a:r>
-              <a:rPr lang="es-ES" sz="2500" dirty="0" err="1"/>
-              <a:t>erabili</a:t>
-            </a:r>
-            <a:r>
-              <a:rPr lang="es-ES" sz="2500" dirty="0"/>
-              <a:t> </a:t>
-            </a:r>
-            <a:r>
-              <a:rPr lang="es-ES" sz="2500" dirty="0" err="1"/>
-              <a:t>beharra</a:t>
-            </a:r>
-            <a:r>
-              <a:rPr lang="es-ES" sz="2500" dirty="0"/>
-              <a:t>).</a:t>
+              <a:rPr lang="eu-ES" sz="2500" noProof="0" dirty="0"/>
+              <a:t>Konplexutasuna bai (Karaktere berezien erabilera, maiuskulak eta zenbakiak erabili beharra).</a:t>
             </a:r>
           </a:p>
           <a:p>
@@ -6417,48 +6317,8 @@
               <a:buChar char="•"/>
             </a:pPr>
             <a:r>
-              <a:rPr lang="es-ES" sz="2500" dirty="0"/>
-              <a:t>60 </a:t>
-            </a:r>
-            <a:r>
-              <a:rPr lang="es-ES" sz="2500" dirty="0" err="1"/>
-              <a:t>egunean</a:t>
-            </a:r>
-            <a:r>
-              <a:rPr lang="es-ES" sz="2500" dirty="0"/>
-              <a:t> </a:t>
-            </a:r>
-            <a:r>
-              <a:rPr lang="es-ES" sz="2500" dirty="0" err="1"/>
-              <a:t>behin</a:t>
-            </a:r>
-            <a:r>
-              <a:rPr lang="es-ES" sz="2500" dirty="0"/>
-              <a:t> </a:t>
-            </a:r>
-            <a:r>
-              <a:rPr lang="es-ES" sz="2500" dirty="0" err="1"/>
-              <a:t>pasahitza</a:t>
-            </a:r>
-            <a:r>
-              <a:rPr lang="es-ES" sz="2500" dirty="0"/>
-              <a:t> </a:t>
-            </a:r>
-            <a:r>
-              <a:rPr lang="es-ES" sz="2500" dirty="0" err="1"/>
-              <a:t>aldatu</a:t>
-            </a:r>
-            <a:r>
-              <a:rPr lang="es-ES" sz="2500" dirty="0"/>
-              <a:t> </a:t>
-            </a:r>
-            <a:r>
-              <a:rPr lang="es-ES" sz="2500" dirty="0" err="1"/>
-              <a:t>behar</a:t>
-            </a:r>
-            <a:r>
-              <a:rPr lang="es-ES" sz="2500" dirty="0"/>
-              <a:t> da.</a:t>
+              <a:rPr lang="eu-ES" sz="2500" noProof="0" dirty="0"/>
+              <a:t>60 egunean behin pasahitza aldatu behar da.</a:t>
             </a:r>
           </a:p>
           <a:p>
@@ -6467,76 +6327,8 @@
               <a:buChar char="•"/>
             </a:pPr>
             <a:r>
-              <a:rPr lang="es-ES" sz="2500" dirty="0" err="1"/>
-              <a:t>Pasahitza</a:t>
-            </a:r>
-            <a:r>
-              <a:rPr lang="es-ES" sz="2500" dirty="0"/>
-              <a:t> 5 </a:t>
-            </a:r>
-            <a:r>
-              <a:rPr lang="es-ES" sz="2500" dirty="0" err="1"/>
-              <a:t>aldiz</a:t>
-            </a:r>
-            <a:r>
-              <a:rPr lang="es-ES" sz="2500" dirty="0"/>
-              <a:t> </a:t>
-            </a:r>
-            <a:r>
-              <a:rPr lang="es-ES" sz="2500" dirty="0" err="1"/>
-              <a:t>jarraian</a:t>
-            </a:r>
-            <a:r>
-              <a:rPr lang="es-ES" sz="2500" dirty="0"/>
-              <a:t> </a:t>
-            </a:r>
-            <a:r>
-              <a:rPr lang="es-ES" sz="2500" dirty="0" err="1"/>
-              <a:t>gaizki</a:t>
-            </a:r>
-            <a:r>
-              <a:rPr lang="es-ES" sz="2500" dirty="0"/>
-              <a:t> </a:t>
-            </a:r>
-            <a:r>
-              <a:rPr lang="es-ES" sz="2500" dirty="0" err="1"/>
-              <a:t>sartzen</a:t>
-            </a:r>
-            <a:r>
-              <a:rPr lang="es-ES" sz="2500" dirty="0"/>
-              <a:t> </a:t>
-            </a:r>
-            <a:r>
-              <a:rPr lang="es-ES" sz="2500" dirty="0" err="1"/>
-              <a:t>bada</a:t>
-            </a:r>
-            <a:r>
-              <a:rPr lang="es-ES" sz="2500" dirty="0"/>
-              <a:t>, </a:t>
-            </a:r>
-            <a:r>
-              <a:rPr lang="es-ES" sz="2500" dirty="0" err="1"/>
-              <a:t>kontua</a:t>
-            </a:r>
-            <a:r>
-              <a:rPr lang="es-ES" sz="2500" dirty="0"/>
-              <a:t> 30 </a:t>
-            </a:r>
-            <a:r>
-              <a:rPr lang="es-ES" sz="2500" dirty="0" err="1"/>
-              <a:t>minutuz</a:t>
-            </a:r>
-            <a:r>
-              <a:rPr lang="es-ES" sz="2500" dirty="0"/>
-              <a:t> </a:t>
-            </a:r>
-            <a:r>
-              <a:rPr lang="es-ES" sz="2500" dirty="0" err="1"/>
-              <a:t>blokeatuta</a:t>
-            </a:r>
-            <a:r>
-              <a:rPr lang="es-ES" sz="2500" dirty="0"/>
-              <a:t> izango da.</a:t>
+              <a:rPr lang="eu-ES" sz="2500" noProof="0" dirty="0"/>
+              <a:t>Pasahitza 5 aldiz jarraian gaizki sartzen bada, kontua 30 minutuz blokeatuta izango da.</a:t>
             </a:r>
           </a:p>
           <a:p>
@@ -6545,76 +6337,8 @@
               <a:buChar char="•"/>
             </a:pPr>
             <a:r>
-              <a:rPr lang="es-ES" sz="2500" dirty="0" err="1"/>
-              <a:t>Administratzailearen</a:t>
-            </a:r>
-            <a:r>
-              <a:rPr lang="es-ES" sz="2500" dirty="0"/>
-              <a:t> </a:t>
-            </a:r>
-            <a:r>
-              <a:rPr lang="es-ES" sz="2500" dirty="0" err="1"/>
-              <a:t>kontuan</a:t>
-            </a:r>
-            <a:r>
-              <a:rPr lang="es-ES" sz="2500" dirty="0"/>
-              <a:t> ere </a:t>
-            </a:r>
-            <a:r>
-              <a:rPr lang="es-ES" sz="2500" dirty="0" err="1"/>
-              <a:t>politika</a:t>
-            </a:r>
-            <a:r>
-              <a:rPr lang="es-ES" sz="2500" dirty="0"/>
-              <a:t> </a:t>
-            </a:r>
-            <a:r>
-              <a:rPr lang="es-ES" sz="2500" dirty="0" err="1"/>
-              <a:t>hauek</a:t>
-            </a:r>
-            <a:r>
-              <a:rPr lang="es-ES" sz="2500" dirty="0"/>
-              <a:t> </a:t>
-            </a:r>
-            <a:r>
-              <a:rPr lang="es-ES" sz="2500" dirty="0" err="1"/>
-              <a:t>eragina</a:t>
-            </a:r>
-            <a:r>
-              <a:rPr lang="es-ES" sz="2500" dirty="0"/>
-              <a:t> </a:t>
-            </a:r>
-            <a:r>
-              <a:rPr lang="es-ES" sz="2500" dirty="0" err="1"/>
-              <a:t>izatea</a:t>
-            </a:r>
-            <a:r>
-              <a:rPr lang="es-ES" sz="2500" dirty="0"/>
-              <a:t> </a:t>
-            </a:r>
-            <a:r>
-              <a:rPr lang="es-ES" sz="2500" dirty="0" err="1"/>
-              <a:t>ahalbidetu</a:t>
-            </a:r>
-            <a:r>
-              <a:rPr lang="es-ES" sz="2500" dirty="0"/>
-              <a:t> </a:t>
-            </a:r>
-            <a:r>
-              <a:rPr lang="es-ES" sz="2500" dirty="0" err="1"/>
-              <a:t>egin</a:t>
-            </a:r>
-            <a:r>
-              <a:rPr lang="es-ES" sz="2500" dirty="0"/>
-              <a:t> </a:t>
-            </a:r>
-            <a:r>
-              <a:rPr lang="es-ES" sz="2500" dirty="0" err="1"/>
-              <a:t>dugu</a:t>
-            </a:r>
-            <a:r>
-              <a:rPr lang="es-ES" sz="2500" dirty="0"/>
-              <a:t>.</a:t>
+              <a:rPr lang="eu-ES" sz="2500" noProof="0" dirty="0"/>
+              <a:t>Administratzailearen kontuan ere politika hauek eragina izatea ahalbidetu egin dugu.</a:t>
             </a:r>
           </a:p>
           <a:p>
@@ -6622,7 +6346,7 @@
               <a:buFontTx/>
               <a:buChar char="-"/>
             </a:pPr>
-            <a:endParaRPr lang="eu-ES" sz="1400" b="1" dirty="0"/>
+            <a:endParaRPr lang="eu-ES" sz="1400" b="1" noProof="0" dirty="0"/>
           </a:p>
         </p:txBody>
       </p:sp>
@@ -6655,39 +6379,15 @@
           <a:lstStyle/>
           <a:p>
             <a:r>
-              <a:rPr lang="es-ES" sz="2000" dirty="0"/>
-              <a:t>3. </a:t>
-            </a:r>
-            <a:r>
-              <a:rPr lang="es-ES" sz="2000" dirty="0" err="1"/>
-              <a:t>Segurtasun</a:t>
-            </a:r>
-            <a:r>
-              <a:rPr lang="es-ES" sz="2000" dirty="0"/>
-              <a:t> </a:t>
-            </a:r>
-            <a:r>
-              <a:rPr lang="es-ES" sz="2000" dirty="0" err="1"/>
-              <a:t>politikak</a:t>
-            </a:r>
-            <a:r>
-              <a:rPr lang="es-ES" sz="2000" dirty="0"/>
-              <a:t> (</a:t>
-            </a:r>
-            <a:r>
-              <a:rPr lang="es-ES" sz="2000" dirty="0" err="1"/>
-              <a:t>Pasahitzak</a:t>
-            </a:r>
-            <a:r>
-              <a:rPr lang="es-ES" sz="2000" dirty="0"/>
-              <a:t>)</a:t>
-            </a:r>
-          </a:p>
-          <a:p>
-            <a:endParaRPr lang="es-ES" sz="2000" dirty="0"/>
-          </a:p>
-          <a:p>
-            <a:endParaRPr lang="es-ES" sz="2000" dirty="0"/>
+              <a:rPr lang="eu-ES" sz="2000" noProof="0" dirty="0"/>
+              <a:t>3. Segurtasun politikak (Pasahitzak)</a:t>
+            </a:r>
+          </a:p>
+          <a:p>
+            <a:endParaRPr lang="eu-ES" sz="2000" noProof="0" dirty="0"/>
+          </a:p>
+          <a:p>
+            <a:endParaRPr lang="eu-ES" sz="2000" noProof="0" dirty="0"/>
           </a:p>
         </p:txBody>
       </p:sp>
@@ -6719,7 +6419,7 @@
         </p:blipFill>
         <p:spPr>
           <a:xfrm>
-            <a:off x="7452852" y="2445774"/>
+            <a:off x="6980903" y="2445774"/>
             <a:ext cx="4242608" cy="3721510"/>
           </a:xfrm>
           <a:prstGeom prst="rect">
@@ -6790,10 +6490,9 @@
           <a:lstStyle/>
           <a:p>
             <a:r>
-              <a:rPr lang="eu-ES" sz="3200" dirty="0"/>
+              <a:rPr lang="eu-ES" sz="3200" noProof="0" dirty="0"/>
               <a:t>SISTEMA ERAGILEAK EZARTZEA</a:t>
             </a:r>
-            <a:endParaRPr lang="eu-ES" sz="3200" noProof="0" dirty="0"/>
           </a:p>
         </p:txBody>
       </p:sp>
@@ -6843,10 +6542,9 @@
               <a:buNone/>
             </a:pPr>
             <a:r>
-              <a:rPr lang="eu-ES" sz="1400" b="1" dirty="0"/>
+              <a:rPr lang="eu-ES" sz="1400" b="1" noProof="0" dirty="0"/>
               <a:t>Bolumen kopurua: 1 (100GB)</a:t>
             </a:r>
-            <a:endParaRPr lang="eu-ES" sz="1400" b="1" noProof="0" dirty="0"/>
           </a:p>
         </p:txBody>
       </p:sp>
@@ -6879,22 +6577,9 @@
           <a:lstStyle/>
           <a:p>
             <a:r>
-              <a:rPr lang="es-ES" sz="2000" dirty="0"/>
-              <a:t>4. </a:t>
-            </a:r>
-            <a:r>
-              <a:rPr lang="es-ES" sz="2000" dirty="0" err="1"/>
-              <a:t>Diskoak</a:t>
-            </a:r>
-            <a:r>
-              <a:rPr lang="es-ES" sz="2000" dirty="0"/>
-              <a:t> eta </a:t>
-            </a:r>
-            <a:r>
-              <a:rPr lang="es-ES" sz="2000" dirty="0" err="1"/>
-              <a:t>bolumenak</a:t>
-            </a:r>
-            <a:endParaRPr lang="es-ES" sz="2000" dirty="0"/>
+              <a:rPr lang="eu-ES" sz="2000" noProof="0" dirty="0"/>
+              <a:t>4. Diskoak eta bolumenak</a:t>
+            </a:r>
           </a:p>
         </p:txBody>
       </p:sp>
@@ -6997,10 +6682,9 @@
           <a:lstStyle/>
           <a:p>
             <a:r>
-              <a:rPr lang="eu-ES" sz="3200" dirty="0"/>
+              <a:rPr lang="eu-ES" sz="3200" noProof="0" dirty="0"/>
               <a:t>SISTEMA ERAGILEAK EZARTZEA</a:t>
             </a:r>
-            <a:endParaRPr lang="eu-ES" sz="3200" noProof="0" dirty="0"/>
           </a:p>
         </p:txBody>
       </p:sp>
@@ -7046,15 +6730,15 @@
               <a:buChar char="-"/>
             </a:pPr>
             <a:r>
-              <a:rPr lang="eu-ES" sz="1400" b="1" dirty="0"/>
+              <a:rPr lang="eu-ES" sz="1400" b="1" noProof="0" dirty="0"/>
               <a:t>Segurtasuna (</a:t>
             </a:r>
             <a:r>
-              <a:rPr lang="eu-ES" sz="1400" b="1" dirty="0" err="1"/>
+              <a:rPr lang="eu-ES" sz="1400" b="1" noProof="0" dirty="0" err="1"/>
               <a:t>Parietatea</a:t>
             </a:r>
             <a:r>
-              <a:rPr lang="eu-ES" sz="1400" b="1" dirty="0"/>
+              <a:rPr lang="eu-ES" sz="1400" b="1" noProof="0" dirty="0"/>
               <a:t>)</a:t>
             </a:r>
           </a:p>
@@ -7064,15 +6748,15 @@
               <a:buChar char="-"/>
             </a:pPr>
             <a:r>
-              <a:rPr lang="eu-ES" sz="1400" b="1" dirty="0"/>
+              <a:rPr lang="eu-ES" sz="1400" b="1" noProof="0" dirty="0"/>
               <a:t>3 diskoetatik 2ren memoria erabilgarri dugu (3.na </a:t>
             </a:r>
             <a:r>
-              <a:rPr lang="eu-ES" sz="1400" b="1" dirty="0" err="1"/>
+              <a:rPr lang="eu-ES" sz="1400" b="1" noProof="0" dirty="0" err="1"/>
               <a:t>parietaterako</a:t>
             </a:r>
             <a:r>
-              <a:rPr lang="eu-ES" sz="1400" b="1" dirty="0"/>
+              <a:rPr lang="eu-ES" sz="1400" b="1" noProof="0" dirty="0"/>
               <a:t> geratuko da.)</a:t>
             </a:r>
           </a:p>
@@ -7082,7 +6766,7 @@
               <a:buChar char="-"/>
             </a:pPr>
             <a:r>
-              <a:rPr lang="eu-ES" sz="1400" b="1" dirty="0"/>
+              <a:rPr lang="eu-ES" sz="1400" b="1" noProof="0" dirty="0"/>
               <a:t>Disko 1 apurtzen bada, sistemak martxan jarraitu dezake datuak galdu gabe disko gogorra aldatu arte.</a:t>
             </a:r>
           </a:p>
@@ -7117,7 +6801,7 @@
           <a:lstStyle/>
           <a:p>
             <a:r>
-              <a:rPr lang="es-ES" sz="2000" dirty="0"/>
+              <a:rPr lang="eu-ES" sz="2000" noProof="0" dirty="0"/>
               <a:t>5. RAID</a:t>
             </a:r>
           </a:p>
@@ -7222,10 +6906,9 @@
           <a:lstStyle/>
           <a:p>
             <a:r>
-              <a:rPr lang="eu-ES" sz="3200" dirty="0"/>
+              <a:rPr lang="eu-ES" sz="3200" noProof="0" dirty="0"/>
               <a:t>SISTEMA ERAGILEAK EZARTZEA</a:t>
             </a:r>
-            <a:endParaRPr lang="eu-ES" sz="3200" noProof="0" dirty="0"/>
           </a:p>
         </p:txBody>
       </p:sp>
@@ -7268,7 +6951,7 @@
               <a:buChar char="-"/>
             </a:pPr>
             <a:r>
-              <a:rPr lang="eu-ES" sz="2400" b="1" dirty="0"/>
+              <a:rPr lang="eu-ES" sz="2400" b="1" noProof="0" dirty="0"/>
               <a:t>IIS web zerbitzaria</a:t>
             </a:r>
           </a:p>
@@ -7278,11 +6961,11 @@
               <a:buChar char="-"/>
             </a:pPr>
             <a:r>
-              <a:rPr lang="eu-ES" sz="2400" b="1" dirty="0" err="1"/>
+              <a:rPr lang="eu-ES" sz="2400" b="1" noProof="0" dirty="0" err="1"/>
               <a:t>Iscsi</a:t>
             </a:r>
             <a:r>
-              <a:rPr lang="eu-ES" sz="2400" b="1" dirty="0"/>
+              <a:rPr lang="eu-ES" sz="2400" b="1" noProof="0" dirty="0"/>
               <a:t> (Karpeten kuoten administratzailea)</a:t>
             </a:r>
           </a:p>
@@ -7292,22 +6975,22 @@
               <a:buChar char="-"/>
             </a:pPr>
             <a:r>
-              <a:rPr lang="eu-ES" sz="2400" b="1" dirty="0"/>
+              <a:rPr lang="eu-ES" sz="2400" b="1" noProof="0" dirty="0"/>
               <a:t>Windows </a:t>
             </a:r>
             <a:r>
-              <a:rPr lang="eu-ES" sz="2400" b="1" dirty="0" err="1"/>
+              <a:rPr lang="eu-ES" sz="2400" b="1" noProof="0" dirty="0" err="1"/>
               <a:t>server</a:t>
             </a:r>
             <a:r>
-              <a:rPr lang="eu-ES" sz="2400" b="1" dirty="0"/>
+              <a:rPr lang="eu-ES" sz="2400" b="1" noProof="0" dirty="0"/>
               <a:t> </a:t>
             </a:r>
             <a:r>
-              <a:rPr lang="eu-ES" sz="2400" b="1" dirty="0" err="1"/>
+              <a:rPr lang="eu-ES" sz="2400" b="1" noProof="0" dirty="0" err="1"/>
               <a:t>backup</a:t>
             </a:r>
-            <a:endParaRPr lang="eu-ES" sz="2400" b="1" dirty="0"/>
+            <a:endParaRPr lang="eu-ES" sz="2400" b="1" noProof="0" dirty="0"/>
           </a:p>
         </p:txBody>
       </p:sp>
@@ -7340,38 +7023,9 @@
           <a:lstStyle/>
           <a:p>
             <a:r>
-              <a:rPr lang="es-ES" sz="2000" dirty="0"/>
-              <a:t>6. </a:t>
-            </a:r>
-            <a:r>
-              <a:rPr lang="es-ES" sz="2000" dirty="0" err="1"/>
-              <a:t>Sistemaren</a:t>
-            </a:r>
-            <a:r>
-              <a:rPr lang="es-ES" sz="2000" dirty="0"/>
-              <a:t> Rol-</a:t>
-            </a:r>
-            <a:r>
-              <a:rPr lang="es-ES" sz="2000" dirty="0" err="1"/>
-              <a:t>ak</a:t>
-            </a:r>
-            <a:r>
-              <a:rPr lang="es-ES" sz="2000" dirty="0"/>
-              <a:t> eta </a:t>
-            </a:r>
-            <a:r>
-              <a:rPr lang="es-ES" sz="2000" dirty="0" err="1"/>
-              <a:t>ezaugarriak</a:t>
-            </a:r>
-            <a:r>
-              <a:rPr lang="es-ES" sz="2000" dirty="0"/>
-              <a:t> </a:t>
-            </a:r>
-            <a:r>
-              <a:rPr lang="es-ES" sz="2000" dirty="0" err="1"/>
-              <a:t>gehitu</a:t>
-            </a:r>
-            <a:endParaRPr lang="es-ES" sz="2000" dirty="0"/>
+              <a:rPr lang="eu-ES" sz="2000" noProof="0" dirty="0"/>
+              <a:t>6. Sistemaren Rol-ak eta ezaugarriak gehitu</a:t>
+            </a:r>
           </a:p>
         </p:txBody>
       </p:sp>
@@ -7474,10 +7128,9 @@
           <a:lstStyle/>
           <a:p>
             <a:r>
-              <a:rPr lang="eu-ES" sz="3200" dirty="0"/>
+              <a:rPr lang="eu-ES" sz="3200" noProof="0" dirty="0"/>
               <a:t>SISTEMA ERAGILEAK EZARTZEA</a:t>
             </a:r>
-            <a:endParaRPr lang="eu-ES" sz="3200" noProof="0" dirty="0"/>
           </a:p>
         </p:txBody>
       </p:sp>
@@ -7499,13 +7152,13 @@
         </p:nvSpPr>
         <p:spPr>
           <a:xfrm>
-            <a:off x="1195583" y="3045377"/>
-            <a:ext cx="2314533" cy="2003323"/>
+            <a:off x="1195583" y="3065043"/>
+            <a:ext cx="5716494" cy="2460686"/>
           </a:xfrm>
         </p:spPr>
         <p:txBody>
           <a:bodyPr>
-            <a:normAutofit/>
+            <a:normAutofit fontScale="92500"/>
           </a:bodyPr>
           <a:lstStyle/>
           <a:p>
@@ -7513,8 +7166,8 @@
               <a:buNone/>
             </a:pPr>
             <a:r>
-              <a:rPr lang="eu-ES" sz="1400" b="1" noProof="0" dirty="0"/>
-              <a:t>Emandako Espezifikazioak:</a:t>
+              <a:rPr lang="eu-ES" sz="1800" b="1" dirty="0"/>
+              <a:t>Erabiltzaileak eta taldeak:</a:t>
             </a:r>
           </a:p>
           <a:p>
@@ -7523,8 +7176,8 @@
               <a:buChar char="-"/>
             </a:pPr>
             <a:r>
-              <a:rPr lang="eu-ES" sz="1400" b="1" dirty="0"/>
-              <a:t>4gb</a:t>
+              <a:rPr lang="eu-ES" sz="1800" b="1" noProof="0" dirty="0"/>
+              <a:t>Erabiltzaileak sortu.</a:t>
             </a:r>
           </a:p>
           <a:p>
@@ -7533,14 +7186,9 @@
               <a:buChar char="-"/>
             </a:pPr>
             <a:r>
-              <a:rPr lang="eu-ES" sz="1400" b="1" dirty="0"/>
-              <a:t>2 </a:t>
-            </a:r>
-            <a:r>
-              <a:rPr lang="eu-ES" sz="1400" b="1" dirty="0" err="1"/>
-              <a:t>cpu</a:t>
-            </a:r>
-            <a:endParaRPr lang="eu-ES" sz="1400" b="1" dirty="0"/>
+              <a:rPr lang="eu-ES" sz="1800" b="1" dirty="0"/>
+              <a:t>Taldeak sortu.</a:t>
+            </a:r>
           </a:p>
           <a:p>
             <a:pPr>
@@ -7548,16 +7196,18 @@
               <a:buChar char="-"/>
             </a:pPr>
             <a:r>
-              <a:rPr lang="eu-ES" sz="1400" b="1" dirty="0"/>
-              <a:t>50gb sistema eragile</a:t>
-            </a:r>
-          </a:p>
-          <a:p>
-            <a:pPr>
-              <a:buFontTx/>
-              <a:buChar char="-"/>
+              <a:rPr lang="eu-ES" sz="1800" b="1" noProof="0" dirty="0"/>
+              <a:t>Sortutako erabiltzaileak</a:t>
+            </a:r>
+          </a:p>
+          <a:p>
+            <a:pPr marL="0" indent="0">
+              <a:buNone/>
             </a:pPr>
-            <a:endParaRPr lang="eu-ES" sz="1400" b="1" dirty="0"/>
+            <a:r>
+              <a:rPr lang="eu-ES" sz="1800" b="1" noProof="0" dirty="0"/>
+              <a:t>Zertarako? Baimenak ematerako garaian, talde oso bati baimenak ematea azkarragoa eta errazagoa delako, erabiltzaileei banaka ematea baino</a:t>
+            </a:r>
           </a:p>
         </p:txBody>
       </p:sp>
@@ -7590,40 +7240,8 @@
           <a:lstStyle/>
           <a:p>
             <a:r>
-              <a:rPr lang="es-ES" sz="2000" dirty="0"/>
-              <a:t>7. </a:t>
-            </a:r>
-            <a:r>
-              <a:rPr lang="es-ES" sz="2000" dirty="0" err="1"/>
-              <a:t>Erabiltzaileak</a:t>
-            </a:r>
-            <a:r>
-              <a:rPr lang="es-ES" sz="2000" dirty="0"/>
-              <a:t> eta </a:t>
-            </a:r>
-            <a:r>
-              <a:rPr lang="es-ES" sz="2000" dirty="0" err="1"/>
-              <a:t>taldeak</a:t>
-            </a:r>
-            <a:r>
-              <a:rPr lang="es-ES" sz="2000" dirty="0"/>
-              <a:t> (</a:t>
-            </a:r>
-            <a:r>
-              <a:rPr lang="es-ES" sz="2000" dirty="0" err="1"/>
-              <a:t>Baimenak</a:t>
-            </a:r>
-            <a:r>
-              <a:rPr lang="es-ES" sz="2000" dirty="0"/>
-              <a:t> + </a:t>
-            </a:r>
-            <a:r>
-              <a:rPr lang="es-ES" sz="2000" dirty="0" err="1"/>
-              <a:t>Kuotak</a:t>
-            </a:r>
-            <a:r>
-              <a:rPr lang="es-ES" sz="2000" dirty="0"/>
-              <a:t>)</a:t>
+              <a:rPr lang="eu-ES" sz="2000" noProof="0" dirty="0"/>
+              <a:t>7. Erabiltzaileak eta taldeak (Baimenak + Kuotak)</a:t>
             </a:r>
           </a:p>
         </p:txBody>
@@ -7642,6 +7260,416 @@
 </file>
 
 <file path=ppt/slides/slide15.xml><?xml version="1.0" encoding="utf-8"?>
+<p:sld xmlns:a="http://schemas.openxmlformats.org/drawingml/2006/main" xmlns:r="http://schemas.openxmlformats.org/officeDocument/2006/relationships" xmlns:p="http://schemas.openxmlformats.org/presentationml/2006/main">
+  <p:cSld>
+    <p:spTree>
+      <p:nvGrpSpPr>
+        <p:cNvPr id="1" name="">
+          <a:extLst>
+            <a:ext uri="{FF2B5EF4-FFF2-40B4-BE49-F238E27FC236}">
+              <a16:creationId xmlns:a16="http://schemas.microsoft.com/office/drawing/2014/main" id="{81B826FF-189D-D9C3-F533-4B550FA3F6A7}"/>
+            </a:ext>
+          </a:extLst>
+        </p:cNvPr>
+        <p:cNvGrpSpPr/>
+        <p:nvPr/>
+      </p:nvGrpSpPr>
+      <p:grpSpPr>
+        <a:xfrm>
+          <a:off x="0" y="0"/>
+          <a:ext cx="0" cy="0"/>
+          <a:chOff x="0" y="0"/>
+          <a:chExt cx="0" cy="0"/>
+        </a:xfrm>
+      </p:grpSpPr>
+      <p:sp>
+        <p:nvSpPr>
+          <p:cNvPr id="2" name="Título 1">
+            <a:extLst>
+              <a:ext uri="{FF2B5EF4-FFF2-40B4-BE49-F238E27FC236}">
+                <a16:creationId xmlns:a16="http://schemas.microsoft.com/office/drawing/2014/main" id="{8A91C6E5-1B9C-FFE2-B9F6-8954698F4A3F}"/>
+              </a:ext>
+            </a:extLst>
+          </p:cNvPr>
+          <p:cNvSpPr>
+            <a:spLocks noGrp="1"/>
+          </p:cNvSpPr>
+          <p:nvPr>
+            <p:ph type="title"/>
+          </p:nvPr>
+        </p:nvSpPr>
+        <p:spPr>
+          <a:xfrm>
+            <a:off x="1154953" y="1007807"/>
+            <a:ext cx="7261460" cy="997974"/>
+          </a:xfrm>
+        </p:spPr>
+        <p:txBody>
+          <a:bodyPr/>
+          <a:lstStyle/>
+          <a:p>
+            <a:r>
+              <a:rPr lang="eu-ES" sz="3200" noProof="0" dirty="0"/>
+              <a:t>SISTEMA ERAGILEAK EZARTZEA</a:t>
+            </a:r>
+          </a:p>
+        </p:txBody>
+      </p:sp>
+      <p:sp>
+        <p:nvSpPr>
+          <p:cNvPr id="4" name="Marcador de texto 3">
+            <a:extLst>
+              <a:ext uri="{FF2B5EF4-FFF2-40B4-BE49-F238E27FC236}">
+                <a16:creationId xmlns:a16="http://schemas.microsoft.com/office/drawing/2014/main" id="{910849D9-9A0D-652B-4827-405C3EFDED57}"/>
+              </a:ext>
+            </a:extLst>
+          </p:cNvPr>
+          <p:cNvSpPr>
+            <a:spLocks noGrp="1"/>
+          </p:cNvSpPr>
+          <p:nvPr>
+            <p:ph type="body" sz="half" idx="2"/>
+          </p:nvPr>
+        </p:nvSpPr>
+        <p:spPr>
+          <a:xfrm>
+            <a:off x="1195583" y="2445774"/>
+            <a:ext cx="9669062" cy="425245"/>
+          </a:xfrm>
+        </p:spPr>
+        <p:txBody>
+          <a:bodyPr>
+            <a:normAutofit/>
+          </a:bodyPr>
+          <a:lstStyle/>
+          <a:p>
+            <a:r>
+              <a:rPr lang="eu-ES" sz="2000" noProof="0" dirty="0"/>
+              <a:t>7. Erabiltzaileak eta taldeak (Baimenak + Kuotak)</a:t>
+            </a:r>
+          </a:p>
+        </p:txBody>
+      </p:sp>
+      <p:sp>
+        <p:nvSpPr>
+          <p:cNvPr id="8" name="Marcador de contenido 2">
+            <a:extLst>
+              <a:ext uri="{FF2B5EF4-FFF2-40B4-BE49-F238E27FC236}">
+                <a16:creationId xmlns:a16="http://schemas.microsoft.com/office/drawing/2014/main" id="{664A0A42-5268-F8DE-9535-36D420BC50F8}"/>
+              </a:ext>
+            </a:extLst>
+          </p:cNvPr>
+          <p:cNvSpPr txBox="1">
+            <a:spLocks/>
+          </p:cNvSpPr>
+          <p:nvPr/>
+        </p:nvSpPr>
+        <p:spPr>
+          <a:xfrm>
+            <a:off x="1195583" y="2979173"/>
+            <a:ext cx="5549346" cy="2979174"/>
+          </a:xfrm>
+          <a:prstGeom prst="rect">
+            <a:avLst/>
+          </a:prstGeom>
+        </p:spPr>
+        <p:txBody>
+          <a:bodyPr vert="horz" lIns="91440" tIns="45720" rIns="91440" bIns="45720" rtlCol="0" anchor="ctr">
+            <a:normAutofit lnSpcReduction="10000"/>
+          </a:bodyPr>
+          <a:lstStyle>
+            <a:lvl1pPr marL="342900" indent="-342900" algn="l" defTabSz="457200" rtl="0" eaLnBrk="1" latinLnBrk="0" hangingPunct="1">
+              <a:spcBef>
+                <a:spcPts val="1000"/>
+              </a:spcBef>
+              <a:spcAft>
+                <a:spcPts val="0"/>
+              </a:spcAft>
+              <a:buClr>
+                <a:schemeClr val="bg2">
+                  <a:lumMod val="40000"/>
+                  <a:lumOff val="60000"/>
+                </a:schemeClr>
+              </a:buClr>
+              <a:buSzPct val="80000"/>
+              <a:buFont typeface="Wingdings 3" charset="2"/>
+              <a:buChar char=""/>
+              <a:defRPr sz="2000" b="0" i="0" kern="1200">
+                <a:solidFill>
+                  <a:schemeClr val="tx1"/>
+                </a:solidFill>
+                <a:latin typeface="+mj-lt"/>
+                <a:ea typeface="+mj-ea"/>
+                <a:cs typeface="+mj-cs"/>
+              </a:defRPr>
+            </a:lvl1pPr>
+            <a:lvl2pPr marL="742950" indent="-285750" algn="l" defTabSz="457200" rtl="0" eaLnBrk="1" latinLnBrk="0" hangingPunct="1">
+              <a:spcBef>
+                <a:spcPts val="1000"/>
+              </a:spcBef>
+              <a:spcAft>
+                <a:spcPts val="0"/>
+              </a:spcAft>
+              <a:buClr>
+                <a:schemeClr val="bg2">
+                  <a:lumMod val="40000"/>
+                  <a:lumOff val="60000"/>
+                </a:schemeClr>
+              </a:buClr>
+              <a:buSzPct val="80000"/>
+              <a:buFont typeface="Wingdings 3" charset="2"/>
+              <a:buChar char=""/>
+              <a:defRPr sz="1800" b="0" i="0" kern="1200">
+                <a:solidFill>
+                  <a:schemeClr val="tx1"/>
+                </a:solidFill>
+                <a:latin typeface="+mj-lt"/>
+                <a:ea typeface="+mj-ea"/>
+                <a:cs typeface="+mj-cs"/>
+              </a:defRPr>
+            </a:lvl2pPr>
+            <a:lvl3pPr marL="1143000" indent="-228600" algn="l" defTabSz="457200" rtl="0" eaLnBrk="1" latinLnBrk="0" hangingPunct="1">
+              <a:spcBef>
+                <a:spcPts val="1000"/>
+              </a:spcBef>
+              <a:spcAft>
+                <a:spcPts val="0"/>
+              </a:spcAft>
+              <a:buClr>
+                <a:schemeClr val="bg2">
+                  <a:lumMod val="40000"/>
+                  <a:lumOff val="60000"/>
+                </a:schemeClr>
+              </a:buClr>
+              <a:buSzPct val="80000"/>
+              <a:buFont typeface="Wingdings 3" charset="2"/>
+              <a:buChar char=""/>
+              <a:defRPr sz="1600" b="0" i="0" kern="1200">
+                <a:solidFill>
+                  <a:schemeClr val="tx1"/>
+                </a:solidFill>
+                <a:latin typeface="+mj-lt"/>
+                <a:ea typeface="+mj-ea"/>
+                <a:cs typeface="+mj-cs"/>
+              </a:defRPr>
+            </a:lvl3pPr>
+            <a:lvl4pPr marL="1600200" indent="-228600" algn="l" defTabSz="457200" rtl="0" eaLnBrk="1" latinLnBrk="0" hangingPunct="1">
+              <a:spcBef>
+                <a:spcPts val="1000"/>
+              </a:spcBef>
+              <a:spcAft>
+                <a:spcPts val="0"/>
+              </a:spcAft>
+              <a:buClr>
+                <a:schemeClr val="bg2">
+                  <a:lumMod val="40000"/>
+                  <a:lumOff val="60000"/>
+                </a:schemeClr>
+              </a:buClr>
+              <a:buSzPct val="80000"/>
+              <a:buFont typeface="Wingdings 3" charset="2"/>
+              <a:buChar char=""/>
+              <a:defRPr sz="1400" b="0" i="0" kern="1200">
+                <a:solidFill>
+                  <a:schemeClr val="tx1"/>
+                </a:solidFill>
+                <a:latin typeface="+mj-lt"/>
+                <a:ea typeface="+mj-ea"/>
+                <a:cs typeface="+mj-cs"/>
+              </a:defRPr>
+            </a:lvl4pPr>
+            <a:lvl5pPr marL="2057400" indent="-228600" algn="l" defTabSz="457200" rtl="0" eaLnBrk="1" latinLnBrk="0" hangingPunct="1">
+              <a:spcBef>
+                <a:spcPts val="1000"/>
+              </a:spcBef>
+              <a:spcAft>
+                <a:spcPts val="0"/>
+              </a:spcAft>
+              <a:buClr>
+                <a:schemeClr val="bg2">
+                  <a:lumMod val="40000"/>
+                  <a:lumOff val="60000"/>
+                </a:schemeClr>
+              </a:buClr>
+              <a:buSzPct val="80000"/>
+              <a:buFont typeface="Wingdings 3" charset="2"/>
+              <a:buChar char=""/>
+              <a:defRPr sz="1400" b="0" i="0" kern="1200">
+                <a:solidFill>
+                  <a:schemeClr val="tx1"/>
+                </a:solidFill>
+                <a:latin typeface="+mj-lt"/>
+                <a:ea typeface="+mj-ea"/>
+                <a:cs typeface="+mj-cs"/>
+              </a:defRPr>
+            </a:lvl5pPr>
+            <a:lvl6pPr marL="2506000" indent="-228600" algn="l" defTabSz="457200" rtl="0" eaLnBrk="1" latinLnBrk="0" hangingPunct="1">
+              <a:spcBef>
+                <a:spcPts val="1000"/>
+              </a:spcBef>
+              <a:spcAft>
+                <a:spcPts val="0"/>
+              </a:spcAft>
+              <a:buClr>
+                <a:schemeClr val="bg2">
+                  <a:lumMod val="40000"/>
+                  <a:lumOff val="60000"/>
+                </a:schemeClr>
+              </a:buClr>
+              <a:buSzPct val="80000"/>
+              <a:buFont typeface="Wingdings 3" charset="2"/>
+              <a:buChar char=""/>
+              <a:defRPr sz="1400" b="0" i="0" kern="1200">
+                <a:solidFill>
+                  <a:schemeClr val="tx1"/>
+                </a:solidFill>
+                <a:latin typeface="+mj-lt"/>
+                <a:ea typeface="+mj-ea"/>
+                <a:cs typeface="+mj-cs"/>
+              </a:defRPr>
+            </a:lvl6pPr>
+            <a:lvl7pPr marL="2971800" indent="-228600" algn="l" defTabSz="457200" rtl="0" eaLnBrk="1" latinLnBrk="0" hangingPunct="1">
+              <a:spcBef>
+                <a:spcPts val="1000"/>
+              </a:spcBef>
+              <a:spcAft>
+                <a:spcPts val="0"/>
+              </a:spcAft>
+              <a:buClr>
+                <a:schemeClr val="bg2">
+                  <a:lumMod val="40000"/>
+                  <a:lumOff val="60000"/>
+                </a:schemeClr>
+              </a:buClr>
+              <a:buSzPct val="80000"/>
+              <a:buFont typeface="Wingdings 3" charset="2"/>
+              <a:buChar char=""/>
+              <a:defRPr sz="1400" b="0" i="0" kern="1200">
+                <a:solidFill>
+                  <a:schemeClr val="tx1"/>
+                </a:solidFill>
+                <a:latin typeface="+mj-lt"/>
+                <a:ea typeface="+mj-ea"/>
+                <a:cs typeface="+mj-cs"/>
+              </a:defRPr>
+            </a:lvl7pPr>
+            <a:lvl8pPr marL="3429000" indent="-228600" algn="l" defTabSz="457200" rtl="0" eaLnBrk="1" latinLnBrk="0" hangingPunct="1">
+              <a:spcBef>
+                <a:spcPts val="1000"/>
+              </a:spcBef>
+              <a:spcAft>
+                <a:spcPts val="0"/>
+              </a:spcAft>
+              <a:buClr>
+                <a:schemeClr val="bg2">
+                  <a:lumMod val="40000"/>
+                  <a:lumOff val="60000"/>
+                </a:schemeClr>
+              </a:buClr>
+              <a:buSzPct val="80000"/>
+              <a:buFont typeface="Wingdings 3" charset="2"/>
+              <a:buChar char=""/>
+              <a:defRPr sz="1400" b="0" i="0" kern="1200">
+                <a:solidFill>
+                  <a:schemeClr val="tx1"/>
+                </a:solidFill>
+                <a:latin typeface="+mj-lt"/>
+                <a:ea typeface="+mj-ea"/>
+                <a:cs typeface="+mj-cs"/>
+              </a:defRPr>
+            </a:lvl8pPr>
+            <a:lvl9pPr marL="3886200" indent="-228600" algn="l" defTabSz="457200" rtl="0" eaLnBrk="1" latinLnBrk="0" hangingPunct="1">
+              <a:spcBef>
+                <a:spcPts val="1000"/>
+              </a:spcBef>
+              <a:spcAft>
+                <a:spcPts val="0"/>
+              </a:spcAft>
+              <a:buClr>
+                <a:schemeClr val="bg2">
+                  <a:lumMod val="40000"/>
+                  <a:lumOff val="60000"/>
+                </a:schemeClr>
+              </a:buClr>
+              <a:buSzPct val="80000"/>
+              <a:buFont typeface="Wingdings 3" charset="2"/>
+              <a:buChar char=""/>
+              <a:defRPr sz="1400" b="0" i="0" kern="1200">
+                <a:solidFill>
+                  <a:schemeClr val="tx1"/>
+                </a:solidFill>
+                <a:latin typeface="+mj-lt"/>
+                <a:ea typeface="+mj-ea"/>
+                <a:cs typeface="+mj-cs"/>
+              </a:defRPr>
+            </a:lvl9pPr>
+          </a:lstStyle>
+          <a:p>
+            <a:pPr marL="0" indent="0">
+              <a:buFont typeface="Wingdings 3" charset="2"/>
+              <a:buNone/>
+            </a:pPr>
+            <a:r>
+              <a:rPr lang="eu-ES" sz="1800" b="1" dirty="0"/>
+              <a:t>Baimenak:</a:t>
+            </a:r>
+          </a:p>
+          <a:p>
+            <a:pPr marL="0" indent="0">
+              <a:buFont typeface="Wingdings 3" charset="2"/>
+              <a:buNone/>
+            </a:pPr>
+            <a:r>
+              <a:rPr lang="eu-ES" sz="1800" b="1" dirty="0"/>
+              <a:t>Sortu diren enpresako karpetetan, aurretik sortu ditugun taldeentzako lan egiteko beharko dituzten baimenak ezarri dizkiegu. Honi esker:</a:t>
+            </a:r>
+          </a:p>
+          <a:p>
+            <a:pPr>
+              <a:buFontTx/>
+              <a:buChar char="-"/>
+            </a:pPr>
+            <a:r>
+              <a:rPr lang="eu-ES" sz="1800" b="1" dirty="0"/>
+              <a:t>Bakoitzak bere lan eremua izango du.</a:t>
+            </a:r>
+          </a:p>
+          <a:p>
+            <a:pPr>
+              <a:buFontTx/>
+              <a:buChar char="-"/>
+            </a:pPr>
+            <a:r>
+              <a:rPr lang="eu-ES" sz="1800" b="1" dirty="0"/>
+              <a:t>Informazio bakoitza behar duen langileak bakarrik ikusiko du.</a:t>
+            </a:r>
+          </a:p>
+          <a:p>
+            <a:pPr>
+              <a:buFontTx/>
+              <a:buChar char="-"/>
+            </a:pPr>
+            <a:r>
+              <a:rPr lang="eu-ES" sz="1800" b="1" dirty="0"/>
+              <a:t>Informazioa nahi gabe ezabatzea saihestuko dugu.</a:t>
+            </a:r>
+          </a:p>
+        </p:txBody>
+      </p:sp>
+    </p:spTree>
+    <p:extLst>
+      <p:ext uri="{BB962C8B-B14F-4D97-AF65-F5344CB8AC3E}">
+        <p14:creationId xmlns:p14="http://schemas.microsoft.com/office/powerpoint/2010/main" val="2450932125"/>
+      </p:ext>
+    </p:extLst>
+  </p:cSld>
+  <p:clrMapOvr>
+    <a:masterClrMapping/>
+  </p:clrMapOvr>
+</p:sld>
+</file>
+
+<file path=ppt/slides/slide16.xml><?xml version="1.0" encoding="utf-8"?>
 <p:sld xmlns:a="http://schemas.openxmlformats.org/drawingml/2006/main" xmlns:r="http://schemas.openxmlformats.org/officeDocument/2006/relationships" xmlns:p="http://schemas.openxmlformats.org/presentationml/2006/main">
   <p:cSld>
     <p:spTree>
@@ -7691,10 +7719,9 @@
           <a:lstStyle/>
           <a:p>
             <a:r>
-              <a:rPr lang="eu-ES" sz="3200" dirty="0"/>
+              <a:rPr lang="eu-ES" sz="3200" noProof="0" dirty="0"/>
               <a:t>SISTEMA ERAGILEAK EZARTZEA</a:t>
             </a:r>
-            <a:endParaRPr lang="eu-ES" sz="3200" noProof="0" dirty="0"/>
           </a:p>
         </p:txBody>
       </p:sp>
@@ -7731,7 +7758,7 @@
               <a:buChar char="-"/>
             </a:pPr>
             <a:r>
-              <a:rPr lang="eu-ES" sz="1800" b="1" dirty="0"/>
+              <a:rPr lang="eu-ES" sz="1800" b="1" noProof="0" dirty="0"/>
               <a:t>ISS ADMINSITRATZAILETIK KONFIGURATU </a:t>
             </a:r>
           </a:p>
@@ -7741,7 +7768,7 @@
               <a:buChar char="-"/>
             </a:pPr>
             <a:r>
-              <a:rPr lang="eu-ES" sz="1800" b="1" dirty="0"/>
+              <a:rPr lang="eu-ES" sz="1800" b="1" noProof="0" dirty="0"/>
               <a:t>ZERBITZARIKO ERABILTZAILEEN BAIMENAK MUGATU + KANPOKO ERABILTZAILEEI BAIMENAK EMAN (IUSR)</a:t>
             </a:r>
           </a:p>
@@ -7751,7 +7778,7 @@
               <a:buChar char="-"/>
             </a:pPr>
             <a:r>
-              <a:rPr lang="eu-ES" sz="1800" b="1" dirty="0"/>
+              <a:rPr lang="eu-ES" sz="1800" b="1" noProof="0" dirty="0"/>
               <a:t>FIREWALL SALBUESPENA JARRI (8080 PORTUA)</a:t>
             </a:r>
           </a:p>
@@ -7786,16 +7813,8 @@
           <a:lstStyle/>
           <a:p>
             <a:r>
-              <a:rPr lang="es-ES" sz="2000" dirty="0"/>
-              <a:t>8. Web </a:t>
-            </a:r>
-            <a:r>
-              <a:rPr lang="es-ES" sz="2000" dirty="0" err="1"/>
-              <a:t>Zerbitzaria</a:t>
-            </a:r>
-            <a:r>
-              <a:rPr lang="es-ES" sz="2000" dirty="0"/>
-              <a:t> (IIS)</a:t>
+              <a:rPr lang="eu-ES" sz="2000" noProof="0" dirty="0"/>
+              <a:t>8. Web Zerbitzaria (IIS)</a:t>
             </a:r>
           </a:p>
         </p:txBody>
@@ -7849,7 +7868,7 @@
 </p:sld>
 </file>
 
-<file path=ppt/slides/slide16.xml><?xml version="1.0" encoding="utf-8"?>
+<file path=ppt/slides/slide17.xml><?xml version="1.0" encoding="utf-8"?>
 <p:sld xmlns:a="http://schemas.openxmlformats.org/drawingml/2006/main" xmlns:r="http://schemas.openxmlformats.org/officeDocument/2006/relationships" xmlns:p="http://schemas.openxmlformats.org/presentationml/2006/main">
   <p:cSld>
     <p:spTree>
@@ -7899,10 +7918,9 @@
           <a:lstStyle/>
           <a:p>
             <a:r>
-              <a:rPr lang="eu-ES" sz="3200" dirty="0"/>
+              <a:rPr lang="eu-ES" sz="3200" noProof="0" dirty="0"/>
               <a:t>SISTEMA ERAGILEAK EZARTZEA</a:t>
             </a:r>
-            <a:endParaRPr lang="eu-ES" sz="3200" noProof="0" dirty="0"/>
           </a:p>
         </p:txBody>
       </p:sp>
@@ -7924,22 +7942,146 @@
         </p:nvSpPr>
         <p:spPr>
           <a:xfrm>
-            <a:off x="1195583" y="3045377"/>
-            <a:ext cx="2314533" cy="2003323"/>
+            <a:off x="1154953" y="3077496"/>
+            <a:ext cx="10563798" cy="3062747"/>
           </a:xfrm>
         </p:spPr>
         <p:txBody>
           <a:bodyPr>
-            <a:normAutofit/>
+            <a:normAutofit fontScale="85000" lnSpcReduction="20000"/>
           </a:bodyPr>
           <a:lstStyle/>
           <a:p>
+            <a:pPr>
+              <a:buFont typeface="Arial" panose="020B0604020202020204" pitchFamily="34" charset="0"/>
+              <a:buChar char="•"/>
+            </a:pPr>
+            <a:r>
+              <a:rPr lang="eu-ES" noProof="0" dirty="0"/>
+              <a:t>100 GB-ko bolumen finkoa</a:t>
+            </a:r>
+          </a:p>
+          <a:p>
+            <a:pPr>
+              <a:buFont typeface="Arial" panose="020B0604020202020204" pitchFamily="34" charset="0"/>
+              <a:buChar char="•"/>
+            </a:pPr>
+            <a:r>
+              <a:rPr lang="eu-ES" noProof="0" dirty="0"/>
+              <a:t>Bolumen honetarako sarbidea </a:t>
+            </a:r>
+            <a:r>
+              <a:rPr lang="eu-ES" b="1" noProof="0" dirty="0"/>
+              <a:t>zerbitzariko administratzaileak bakarrik</a:t>
+            </a:r>
+            <a:r>
+              <a:rPr lang="eu-ES" noProof="0" dirty="0"/>
+              <a:t> izango du.</a:t>
+            </a:r>
+            <a:endParaRPr lang="eu-ES" b="1" noProof="0" dirty="0"/>
+          </a:p>
+          <a:p>
+            <a:pPr>
+              <a:buFont typeface="Arial" panose="020B0604020202020204" pitchFamily="34" charset="0"/>
+              <a:buChar char="•"/>
+            </a:pPr>
+            <a:r>
+              <a:rPr lang="eu-ES" b="1" noProof="0" dirty="0"/>
+              <a:t>Kopiatuko diren elementuak:</a:t>
+            </a:r>
+            <a:br>
+              <a:rPr lang="eu-ES" noProof="0" dirty="0"/>
+            </a:br>
+            <a:endParaRPr lang="eu-ES" noProof="0" dirty="0"/>
+          </a:p>
+          <a:p>
             <a:pPr marL="0" indent="0">
               <a:buNone/>
             </a:pPr>
             <a:r>
-              <a:rPr lang="eu-ES" sz="1400" b="1" noProof="0" dirty="0"/>
-              <a:t>Emandako Espezifikazioak:</a:t>
+              <a:rPr lang="eu-ES" noProof="0" dirty="0"/>
+              <a:t>		`C:` Diskoa (Zerbitzariaren sistema eragilea eta konfigurazioak).</a:t>
+            </a:r>
+          </a:p>
+          <a:p>
+            <a:pPr marL="0" indent="0">
+              <a:buNone/>
+            </a:pPr>
+            <a:r>
+              <a:rPr lang="eu-ES" noProof="0" dirty="0"/>
+              <a:t>		`E:` Diskoa (Enpresako fitxategi guztiak eta web orria gordetzen diren bolumena).</a:t>
+            </a:r>
+            <a:br>
+              <a:rPr lang="eu-ES" noProof="0" dirty="0"/>
+            </a:br>
+            <a:endParaRPr lang="eu-ES" noProof="0" dirty="0"/>
+          </a:p>
+          <a:p>
+            <a:pPr>
+              <a:buFont typeface="Arial" panose="020B0604020202020204" pitchFamily="34" charset="0"/>
+              <a:buChar char="•"/>
+            </a:pPr>
+            <a:r>
+              <a:rPr lang="eu-ES" b="1" noProof="0" dirty="0"/>
+              <a:t>Maiztasuna: </a:t>
+            </a:r>
+            <a:r>
+              <a:rPr lang="eu-ES" noProof="0" dirty="0"/>
+              <a:t>Kopiak </a:t>
+            </a:r>
+            <a:r>
+              <a:rPr lang="eu-ES" b="1" noProof="0" dirty="0"/>
+              <a:t>egunero</a:t>
+            </a:r>
+            <a:r>
+              <a:rPr lang="eu-ES" noProof="0" dirty="0"/>
+              <a:t> egingo dira automatikoki. Goizeko </a:t>
+            </a:r>
+            <a:r>
+              <a:rPr lang="eu-ES" b="1" noProof="0" dirty="0"/>
+              <a:t>03:00</a:t>
+            </a:r>
+            <a:r>
+              <a:rPr lang="eu-ES" noProof="0" dirty="0"/>
+              <a:t> </a:t>
+            </a:r>
+            <a:r>
+              <a:rPr lang="eu-ES" noProof="0" dirty="0" err="1"/>
+              <a:t>tan</a:t>
+            </a:r>
+            <a:r>
+              <a:rPr lang="eu-ES" noProof="0" dirty="0"/>
+              <a:t> egingo dira kopiak,</a:t>
+            </a:r>
+          </a:p>
+          <a:p>
+            <a:pPr>
+              <a:buFont typeface="Arial" panose="020B0604020202020204" pitchFamily="34" charset="0"/>
+              <a:buChar char="•"/>
+            </a:pPr>
+            <a:r>
+              <a:rPr lang="eu-ES" b="1" noProof="0" dirty="0"/>
+              <a:t>Mantentze-lana: </a:t>
+            </a:r>
+            <a:r>
+              <a:rPr lang="eu-ES" noProof="0" dirty="0"/>
+              <a:t>Informatikariak </a:t>
+            </a:r>
+            <a:r>
+              <a:rPr lang="eu-ES" b="1" noProof="0" dirty="0"/>
+              <a:t>egunero </a:t>
+            </a:r>
+            <a:r>
+              <a:rPr lang="eu-ES" b="1" noProof="0" dirty="0" err="1"/>
+              <a:t>errebisatu</a:t>
+            </a:r>
+            <a:r>
+              <a:rPr lang="eu-ES" b="1" noProof="0" dirty="0"/>
+              <a:t> eta egiaztatuko du</a:t>
+            </a:r>
+            <a:r>
+              <a:rPr lang="eu-ES" noProof="0" dirty="0"/>
+              <a:t> kopiak zuzen eta egitura egokiarekin egin direla.</a:t>
             </a:r>
           </a:p>
           <a:p>
@@ -7947,42 +8089,7 @@
               <a:buFontTx/>
               <a:buChar char="-"/>
             </a:pPr>
-            <a:r>
-              <a:rPr lang="eu-ES" sz="1400" b="1" dirty="0"/>
-              <a:t>4gb</a:t>
-            </a:r>
-          </a:p>
-          <a:p>
-            <a:pPr>
-              <a:buFontTx/>
-              <a:buChar char="-"/>
-            </a:pPr>
-            <a:r>
-              <a:rPr lang="eu-ES" sz="1400" b="1" dirty="0"/>
-              <a:t>2 </a:t>
-            </a:r>
-            <a:r>
-              <a:rPr lang="eu-ES" sz="1400" b="1" dirty="0" err="1"/>
-              <a:t>cpu</a:t>
-            </a:r>
-            <a:endParaRPr lang="eu-ES" sz="1400" b="1" dirty="0"/>
-          </a:p>
-          <a:p>
-            <a:pPr>
-              <a:buFontTx/>
-              <a:buChar char="-"/>
-            </a:pPr>
-            <a:r>
-              <a:rPr lang="eu-ES" sz="1400" b="1" dirty="0"/>
-              <a:t>50gb sistema eragile</a:t>
-            </a:r>
-          </a:p>
-          <a:p>
-            <a:pPr>
-              <a:buFontTx/>
-              <a:buChar char="-"/>
-            </a:pPr>
-            <a:endParaRPr lang="eu-ES" sz="1400" b="1" dirty="0"/>
+            <a:endParaRPr lang="eu-ES" sz="1400" b="1" noProof="0" dirty="0"/>
           </a:p>
         </p:txBody>
       </p:sp>
@@ -8015,20 +8122,48 @@
           <a:lstStyle/>
           <a:p>
             <a:r>
-              <a:rPr lang="es-ES" sz="2000" dirty="0"/>
-              <a:t>9. </a:t>
-            </a:r>
-            <a:r>
-              <a:rPr lang="es-ES" sz="2000" dirty="0" err="1"/>
-              <a:t>Segurtasun</a:t>
-            </a:r>
-            <a:r>
-              <a:rPr lang="es-ES" sz="2000" dirty="0"/>
-              <a:t> Kopiak</a:t>
-            </a:r>
-          </a:p>
-        </p:txBody>
-      </p:sp>
+              <a:rPr lang="eu-ES" sz="2000" noProof="0" dirty="0"/>
+              <a:t>9. Segurtasun Kopiak</a:t>
+            </a:r>
+          </a:p>
+        </p:txBody>
+      </p:sp>
+      <p:pic>
+        <p:nvPicPr>
+          <p:cNvPr id="6" name="Imagen 5">
+            <a:extLst>
+              <a:ext uri="{FF2B5EF4-FFF2-40B4-BE49-F238E27FC236}">
+                <a16:creationId xmlns:a16="http://schemas.microsoft.com/office/drawing/2014/main" id="{2611135C-0CFA-3F35-CD39-C5F030386F26}"/>
+              </a:ext>
+            </a:extLst>
+          </p:cNvPr>
+          <p:cNvPicPr>
+            <a:picLocks noChangeAspect="1"/>
+          </p:cNvPicPr>
+          <p:nvPr/>
+        </p:nvPicPr>
+        <p:blipFill>
+          <a:blip r:embed="rId2">
+            <a:extLst>
+              <a:ext uri="{28A0092B-C50C-407E-A947-70E740481C1C}">
+                <a14:useLocalDpi xmlns:a14="http://schemas.microsoft.com/office/drawing/2010/main" val="0"/>
+              </a:ext>
+            </a:extLst>
+          </a:blip>
+          <a:stretch>
+            <a:fillRect/>
+          </a:stretch>
+        </p:blipFill>
+        <p:spPr>
+          <a:xfrm>
+            <a:off x="8416413" y="2039075"/>
+            <a:ext cx="3052609" cy="1005127"/>
+          </a:xfrm>
+          <a:prstGeom prst="rect">
+            <a:avLst/>
+          </a:prstGeom>
+        </p:spPr>
+      </p:pic>
     </p:spTree>
     <p:extLst>
       <p:ext uri="{BB962C8B-B14F-4D97-AF65-F5344CB8AC3E}">
@@ -8782,10 +8917,9 @@
           <a:lstStyle/>
           <a:p>
             <a:r>
-              <a:rPr lang="eu-ES" dirty="0"/>
+              <a:rPr lang="eu-ES" noProof="0" dirty="0"/>
               <a:t>Sistema Eragileak Ezartzea</a:t>
             </a:r>
-            <a:endParaRPr lang="eu-ES" noProof="0" dirty="0"/>
           </a:p>
         </p:txBody>
       </p:sp>
@@ -8852,10 +8986,9 @@
           <a:lstStyle/>
           <a:p>
             <a:r>
-              <a:rPr lang="eu-ES" sz="3200" dirty="0"/>
+              <a:rPr lang="eu-ES" sz="3200" noProof="0" dirty="0"/>
               <a:t>SISTEMA ERAGILEAK EZARTZEA</a:t>
             </a:r>
-            <a:endParaRPr lang="eu-ES" sz="3200" noProof="0" dirty="0"/>
           </a:p>
         </p:txBody>
       </p:sp>
@@ -8892,32 +9025,16 @@
               <a:buChar char="•"/>
             </a:pPr>
             <a:r>
-              <a:rPr lang="es-ES" dirty="0"/>
-              <a:t>Windows Server-en </a:t>
-            </a:r>
-            <a:r>
-              <a:rPr lang="es-ES" dirty="0" err="1"/>
-              <a:t>Instalazioa</a:t>
-            </a:r>
-            <a:r>
-              <a:rPr lang="es-ES" dirty="0"/>
-              <a:t> eta </a:t>
-            </a:r>
-            <a:r>
-              <a:rPr lang="es-ES" dirty="0" err="1"/>
-              <a:t>Oinarrizko</a:t>
-            </a:r>
-            <a:r>
-              <a:rPr lang="es-ES" dirty="0"/>
-              <a:t> </a:t>
-            </a:r>
-            <a:r>
-              <a:rPr lang="es-ES" dirty="0" err="1"/>
-              <a:t>Konfigurazioa</a:t>
-            </a:r>
-            <a:r>
-              <a:rPr lang="es-ES" dirty="0"/>
-              <a:t> (VirtualBox)</a:t>
+              <a:rPr lang="eu-ES" noProof="0" dirty="0"/>
+              <a:t>Windows Server-en Instalazioa eta Oinarrizko Konfigurazioa (</a:t>
+            </a:r>
+            <a:r>
+              <a:rPr lang="eu-ES" noProof="0" dirty="0" err="1"/>
+              <a:t>VirtualBox</a:t>
+            </a:r>
+            <a:r>
+              <a:rPr lang="eu-ES" noProof="0" dirty="0"/>
+              <a:t>)</a:t>
             </a:r>
           </a:p>
           <a:p>
@@ -8926,14 +9043,9 @@
               <a:buChar char="•"/>
             </a:pPr>
             <a:r>
-              <a:rPr lang="es-ES" dirty="0"/>
-              <a:t>IP-a </a:t>
-            </a:r>
-            <a:r>
-              <a:rPr lang="es-ES" dirty="0" err="1"/>
-              <a:t>konfiguratu</a:t>
-            </a:r>
-            <a:endParaRPr lang="es-ES" dirty="0"/>
+              <a:rPr lang="eu-ES" noProof="0" dirty="0"/>
+              <a:t>IP-a konfiguratu</a:t>
+            </a:r>
           </a:p>
           <a:p>
             <a:pPr>
@@ -8941,28 +9053,8 @@
               <a:buChar char="•"/>
             </a:pPr>
             <a:r>
-              <a:rPr lang="es-ES" dirty="0" err="1"/>
-              <a:t>Segurtasun</a:t>
-            </a:r>
-            <a:r>
-              <a:rPr lang="es-ES" dirty="0"/>
-              <a:t> </a:t>
-            </a:r>
-            <a:r>
-              <a:rPr lang="es-ES" dirty="0" err="1"/>
-              <a:t>politikak</a:t>
-            </a:r>
-            <a:r>
-              <a:rPr lang="es-ES" dirty="0"/>
-              <a:t> (</a:t>
-            </a:r>
-            <a:r>
-              <a:rPr lang="es-ES" dirty="0" err="1"/>
-              <a:t>Pasahitzak</a:t>
-            </a:r>
-            <a:r>
-              <a:rPr lang="es-ES" dirty="0"/>
-              <a:t>)</a:t>
+              <a:rPr lang="eu-ES" noProof="0" dirty="0"/>
+              <a:t>Segurtasun politikak (Pasahitzak)</a:t>
             </a:r>
           </a:p>
           <a:p>
@@ -8971,18 +9063,9 @@
               <a:buChar char="•"/>
             </a:pPr>
             <a:r>
-              <a:rPr lang="es-ES" dirty="0" err="1"/>
-              <a:t>Diskoak</a:t>
-            </a:r>
-            <a:r>
-              <a:rPr lang="es-ES" dirty="0"/>
-              <a:t> eta </a:t>
-            </a:r>
-            <a:r>
-              <a:rPr lang="es-ES" dirty="0" err="1"/>
-              <a:t>bolumenak</a:t>
-            </a:r>
-            <a:endParaRPr lang="es-ES" dirty="0"/>
+              <a:rPr lang="eu-ES" noProof="0" dirty="0"/>
+              <a:t>Diskoak eta bolumenak</a:t>
+            </a:r>
           </a:p>
           <a:p>
             <a:pPr>
@@ -8990,7 +9073,7 @@
               <a:buChar char="•"/>
             </a:pPr>
             <a:r>
-              <a:rPr lang="es-ES" dirty="0"/>
+              <a:rPr lang="eu-ES" noProof="0" dirty="0"/>
               <a:t>RAID</a:t>
             </a:r>
           </a:p>
@@ -9000,60 +9083,16 @@
               <a:buChar char="•"/>
             </a:pPr>
             <a:r>
-              <a:rPr lang="es-ES" dirty="0" err="1"/>
-              <a:t>Sistemaren</a:t>
-            </a:r>
-            <a:r>
-              <a:rPr lang="es-ES" dirty="0"/>
-              <a:t> Rol-</a:t>
-            </a:r>
-            <a:r>
-              <a:rPr lang="es-ES" dirty="0" err="1"/>
-              <a:t>ak</a:t>
-            </a:r>
-            <a:r>
-              <a:rPr lang="es-ES" dirty="0"/>
-              <a:t> eta </a:t>
-            </a:r>
-            <a:r>
-              <a:rPr lang="es-ES" dirty="0" err="1"/>
-              <a:t>ezaugarriak</a:t>
-            </a:r>
-            <a:r>
-              <a:rPr lang="es-ES" dirty="0"/>
-              <a:t> </a:t>
-            </a:r>
-            <a:r>
-              <a:rPr lang="es-ES" dirty="0" err="1"/>
-              <a:t>gehitu</a:t>
-            </a:r>
-            <a:r>
-              <a:rPr lang="es-ES" dirty="0"/>
-              <a:t> (IIS, </a:t>
-            </a:r>
-            <a:r>
-              <a:rPr lang="es-ES" dirty="0" err="1"/>
+              <a:rPr lang="eu-ES" noProof="0" dirty="0"/>
+              <a:t>Sistemaren Rol-ak eta ezaugarriak gehitu (IIS, </a:t>
+            </a:r>
+            <a:r>
+              <a:rPr lang="eu-ES" noProof="0" dirty="0" err="1"/>
               <a:t>iSCSI</a:t>
             </a:r>
             <a:r>
-              <a:rPr lang="es-ES" dirty="0"/>
-              <a:t> eta </a:t>
-            </a:r>
-            <a:r>
-              <a:rPr lang="es-ES" dirty="0" err="1"/>
-              <a:t>Segurtasun</a:t>
-            </a:r>
-            <a:r>
-              <a:rPr lang="es-ES" dirty="0"/>
-              <a:t> </a:t>
-            </a:r>
-            <a:r>
-              <a:rPr lang="es-ES" dirty="0" err="1"/>
-              <a:t>kopiak</a:t>
-            </a:r>
-            <a:r>
-              <a:rPr lang="es-ES" dirty="0"/>
-              <a:t>)</a:t>
+              <a:rPr lang="eu-ES" noProof="0" dirty="0"/>
+              <a:t> eta Segurtasun kopiak)</a:t>
             </a:r>
           </a:p>
           <a:p>
@@ -9062,36 +9101,8 @@
               <a:buChar char="•"/>
             </a:pPr>
             <a:r>
-              <a:rPr lang="es-ES" dirty="0" err="1"/>
-              <a:t>Erabiltzaileak</a:t>
-            </a:r>
-            <a:r>
-              <a:rPr lang="es-ES" dirty="0"/>
-              <a:t> eta </a:t>
-            </a:r>
-            <a:r>
-              <a:rPr lang="es-ES" dirty="0" err="1"/>
-              <a:t>taldeak</a:t>
-            </a:r>
-            <a:r>
-              <a:rPr lang="es-ES" dirty="0"/>
-              <a:t> (</a:t>
-            </a:r>
-            <a:r>
-              <a:rPr lang="es-ES" dirty="0" err="1"/>
-              <a:t>Baimenak</a:t>
-            </a:r>
-            <a:r>
-              <a:rPr lang="es-ES" dirty="0"/>
-              <a:t> + </a:t>
-            </a:r>
-            <a:r>
-              <a:rPr lang="es-ES" dirty="0" err="1"/>
-              <a:t>Kuotak</a:t>
-            </a:r>
-            <a:r>
-              <a:rPr lang="es-ES" dirty="0"/>
-              <a:t>)</a:t>
+              <a:rPr lang="eu-ES" noProof="0" dirty="0"/>
+              <a:t>Erabiltzaileak eta taldeak (Baimenak + Kuotak)</a:t>
             </a:r>
           </a:p>
           <a:p>
@@ -9100,16 +9111,8 @@
               <a:buChar char="•"/>
             </a:pPr>
             <a:r>
-              <a:rPr lang="es-ES" dirty="0"/>
-              <a:t>Web </a:t>
-            </a:r>
-            <a:r>
-              <a:rPr lang="es-ES" dirty="0" err="1"/>
-              <a:t>Zerbitzaria</a:t>
-            </a:r>
-            <a:r>
-              <a:rPr lang="es-ES" dirty="0"/>
-              <a:t> (IIS)</a:t>
+              <a:rPr lang="eu-ES" noProof="0" dirty="0"/>
+              <a:t>Web Zerbitzaria (IIS)</a:t>
             </a:r>
           </a:p>
           <a:p>
@@ -9118,12 +9121,8 @@
               <a:buChar char="•"/>
             </a:pPr>
             <a:r>
-              <a:rPr lang="es-ES" dirty="0" err="1"/>
-              <a:t>Segurtasun</a:t>
-            </a:r>
-            <a:r>
-              <a:rPr lang="es-ES" dirty="0"/>
-              <a:t> Kopiak</a:t>
+              <a:rPr lang="eu-ES" noProof="0" dirty="0"/>
+              <a:t>Segurtasun Kopiak</a:t>
             </a:r>
           </a:p>
         </p:txBody>
@@ -9191,10 +9190,9 @@
           <a:lstStyle/>
           <a:p>
             <a:r>
-              <a:rPr lang="eu-ES" sz="3200" dirty="0"/>
+              <a:rPr lang="eu-ES" sz="3200" noProof="0" dirty="0"/>
               <a:t>SISTEMA ERAGILEAK EZARTZEA</a:t>
             </a:r>
-            <a:endParaRPr lang="eu-ES" sz="3200" noProof="0" dirty="0"/>
           </a:p>
         </p:txBody>
       </p:sp>
@@ -9240,7 +9238,7 @@
               <a:buChar char="-"/>
             </a:pPr>
             <a:r>
-              <a:rPr lang="eu-ES" sz="1400" b="1" dirty="0"/>
+              <a:rPr lang="eu-ES" sz="1400" b="1" noProof="0" dirty="0"/>
               <a:t>4GB RAM</a:t>
             </a:r>
           </a:p>
@@ -9250,7 +9248,7 @@
               <a:buChar char="-"/>
             </a:pPr>
             <a:r>
-              <a:rPr lang="eu-ES" sz="1400" b="1" dirty="0"/>
+              <a:rPr lang="eu-ES" sz="1400" b="1" noProof="0" dirty="0"/>
               <a:t>4 CPU</a:t>
             </a:r>
           </a:p>
@@ -9260,7 +9258,7 @@
               <a:buChar char="-"/>
             </a:pPr>
             <a:r>
-              <a:rPr lang="eu-ES" sz="1400" b="1" dirty="0"/>
+              <a:rPr lang="eu-ES" sz="1400" b="1" noProof="0" dirty="0"/>
               <a:t>50GB Diskoa (Sistema eragilea)</a:t>
             </a:r>
           </a:p>
@@ -9269,7 +9267,7 @@
               <a:buFontTx/>
               <a:buChar char="-"/>
             </a:pPr>
-            <a:endParaRPr lang="eu-ES" sz="1400" b="1" dirty="0"/>
+            <a:endParaRPr lang="eu-ES" sz="1400" b="1" noProof="0" dirty="0"/>
           </a:p>
         </p:txBody>
       </p:sp>
@@ -9302,32 +9300,16 @@
           <a:lstStyle/>
           <a:p>
             <a:r>
-              <a:rPr lang="es-ES" sz="2000" dirty="0"/>
-              <a:t>1. Windows Server-en </a:t>
-            </a:r>
-            <a:r>
-              <a:rPr lang="es-ES" sz="2000" dirty="0" err="1"/>
-              <a:t>Instalazioa</a:t>
-            </a:r>
-            <a:r>
-              <a:rPr lang="es-ES" sz="2000" dirty="0"/>
-              <a:t> eta </a:t>
-            </a:r>
-            <a:r>
-              <a:rPr lang="es-ES" sz="2000" dirty="0" err="1"/>
-              <a:t>Oinarrizko</a:t>
-            </a:r>
-            <a:r>
-              <a:rPr lang="es-ES" sz="2000" dirty="0"/>
-              <a:t> </a:t>
-            </a:r>
-            <a:r>
-              <a:rPr lang="es-ES" sz="2000" dirty="0" err="1"/>
-              <a:t>Konfigurazioa</a:t>
-            </a:r>
-            <a:r>
-              <a:rPr lang="es-ES" sz="2000" dirty="0"/>
-              <a:t> (VirtualBox)</a:t>
+              <a:rPr lang="eu-ES" sz="2000" noProof="0" dirty="0"/>
+              <a:t>1. Windows Server-en Instalazioa eta Oinarrizko Konfigurazioa (</a:t>
+            </a:r>
+            <a:r>
+              <a:rPr lang="eu-ES" sz="2000" noProof="0" dirty="0" err="1"/>
+              <a:t>VirtualBox</a:t>
+            </a:r>
+            <a:r>
+              <a:rPr lang="eu-ES" sz="2000" noProof="0" dirty="0"/>
+              <a:t>)</a:t>
             </a:r>
           </a:p>
         </p:txBody>
@@ -9592,7 +9574,7 @@
               <a:buNone/>
             </a:pPr>
             <a:r>
-              <a:rPr lang="eu-ES" sz="1400" b="1" dirty="0"/>
+              <a:rPr lang="eu-ES" sz="1400" b="1" noProof="0" dirty="0"/>
               <a:t>Instalatu duguna:</a:t>
             </a:r>
           </a:p>
@@ -9602,12 +9584,8 @@
               <a:buChar char="-"/>
             </a:pPr>
             <a:r>
-              <a:rPr lang="de-DE" sz="1400" b="1" dirty="0"/>
-              <a:t>Windows Server 2025 x64 es-ES</a:t>
-            </a:r>
-            <a:r>
-              <a:rPr lang="eu-ES" sz="1400" b="1" dirty="0"/>
-              <a:t>4 CPU</a:t>
+              <a:rPr lang="eu-ES" sz="1400" b="1" noProof="0" dirty="0"/>
+              <a:t>Windows Server 2025 x64 es-ES4 CPU</a:t>
             </a:r>
           </a:p>
           <a:p>
@@ -9616,57 +9594,57 @@
               <a:buChar char="-"/>
             </a:pPr>
             <a:r>
-              <a:rPr lang="eu-ES" sz="1400" b="1" dirty="0" err="1"/>
+              <a:rPr lang="eu-ES" sz="1400" b="1" noProof="0" dirty="0" err="1"/>
               <a:t>Standard</a:t>
             </a:r>
             <a:r>
-              <a:rPr lang="eu-ES" sz="1400" b="1" dirty="0"/>
+              <a:rPr lang="eu-ES" sz="1400" b="1" noProof="0" dirty="0"/>
               <a:t> </a:t>
             </a:r>
             <a:r>
-              <a:rPr lang="eu-ES" sz="1400" b="1" dirty="0" err="1"/>
+              <a:rPr lang="eu-ES" sz="1400" b="1" noProof="0" dirty="0" err="1"/>
               <a:t>Edition</a:t>
             </a:r>
             <a:r>
-              <a:rPr lang="eu-ES" sz="1400" b="1" dirty="0"/>
+              <a:rPr lang="eu-ES" sz="1400" b="1" noProof="0" dirty="0"/>
               <a:t> (</a:t>
             </a:r>
             <a:r>
-              <a:rPr lang="eu-ES" sz="1400" b="1" dirty="0" err="1"/>
+              <a:rPr lang="eu-ES" sz="1400" b="1" noProof="0" dirty="0" err="1"/>
               <a:t>Desktop</a:t>
             </a:r>
             <a:r>
-              <a:rPr lang="eu-ES" sz="1400" b="1" dirty="0"/>
+              <a:rPr lang="eu-ES" sz="1400" b="1" noProof="0" dirty="0"/>
               <a:t> </a:t>
             </a:r>
             <a:r>
-              <a:rPr lang="eu-ES" sz="1400" b="1" dirty="0" err="1"/>
+              <a:rPr lang="eu-ES" sz="1400" b="1" noProof="0" dirty="0" err="1"/>
               <a:t>Experience</a:t>
             </a:r>
             <a:r>
-              <a:rPr lang="eu-ES" sz="1400" b="1" dirty="0"/>
+              <a:rPr lang="eu-ES" sz="1400" b="1" noProof="0" dirty="0"/>
               <a:t>) / </a:t>
             </a:r>
             <a:r>
-              <a:rPr lang="eu-ES" sz="1400" b="1" dirty="0" err="1"/>
+              <a:rPr lang="eu-ES" sz="1400" b="1" noProof="0" dirty="0" err="1"/>
               <a:t>Experiencia</a:t>
             </a:r>
             <a:r>
-              <a:rPr lang="eu-ES" sz="1400" b="1" dirty="0"/>
+              <a:rPr lang="eu-ES" sz="1400" b="1" noProof="0" dirty="0"/>
               <a:t> de </a:t>
             </a:r>
             <a:r>
-              <a:rPr lang="eu-ES" sz="1400" b="1" dirty="0" err="1"/>
+              <a:rPr lang="eu-ES" sz="1400" b="1" noProof="0" dirty="0" err="1"/>
               <a:t>escritorio</a:t>
             </a:r>
-            <a:endParaRPr lang="eu-ES" sz="1400" b="1" dirty="0"/>
+            <a:endParaRPr lang="eu-ES" sz="1400" b="1" noProof="0" dirty="0"/>
           </a:p>
           <a:p>
             <a:pPr>
               <a:buFontTx/>
               <a:buChar char="-"/>
             </a:pPr>
-            <a:endParaRPr lang="eu-ES" sz="1400" b="1" dirty="0"/>
+            <a:endParaRPr lang="eu-ES" sz="1400" b="1" noProof="0" dirty="0"/>
           </a:p>
         </p:txBody>
       </p:sp>
@@ -9930,7 +9908,7 @@
               <a:buNone/>
             </a:pPr>
             <a:r>
-              <a:rPr lang="eu-ES" sz="1400" b="1" dirty="0"/>
+              <a:rPr lang="eu-ES" sz="1400" b="1" noProof="0" dirty="0"/>
               <a:t>Hasierako konfigurazioa:</a:t>
             </a:r>
           </a:p>
@@ -9940,7 +9918,7 @@
               <a:buChar char="-"/>
             </a:pPr>
             <a:r>
-              <a:rPr lang="eu-ES" sz="1400" b="1" dirty="0"/>
+              <a:rPr lang="eu-ES" sz="1400" b="1" noProof="0" dirty="0"/>
               <a:t>Administratzaileari Pasahitza Ezarri</a:t>
             </a:r>
           </a:p>
@@ -9950,7 +9928,7 @@
               <a:buChar char="-"/>
             </a:pPr>
             <a:r>
-              <a:rPr lang="eu-ES" sz="1400" b="1" dirty="0"/>
+              <a:rPr lang="eu-ES" sz="1400" b="1" noProof="0" dirty="0"/>
               <a:t>Ekipoaren izena aldatu</a:t>
             </a:r>
           </a:p>
@@ -9960,7 +9938,7 @@
               <a:buChar char="-"/>
             </a:pPr>
             <a:r>
-              <a:rPr lang="eu-ES" sz="1400" b="1" dirty="0"/>
+              <a:rPr lang="eu-ES" sz="1400" b="1" noProof="0" dirty="0"/>
               <a:t>Sistema eguneratu</a:t>
             </a:r>
           </a:p>
@@ -10101,10 +10079,9 @@
           <a:lstStyle/>
           <a:p>
             <a:r>
-              <a:rPr lang="eu-ES" sz="3200" dirty="0"/>
+              <a:rPr lang="eu-ES" sz="3200" noProof="0" dirty="0"/>
               <a:t>SISTEMA ERAGILEAK EZARTZEA</a:t>
             </a:r>
-            <a:endParaRPr lang="eu-ES" sz="3200" noProof="0" dirty="0"/>
           </a:p>
         </p:txBody>
       </p:sp>
@@ -10149,7 +10126,7 @@
               <a:buNone/>
             </a:pPr>
             <a:r>
-              <a:rPr lang="eu-ES" sz="1400" b="1" dirty="0"/>
+              <a:rPr lang="eu-ES" sz="1400" b="1" noProof="0" dirty="0"/>
               <a:t>ZERTARAKO? Zerbitzariak sarera konektatu bakoitzean IP ezberdina izan ez dezan.</a:t>
             </a:r>
           </a:p>
@@ -10158,7 +10135,7 @@
               <a:buFontTx/>
               <a:buChar char="-"/>
             </a:pPr>
-            <a:endParaRPr lang="eu-ES" sz="1400" b="1" dirty="0"/>
+            <a:endParaRPr lang="eu-ES" sz="1400" b="1" noProof="0" dirty="0"/>
           </a:p>
         </p:txBody>
       </p:sp>
@@ -10191,17 +10168,12 @@
           <a:lstStyle/>
           <a:p>
             <a:r>
-              <a:rPr lang="es-ES" sz="2000" dirty="0"/>
-              <a:t>2. IP-a </a:t>
-            </a:r>
-            <a:r>
-              <a:rPr lang="es-ES" sz="2000" dirty="0" err="1"/>
-              <a:t>konfiguratu</a:t>
-            </a:r>
-            <a:endParaRPr lang="es-ES" sz="2000" dirty="0"/>
-          </a:p>
-          <a:p>
-            <a:endParaRPr lang="es-ES" sz="2000" dirty="0"/>
+              <a:rPr lang="eu-ES" sz="2000" noProof="0" dirty="0"/>
+              <a:t>2. IP-a konfiguratu</a:t>
+            </a:r>
+          </a:p>
+          <a:p>
+            <a:endParaRPr lang="eu-ES" sz="2000" noProof="0" dirty="0"/>
           </a:p>
         </p:txBody>
       </p:sp>

--- a/Aurkezpena/1.Erronka Aurkezpena.pptx
+++ b/Aurkezpena/1.Erronka Aurkezpena.pptx
@@ -20,8 +20,9 @@
     <p:sldId id="269" r:id="rId14"/>
     <p:sldId id="270" r:id="rId15"/>
     <p:sldId id="273" r:id="rId16"/>
-    <p:sldId id="271" r:id="rId17"/>
-    <p:sldId id="272" r:id="rId18"/>
+    <p:sldId id="275" r:id="rId17"/>
+    <p:sldId id="271" r:id="rId18"/>
+    <p:sldId id="272" r:id="rId19"/>
   </p:sldIdLst>
   <p:sldSz cx="12192000" cy="6858000"/>
   <p:notesSz cx="6858000" cy="9144000"/>
@@ -7677,6 +7678,857 @@
         <p:cNvPr id="1" name="">
           <a:extLst>
             <a:ext uri="{FF2B5EF4-FFF2-40B4-BE49-F238E27FC236}">
+              <a16:creationId xmlns:a16="http://schemas.microsoft.com/office/drawing/2014/main" id="{7665408D-7BCB-C84A-B1ED-46D3A8916021}"/>
+            </a:ext>
+          </a:extLst>
+        </p:cNvPr>
+        <p:cNvGrpSpPr/>
+        <p:nvPr/>
+      </p:nvGrpSpPr>
+      <p:grpSpPr>
+        <a:xfrm>
+          <a:off x="0" y="0"/>
+          <a:ext cx="0" cy="0"/>
+          <a:chOff x="0" y="0"/>
+          <a:chExt cx="0" cy="0"/>
+        </a:xfrm>
+      </p:grpSpPr>
+      <p:sp>
+        <p:nvSpPr>
+          <p:cNvPr id="2" name="Título 1">
+            <a:extLst>
+              <a:ext uri="{FF2B5EF4-FFF2-40B4-BE49-F238E27FC236}">
+                <a16:creationId xmlns:a16="http://schemas.microsoft.com/office/drawing/2014/main" id="{8EC5EB22-66B6-CF10-D7CA-40B5B6818D02}"/>
+              </a:ext>
+            </a:extLst>
+          </p:cNvPr>
+          <p:cNvSpPr>
+            <a:spLocks noGrp="1"/>
+          </p:cNvSpPr>
+          <p:nvPr>
+            <p:ph type="title"/>
+          </p:nvPr>
+        </p:nvSpPr>
+        <p:spPr>
+          <a:xfrm>
+            <a:off x="1154953" y="1007807"/>
+            <a:ext cx="7261460" cy="997974"/>
+          </a:xfrm>
+        </p:spPr>
+        <p:txBody>
+          <a:bodyPr/>
+          <a:lstStyle/>
+          <a:p>
+            <a:r>
+              <a:rPr lang="eu-ES" sz="3200" noProof="0" dirty="0"/>
+              <a:t>SISTEMA ERAGILEAK EZARTZEA</a:t>
+            </a:r>
+          </a:p>
+        </p:txBody>
+      </p:sp>
+      <p:sp>
+        <p:nvSpPr>
+          <p:cNvPr id="3" name="Marcador de contenido 2">
+            <a:extLst>
+              <a:ext uri="{FF2B5EF4-FFF2-40B4-BE49-F238E27FC236}">
+                <a16:creationId xmlns:a16="http://schemas.microsoft.com/office/drawing/2014/main" id="{B1BA8CA4-516A-ADB3-74D5-C5F446145278}"/>
+              </a:ext>
+            </a:extLst>
+          </p:cNvPr>
+          <p:cNvSpPr>
+            <a:spLocks noGrp="1"/>
+          </p:cNvSpPr>
+          <p:nvPr>
+            <p:ph idx="1"/>
+          </p:nvPr>
+        </p:nvSpPr>
+        <p:spPr>
+          <a:xfrm>
+            <a:off x="1195583" y="3045377"/>
+            <a:ext cx="2690942" cy="1841255"/>
+          </a:xfrm>
+        </p:spPr>
+        <p:txBody>
+          <a:bodyPr>
+            <a:normAutofit/>
+          </a:bodyPr>
+          <a:lstStyle/>
+          <a:p>
+            <a:pPr marL="0" indent="0">
+              <a:buNone/>
+            </a:pPr>
+            <a:r>
+              <a:rPr lang="eu-ES" sz="1400" b="1" noProof="0" dirty="0"/>
+              <a:t>Kuotak</a:t>
+            </a:r>
+          </a:p>
+          <a:p>
+            <a:pPr>
+              <a:buFontTx/>
+              <a:buChar char="-"/>
+            </a:pPr>
+            <a:endParaRPr lang="eu-ES" sz="1400" b="1" noProof="0" dirty="0"/>
+          </a:p>
+        </p:txBody>
+      </p:sp>
+      <p:sp>
+        <p:nvSpPr>
+          <p:cNvPr id="4" name="Marcador de texto 3">
+            <a:extLst>
+              <a:ext uri="{FF2B5EF4-FFF2-40B4-BE49-F238E27FC236}">
+                <a16:creationId xmlns:a16="http://schemas.microsoft.com/office/drawing/2014/main" id="{7F05DF31-D459-ED70-8DF1-63E64C5B648D}"/>
+              </a:ext>
+            </a:extLst>
+          </p:cNvPr>
+          <p:cNvSpPr>
+            <a:spLocks noGrp="1"/>
+          </p:cNvSpPr>
+          <p:nvPr>
+            <p:ph type="body" sz="half" idx="2"/>
+          </p:nvPr>
+        </p:nvSpPr>
+        <p:spPr>
+          <a:xfrm>
+            <a:off x="1195583" y="2445774"/>
+            <a:ext cx="9669062" cy="727423"/>
+          </a:xfrm>
+        </p:spPr>
+        <p:txBody>
+          <a:bodyPr>
+            <a:normAutofit/>
+          </a:bodyPr>
+          <a:lstStyle/>
+          <a:p>
+            <a:r>
+              <a:rPr lang="eu-ES" sz="2000" dirty="0"/>
+              <a:t>7. Erabiltzaileak eta taldeak (Baimenak + Kuotak)</a:t>
+            </a:r>
+          </a:p>
+        </p:txBody>
+      </p:sp>
+      <p:sp>
+        <p:nvSpPr>
+          <p:cNvPr id="5" name="Marcador de contenido 2">
+            <a:extLst>
+              <a:ext uri="{FF2B5EF4-FFF2-40B4-BE49-F238E27FC236}">
+                <a16:creationId xmlns:a16="http://schemas.microsoft.com/office/drawing/2014/main" id="{4BF31421-BC31-495A-4442-F8FB7D5ABA3F}"/>
+              </a:ext>
+            </a:extLst>
+          </p:cNvPr>
+          <p:cNvSpPr txBox="1">
+            <a:spLocks/>
+          </p:cNvSpPr>
+          <p:nvPr/>
+        </p:nvSpPr>
+        <p:spPr>
+          <a:xfrm>
+            <a:off x="4491522" y="3045377"/>
+            <a:ext cx="3077184" cy="1910082"/>
+          </a:xfrm>
+          <a:prstGeom prst="rect">
+            <a:avLst/>
+          </a:prstGeom>
+        </p:spPr>
+        <p:txBody>
+          <a:bodyPr vert="horz" lIns="91440" tIns="45720" rIns="91440" bIns="45720" rtlCol="0" anchor="ctr">
+            <a:normAutofit/>
+          </a:bodyPr>
+          <a:lstStyle>
+            <a:lvl1pPr marL="342900" indent="-342900" algn="l" defTabSz="457200" rtl="0" eaLnBrk="1" latinLnBrk="0" hangingPunct="1">
+              <a:spcBef>
+                <a:spcPts val="1000"/>
+              </a:spcBef>
+              <a:spcAft>
+                <a:spcPts val="0"/>
+              </a:spcAft>
+              <a:buClr>
+                <a:schemeClr val="bg2">
+                  <a:lumMod val="40000"/>
+                  <a:lumOff val="60000"/>
+                </a:schemeClr>
+              </a:buClr>
+              <a:buSzPct val="80000"/>
+              <a:buFont typeface="Wingdings 3" charset="2"/>
+              <a:buChar char=""/>
+              <a:defRPr sz="2000" b="0" i="0" kern="1200">
+                <a:solidFill>
+                  <a:schemeClr val="tx1"/>
+                </a:solidFill>
+                <a:latin typeface="+mj-lt"/>
+                <a:ea typeface="+mj-ea"/>
+                <a:cs typeface="+mj-cs"/>
+              </a:defRPr>
+            </a:lvl1pPr>
+            <a:lvl2pPr marL="742950" indent="-285750" algn="l" defTabSz="457200" rtl="0" eaLnBrk="1" latinLnBrk="0" hangingPunct="1">
+              <a:spcBef>
+                <a:spcPts val="1000"/>
+              </a:spcBef>
+              <a:spcAft>
+                <a:spcPts val="0"/>
+              </a:spcAft>
+              <a:buClr>
+                <a:schemeClr val="bg2">
+                  <a:lumMod val="40000"/>
+                  <a:lumOff val="60000"/>
+                </a:schemeClr>
+              </a:buClr>
+              <a:buSzPct val="80000"/>
+              <a:buFont typeface="Wingdings 3" charset="2"/>
+              <a:buChar char=""/>
+              <a:defRPr sz="1800" b="0" i="0" kern="1200">
+                <a:solidFill>
+                  <a:schemeClr val="tx1"/>
+                </a:solidFill>
+                <a:latin typeface="+mj-lt"/>
+                <a:ea typeface="+mj-ea"/>
+                <a:cs typeface="+mj-cs"/>
+              </a:defRPr>
+            </a:lvl2pPr>
+            <a:lvl3pPr marL="1143000" indent="-228600" algn="l" defTabSz="457200" rtl="0" eaLnBrk="1" latinLnBrk="0" hangingPunct="1">
+              <a:spcBef>
+                <a:spcPts val="1000"/>
+              </a:spcBef>
+              <a:spcAft>
+                <a:spcPts val="0"/>
+              </a:spcAft>
+              <a:buClr>
+                <a:schemeClr val="bg2">
+                  <a:lumMod val="40000"/>
+                  <a:lumOff val="60000"/>
+                </a:schemeClr>
+              </a:buClr>
+              <a:buSzPct val="80000"/>
+              <a:buFont typeface="Wingdings 3" charset="2"/>
+              <a:buChar char=""/>
+              <a:defRPr sz="1600" b="0" i="0" kern="1200">
+                <a:solidFill>
+                  <a:schemeClr val="tx1"/>
+                </a:solidFill>
+                <a:latin typeface="+mj-lt"/>
+                <a:ea typeface="+mj-ea"/>
+                <a:cs typeface="+mj-cs"/>
+              </a:defRPr>
+            </a:lvl3pPr>
+            <a:lvl4pPr marL="1600200" indent="-228600" algn="l" defTabSz="457200" rtl="0" eaLnBrk="1" latinLnBrk="0" hangingPunct="1">
+              <a:spcBef>
+                <a:spcPts val="1000"/>
+              </a:spcBef>
+              <a:spcAft>
+                <a:spcPts val="0"/>
+              </a:spcAft>
+              <a:buClr>
+                <a:schemeClr val="bg2">
+                  <a:lumMod val="40000"/>
+                  <a:lumOff val="60000"/>
+                </a:schemeClr>
+              </a:buClr>
+              <a:buSzPct val="80000"/>
+              <a:buFont typeface="Wingdings 3" charset="2"/>
+              <a:buChar char=""/>
+              <a:defRPr sz="1400" b="0" i="0" kern="1200">
+                <a:solidFill>
+                  <a:schemeClr val="tx1"/>
+                </a:solidFill>
+                <a:latin typeface="+mj-lt"/>
+                <a:ea typeface="+mj-ea"/>
+                <a:cs typeface="+mj-cs"/>
+              </a:defRPr>
+            </a:lvl4pPr>
+            <a:lvl5pPr marL="2057400" indent="-228600" algn="l" defTabSz="457200" rtl="0" eaLnBrk="1" latinLnBrk="0" hangingPunct="1">
+              <a:spcBef>
+                <a:spcPts val="1000"/>
+              </a:spcBef>
+              <a:spcAft>
+                <a:spcPts val="0"/>
+              </a:spcAft>
+              <a:buClr>
+                <a:schemeClr val="bg2">
+                  <a:lumMod val="40000"/>
+                  <a:lumOff val="60000"/>
+                </a:schemeClr>
+              </a:buClr>
+              <a:buSzPct val="80000"/>
+              <a:buFont typeface="Wingdings 3" charset="2"/>
+              <a:buChar char=""/>
+              <a:defRPr sz="1400" b="0" i="0" kern="1200">
+                <a:solidFill>
+                  <a:schemeClr val="tx1"/>
+                </a:solidFill>
+                <a:latin typeface="+mj-lt"/>
+                <a:ea typeface="+mj-ea"/>
+                <a:cs typeface="+mj-cs"/>
+              </a:defRPr>
+            </a:lvl5pPr>
+            <a:lvl6pPr marL="2506000" indent="-228600" algn="l" defTabSz="457200" rtl="0" eaLnBrk="1" latinLnBrk="0" hangingPunct="1">
+              <a:spcBef>
+                <a:spcPts val="1000"/>
+              </a:spcBef>
+              <a:spcAft>
+                <a:spcPts val="0"/>
+              </a:spcAft>
+              <a:buClr>
+                <a:schemeClr val="bg2">
+                  <a:lumMod val="40000"/>
+                  <a:lumOff val="60000"/>
+                </a:schemeClr>
+              </a:buClr>
+              <a:buSzPct val="80000"/>
+              <a:buFont typeface="Wingdings 3" charset="2"/>
+              <a:buChar char=""/>
+              <a:defRPr sz="1400" b="0" i="0" kern="1200">
+                <a:solidFill>
+                  <a:schemeClr val="tx1"/>
+                </a:solidFill>
+                <a:latin typeface="+mj-lt"/>
+                <a:ea typeface="+mj-ea"/>
+                <a:cs typeface="+mj-cs"/>
+              </a:defRPr>
+            </a:lvl6pPr>
+            <a:lvl7pPr marL="2971800" indent="-228600" algn="l" defTabSz="457200" rtl="0" eaLnBrk="1" latinLnBrk="0" hangingPunct="1">
+              <a:spcBef>
+                <a:spcPts val="1000"/>
+              </a:spcBef>
+              <a:spcAft>
+                <a:spcPts val="0"/>
+              </a:spcAft>
+              <a:buClr>
+                <a:schemeClr val="bg2">
+                  <a:lumMod val="40000"/>
+                  <a:lumOff val="60000"/>
+                </a:schemeClr>
+              </a:buClr>
+              <a:buSzPct val="80000"/>
+              <a:buFont typeface="Wingdings 3" charset="2"/>
+              <a:buChar char=""/>
+              <a:defRPr sz="1400" b="0" i="0" kern="1200">
+                <a:solidFill>
+                  <a:schemeClr val="tx1"/>
+                </a:solidFill>
+                <a:latin typeface="+mj-lt"/>
+                <a:ea typeface="+mj-ea"/>
+                <a:cs typeface="+mj-cs"/>
+              </a:defRPr>
+            </a:lvl7pPr>
+            <a:lvl8pPr marL="3429000" indent="-228600" algn="l" defTabSz="457200" rtl="0" eaLnBrk="1" latinLnBrk="0" hangingPunct="1">
+              <a:spcBef>
+                <a:spcPts val="1000"/>
+              </a:spcBef>
+              <a:spcAft>
+                <a:spcPts val="0"/>
+              </a:spcAft>
+              <a:buClr>
+                <a:schemeClr val="bg2">
+                  <a:lumMod val="40000"/>
+                  <a:lumOff val="60000"/>
+                </a:schemeClr>
+              </a:buClr>
+              <a:buSzPct val="80000"/>
+              <a:buFont typeface="Wingdings 3" charset="2"/>
+              <a:buChar char=""/>
+              <a:defRPr sz="1400" b="0" i="0" kern="1200">
+                <a:solidFill>
+                  <a:schemeClr val="tx1"/>
+                </a:solidFill>
+                <a:latin typeface="+mj-lt"/>
+                <a:ea typeface="+mj-ea"/>
+                <a:cs typeface="+mj-cs"/>
+              </a:defRPr>
+            </a:lvl8pPr>
+            <a:lvl9pPr marL="3886200" indent="-228600" algn="l" defTabSz="457200" rtl="0" eaLnBrk="1" latinLnBrk="0" hangingPunct="1">
+              <a:spcBef>
+                <a:spcPts val="1000"/>
+              </a:spcBef>
+              <a:spcAft>
+                <a:spcPts val="0"/>
+              </a:spcAft>
+              <a:buClr>
+                <a:schemeClr val="bg2">
+                  <a:lumMod val="40000"/>
+                  <a:lumOff val="60000"/>
+                </a:schemeClr>
+              </a:buClr>
+              <a:buSzPct val="80000"/>
+              <a:buFont typeface="Wingdings 3" charset="2"/>
+              <a:buChar char=""/>
+              <a:defRPr sz="1400" b="0" i="0" kern="1200">
+                <a:solidFill>
+                  <a:schemeClr val="tx1"/>
+                </a:solidFill>
+                <a:latin typeface="+mj-lt"/>
+                <a:ea typeface="+mj-ea"/>
+                <a:cs typeface="+mj-cs"/>
+              </a:defRPr>
+            </a:lvl9pPr>
+          </a:lstStyle>
+          <a:p>
+            <a:pPr marL="0" indent="0">
+              <a:buFont typeface="Wingdings 3" charset="2"/>
+              <a:buNone/>
+            </a:pPr>
+            <a:r>
+              <a:rPr lang="eu-ES" sz="1400" b="1" noProof="0" dirty="0"/>
+              <a:t>Instalatu duguna:</a:t>
+            </a:r>
+          </a:p>
+          <a:p>
+            <a:pPr>
+              <a:buFontTx/>
+              <a:buChar char="-"/>
+            </a:pPr>
+            <a:r>
+              <a:rPr lang="eu-ES" sz="1400" b="1" noProof="0" dirty="0"/>
+              <a:t>Windows Server 2025 x64 es-ES4 CPU</a:t>
+            </a:r>
+          </a:p>
+          <a:p>
+            <a:pPr>
+              <a:buFontTx/>
+              <a:buChar char="-"/>
+            </a:pPr>
+            <a:r>
+              <a:rPr lang="eu-ES" sz="1400" b="1" noProof="0" dirty="0" err="1"/>
+              <a:t>Standard</a:t>
+            </a:r>
+            <a:r>
+              <a:rPr lang="eu-ES" sz="1400" b="1" noProof="0" dirty="0"/>
+              <a:t> </a:t>
+            </a:r>
+            <a:r>
+              <a:rPr lang="eu-ES" sz="1400" b="1" noProof="0" dirty="0" err="1"/>
+              <a:t>Edition</a:t>
+            </a:r>
+            <a:r>
+              <a:rPr lang="eu-ES" sz="1400" b="1" noProof="0" dirty="0"/>
+              <a:t> (</a:t>
+            </a:r>
+            <a:r>
+              <a:rPr lang="eu-ES" sz="1400" b="1" noProof="0" dirty="0" err="1"/>
+              <a:t>Desktop</a:t>
+            </a:r>
+            <a:r>
+              <a:rPr lang="eu-ES" sz="1400" b="1" noProof="0" dirty="0"/>
+              <a:t> </a:t>
+            </a:r>
+            <a:r>
+              <a:rPr lang="eu-ES" sz="1400" b="1" noProof="0" dirty="0" err="1"/>
+              <a:t>Experience</a:t>
+            </a:r>
+            <a:r>
+              <a:rPr lang="eu-ES" sz="1400" b="1" noProof="0" dirty="0"/>
+              <a:t>) / </a:t>
+            </a:r>
+            <a:r>
+              <a:rPr lang="eu-ES" sz="1400" b="1" noProof="0" dirty="0" err="1"/>
+              <a:t>Experiencia</a:t>
+            </a:r>
+            <a:r>
+              <a:rPr lang="eu-ES" sz="1400" b="1" noProof="0" dirty="0"/>
+              <a:t> de </a:t>
+            </a:r>
+            <a:r>
+              <a:rPr lang="eu-ES" sz="1400" b="1" noProof="0" dirty="0" err="1"/>
+              <a:t>escritorio</a:t>
+            </a:r>
+            <a:endParaRPr lang="eu-ES" sz="1400" b="1" noProof="0" dirty="0"/>
+          </a:p>
+          <a:p>
+            <a:pPr>
+              <a:buFontTx/>
+              <a:buChar char="-"/>
+            </a:pPr>
+            <a:endParaRPr lang="eu-ES" sz="1400" b="1" noProof="0" dirty="0"/>
+          </a:p>
+        </p:txBody>
+      </p:sp>
+      <p:sp>
+        <p:nvSpPr>
+          <p:cNvPr id="7" name="Marcador de contenido 2">
+            <a:extLst>
+              <a:ext uri="{FF2B5EF4-FFF2-40B4-BE49-F238E27FC236}">
+                <a16:creationId xmlns:a16="http://schemas.microsoft.com/office/drawing/2014/main" id="{2A039A09-3BF1-9090-9D3C-0D7FD89887CC}"/>
+              </a:ext>
+            </a:extLst>
+          </p:cNvPr>
+          <p:cNvSpPr txBox="1">
+            <a:spLocks/>
+          </p:cNvSpPr>
+          <p:nvPr/>
+        </p:nvSpPr>
+        <p:spPr>
+          <a:xfrm>
+            <a:off x="8173703" y="3045376"/>
+            <a:ext cx="3077184" cy="1575786"/>
+          </a:xfrm>
+          <a:prstGeom prst="rect">
+            <a:avLst/>
+          </a:prstGeom>
+        </p:spPr>
+        <p:txBody>
+          <a:bodyPr vert="horz" lIns="91440" tIns="45720" rIns="91440" bIns="45720" rtlCol="0" anchor="ctr">
+            <a:normAutofit/>
+          </a:bodyPr>
+          <a:lstStyle>
+            <a:lvl1pPr marL="342900" indent="-342900" algn="l" defTabSz="457200" rtl="0" eaLnBrk="1" latinLnBrk="0" hangingPunct="1">
+              <a:spcBef>
+                <a:spcPts val="1000"/>
+              </a:spcBef>
+              <a:spcAft>
+                <a:spcPts val="0"/>
+              </a:spcAft>
+              <a:buClr>
+                <a:schemeClr val="bg2">
+                  <a:lumMod val="40000"/>
+                  <a:lumOff val="60000"/>
+                </a:schemeClr>
+              </a:buClr>
+              <a:buSzPct val="80000"/>
+              <a:buFont typeface="Wingdings 3" charset="2"/>
+              <a:buChar char=""/>
+              <a:defRPr sz="2000" b="0" i="0" kern="1200">
+                <a:solidFill>
+                  <a:schemeClr val="tx1"/>
+                </a:solidFill>
+                <a:latin typeface="+mj-lt"/>
+                <a:ea typeface="+mj-ea"/>
+                <a:cs typeface="+mj-cs"/>
+              </a:defRPr>
+            </a:lvl1pPr>
+            <a:lvl2pPr marL="742950" indent="-285750" algn="l" defTabSz="457200" rtl="0" eaLnBrk="1" latinLnBrk="0" hangingPunct="1">
+              <a:spcBef>
+                <a:spcPts val="1000"/>
+              </a:spcBef>
+              <a:spcAft>
+                <a:spcPts val="0"/>
+              </a:spcAft>
+              <a:buClr>
+                <a:schemeClr val="bg2">
+                  <a:lumMod val="40000"/>
+                  <a:lumOff val="60000"/>
+                </a:schemeClr>
+              </a:buClr>
+              <a:buSzPct val="80000"/>
+              <a:buFont typeface="Wingdings 3" charset="2"/>
+              <a:buChar char=""/>
+              <a:defRPr sz="1800" b="0" i="0" kern="1200">
+                <a:solidFill>
+                  <a:schemeClr val="tx1"/>
+                </a:solidFill>
+                <a:latin typeface="+mj-lt"/>
+                <a:ea typeface="+mj-ea"/>
+                <a:cs typeface="+mj-cs"/>
+              </a:defRPr>
+            </a:lvl2pPr>
+            <a:lvl3pPr marL="1143000" indent="-228600" algn="l" defTabSz="457200" rtl="0" eaLnBrk="1" latinLnBrk="0" hangingPunct="1">
+              <a:spcBef>
+                <a:spcPts val="1000"/>
+              </a:spcBef>
+              <a:spcAft>
+                <a:spcPts val="0"/>
+              </a:spcAft>
+              <a:buClr>
+                <a:schemeClr val="bg2">
+                  <a:lumMod val="40000"/>
+                  <a:lumOff val="60000"/>
+                </a:schemeClr>
+              </a:buClr>
+              <a:buSzPct val="80000"/>
+              <a:buFont typeface="Wingdings 3" charset="2"/>
+              <a:buChar char=""/>
+              <a:defRPr sz="1600" b="0" i="0" kern="1200">
+                <a:solidFill>
+                  <a:schemeClr val="tx1"/>
+                </a:solidFill>
+                <a:latin typeface="+mj-lt"/>
+                <a:ea typeface="+mj-ea"/>
+                <a:cs typeface="+mj-cs"/>
+              </a:defRPr>
+            </a:lvl3pPr>
+            <a:lvl4pPr marL="1600200" indent="-228600" algn="l" defTabSz="457200" rtl="0" eaLnBrk="1" latinLnBrk="0" hangingPunct="1">
+              <a:spcBef>
+                <a:spcPts val="1000"/>
+              </a:spcBef>
+              <a:spcAft>
+                <a:spcPts val="0"/>
+              </a:spcAft>
+              <a:buClr>
+                <a:schemeClr val="bg2">
+                  <a:lumMod val="40000"/>
+                  <a:lumOff val="60000"/>
+                </a:schemeClr>
+              </a:buClr>
+              <a:buSzPct val="80000"/>
+              <a:buFont typeface="Wingdings 3" charset="2"/>
+              <a:buChar char=""/>
+              <a:defRPr sz="1400" b="0" i="0" kern="1200">
+                <a:solidFill>
+                  <a:schemeClr val="tx1"/>
+                </a:solidFill>
+                <a:latin typeface="+mj-lt"/>
+                <a:ea typeface="+mj-ea"/>
+                <a:cs typeface="+mj-cs"/>
+              </a:defRPr>
+            </a:lvl4pPr>
+            <a:lvl5pPr marL="2057400" indent="-228600" algn="l" defTabSz="457200" rtl="0" eaLnBrk="1" latinLnBrk="0" hangingPunct="1">
+              <a:spcBef>
+                <a:spcPts val="1000"/>
+              </a:spcBef>
+              <a:spcAft>
+                <a:spcPts val="0"/>
+              </a:spcAft>
+              <a:buClr>
+                <a:schemeClr val="bg2">
+                  <a:lumMod val="40000"/>
+                  <a:lumOff val="60000"/>
+                </a:schemeClr>
+              </a:buClr>
+              <a:buSzPct val="80000"/>
+              <a:buFont typeface="Wingdings 3" charset="2"/>
+              <a:buChar char=""/>
+              <a:defRPr sz="1400" b="0" i="0" kern="1200">
+                <a:solidFill>
+                  <a:schemeClr val="tx1"/>
+                </a:solidFill>
+                <a:latin typeface="+mj-lt"/>
+                <a:ea typeface="+mj-ea"/>
+                <a:cs typeface="+mj-cs"/>
+              </a:defRPr>
+            </a:lvl5pPr>
+            <a:lvl6pPr marL="2506000" indent="-228600" algn="l" defTabSz="457200" rtl="0" eaLnBrk="1" latinLnBrk="0" hangingPunct="1">
+              <a:spcBef>
+                <a:spcPts val="1000"/>
+              </a:spcBef>
+              <a:spcAft>
+                <a:spcPts val="0"/>
+              </a:spcAft>
+              <a:buClr>
+                <a:schemeClr val="bg2">
+                  <a:lumMod val="40000"/>
+                  <a:lumOff val="60000"/>
+                </a:schemeClr>
+              </a:buClr>
+              <a:buSzPct val="80000"/>
+              <a:buFont typeface="Wingdings 3" charset="2"/>
+              <a:buChar char=""/>
+              <a:defRPr sz="1400" b="0" i="0" kern="1200">
+                <a:solidFill>
+                  <a:schemeClr val="tx1"/>
+                </a:solidFill>
+                <a:latin typeface="+mj-lt"/>
+                <a:ea typeface="+mj-ea"/>
+                <a:cs typeface="+mj-cs"/>
+              </a:defRPr>
+            </a:lvl6pPr>
+            <a:lvl7pPr marL="2971800" indent="-228600" algn="l" defTabSz="457200" rtl="0" eaLnBrk="1" latinLnBrk="0" hangingPunct="1">
+              <a:spcBef>
+                <a:spcPts val="1000"/>
+              </a:spcBef>
+              <a:spcAft>
+                <a:spcPts val="0"/>
+              </a:spcAft>
+              <a:buClr>
+                <a:schemeClr val="bg2">
+                  <a:lumMod val="40000"/>
+                  <a:lumOff val="60000"/>
+                </a:schemeClr>
+              </a:buClr>
+              <a:buSzPct val="80000"/>
+              <a:buFont typeface="Wingdings 3" charset="2"/>
+              <a:buChar char=""/>
+              <a:defRPr sz="1400" b="0" i="0" kern="1200">
+                <a:solidFill>
+                  <a:schemeClr val="tx1"/>
+                </a:solidFill>
+                <a:latin typeface="+mj-lt"/>
+                <a:ea typeface="+mj-ea"/>
+                <a:cs typeface="+mj-cs"/>
+              </a:defRPr>
+            </a:lvl7pPr>
+            <a:lvl8pPr marL="3429000" indent="-228600" algn="l" defTabSz="457200" rtl="0" eaLnBrk="1" latinLnBrk="0" hangingPunct="1">
+              <a:spcBef>
+                <a:spcPts val="1000"/>
+              </a:spcBef>
+              <a:spcAft>
+                <a:spcPts val="0"/>
+              </a:spcAft>
+              <a:buClr>
+                <a:schemeClr val="bg2">
+                  <a:lumMod val="40000"/>
+                  <a:lumOff val="60000"/>
+                </a:schemeClr>
+              </a:buClr>
+              <a:buSzPct val="80000"/>
+              <a:buFont typeface="Wingdings 3" charset="2"/>
+              <a:buChar char=""/>
+              <a:defRPr sz="1400" b="0" i="0" kern="1200">
+                <a:solidFill>
+                  <a:schemeClr val="tx1"/>
+                </a:solidFill>
+                <a:latin typeface="+mj-lt"/>
+                <a:ea typeface="+mj-ea"/>
+                <a:cs typeface="+mj-cs"/>
+              </a:defRPr>
+            </a:lvl8pPr>
+            <a:lvl9pPr marL="3886200" indent="-228600" algn="l" defTabSz="457200" rtl="0" eaLnBrk="1" latinLnBrk="0" hangingPunct="1">
+              <a:spcBef>
+                <a:spcPts val="1000"/>
+              </a:spcBef>
+              <a:spcAft>
+                <a:spcPts val="0"/>
+              </a:spcAft>
+              <a:buClr>
+                <a:schemeClr val="bg2">
+                  <a:lumMod val="40000"/>
+                  <a:lumOff val="60000"/>
+                </a:schemeClr>
+              </a:buClr>
+              <a:buSzPct val="80000"/>
+              <a:buFont typeface="Wingdings 3" charset="2"/>
+              <a:buChar char=""/>
+              <a:defRPr sz="1400" b="0" i="0" kern="1200">
+                <a:solidFill>
+                  <a:schemeClr val="tx1"/>
+                </a:solidFill>
+                <a:latin typeface="+mj-lt"/>
+                <a:ea typeface="+mj-ea"/>
+                <a:cs typeface="+mj-cs"/>
+              </a:defRPr>
+            </a:lvl9pPr>
+          </a:lstStyle>
+          <a:p>
+            <a:pPr marL="0" indent="0">
+              <a:buFont typeface="Wingdings 3" charset="2"/>
+              <a:buNone/>
+            </a:pPr>
+            <a:r>
+              <a:rPr lang="eu-ES" sz="1400" b="1" noProof="0" dirty="0"/>
+              <a:t>Hasierako konfigurazioa:</a:t>
+            </a:r>
+          </a:p>
+          <a:p>
+            <a:pPr>
+              <a:buFontTx/>
+              <a:buChar char="-"/>
+            </a:pPr>
+            <a:r>
+              <a:rPr lang="eu-ES" sz="1400" b="1" noProof="0" dirty="0"/>
+              <a:t>Administratzaileari Pasahitza Ezarri</a:t>
+            </a:r>
+          </a:p>
+          <a:p>
+            <a:pPr>
+              <a:buFontTx/>
+              <a:buChar char="-"/>
+            </a:pPr>
+            <a:r>
+              <a:rPr lang="eu-ES" sz="1400" b="1" noProof="0" dirty="0"/>
+              <a:t>Ekipoaren izena aldatu</a:t>
+            </a:r>
+          </a:p>
+          <a:p>
+            <a:pPr>
+              <a:buFontTx/>
+              <a:buChar char="-"/>
+            </a:pPr>
+            <a:r>
+              <a:rPr lang="eu-ES" sz="1400" b="1" noProof="0" dirty="0"/>
+              <a:t>Sistema eguneratu</a:t>
+            </a:r>
+          </a:p>
+        </p:txBody>
+      </p:sp>
+      <p:pic>
+        <p:nvPicPr>
+          <p:cNvPr id="9" name="Imagen 8">
+            <a:extLst>
+              <a:ext uri="{FF2B5EF4-FFF2-40B4-BE49-F238E27FC236}">
+                <a16:creationId xmlns:a16="http://schemas.microsoft.com/office/drawing/2014/main" id="{3CCCDFB3-9514-277C-AFCB-1D61B8EDE875}"/>
+              </a:ext>
+            </a:extLst>
+          </p:cNvPr>
+          <p:cNvPicPr>
+            <a:picLocks noChangeAspect="1"/>
+          </p:cNvPicPr>
+          <p:nvPr/>
+        </p:nvPicPr>
+        <p:blipFill>
+          <a:blip r:embed="rId2">
+            <a:extLst>
+              <a:ext uri="{28A0092B-C50C-407E-A947-70E740481C1C}">
+                <a14:useLocalDpi xmlns:a14="http://schemas.microsoft.com/office/drawing/2010/main" val="0"/>
+              </a:ext>
+            </a:extLst>
+          </a:blip>
+          <a:stretch>
+            <a:fillRect/>
+          </a:stretch>
+        </p:blipFill>
+        <p:spPr>
+          <a:xfrm>
+            <a:off x="3067050" y="5067908"/>
+            <a:ext cx="2035892" cy="1355475"/>
+          </a:xfrm>
+          <a:prstGeom prst="rect">
+            <a:avLst/>
+          </a:prstGeom>
+        </p:spPr>
+      </p:pic>
+      <p:pic>
+        <p:nvPicPr>
+          <p:cNvPr id="11" name="Imagen 10">
+            <a:extLst>
+              <a:ext uri="{FF2B5EF4-FFF2-40B4-BE49-F238E27FC236}">
+                <a16:creationId xmlns:a16="http://schemas.microsoft.com/office/drawing/2014/main" id="{71BDDC6D-F0A3-D047-2FDB-65C1058570EB}"/>
+              </a:ext>
+            </a:extLst>
+          </p:cNvPr>
+          <p:cNvPicPr>
+            <a:picLocks noChangeAspect="1"/>
+          </p:cNvPicPr>
+          <p:nvPr/>
+        </p:nvPicPr>
+        <p:blipFill>
+          <a:blip r:embed="rId3">
+            <a:extLst>
+              <a:ext uri="{28A0092B-C50C-407E-A947-70E740481C1C}">
+                <a14:useLocalDpi xmlns:a14="http://schemas.microsoft.com/office/drawing/2010/main" val="0"/>
+              </a:ext>
+            </a:extLst>
+          </a:blip>
+          <a:stretch>
+            <a:fillRect/>
+          </a:stretch>
+        </p:blipFill>
+        <p:spPr>
+          <a:xfrm>
+            <a:off x="7089060" y="5067907"/>
+            <a:ext cx="2202424" cy="1355475"/>
+          </a:xfrm>
+          <a:prstGeom prst="rect">
+            <a:avLst/>
+          </a:prstGeom>
+        </p:spPr>
+      </p:pic>
+    </p:spTree>
+    <p:extLst>
+      <p:ext uri="{BB962C8B-B14F-4D97-AF65-F5344CB8AC3E}">
+        <p14:creationId xmlns:p14="http://schemas.microsoft.com/office/powerpoint/2010/main" val="3480383772"/>
+      </p:ext>
+    </p:extLst>
+  </p:cSld>
+  <p:clrMapOvr>
+    <a:masterClrMapping/>
+  </p:clrMapOvr>
+</p:sld>
+</file>
+
+<file path=ppt/slides/slide17.xml><?xml version="1.0" encoding="utf-8"?>
+<p:sld xmlns:a="http://schemas.openxmlformats.org/drawingml/2006/main" xmlns:r="http://schemas.openxmlformats.org/officeDocument/2006/relationships" xmlns:p="http://schemas.openxmlformats.org/presentationml/2006/main">
+  <p:cSld>
+    <p:spTree>
+      <p:nvGrpSpPr>
+        <p:cNvPr id="1" name="">
+          <a:extLst>
+            <a:ext uri="{FF2B5EF4-FFF2-40B4-BE49-F238E27FC236}">
               <a16:creationId xmlns:a16="http://schemas.microsoft.com/office/drawing/2014/main" id="{AB6C06A1-0A11-5EBB-8B99-4692DDADDB9C}"/>
             </a:ext>
           </a:extLst>
@@ -7868,7 +8720,7 @@
 </p:sld>
 </file>
 
-<file path=ppt/slides/slide17.xml><?xml version="1.0" encoding="utf-8"?>
+<file path=ppt/slides/slide18.xml><?xml version="1.0" encoding="utf-8"?>
 <p:sld xmlns:a="http://schemas.openxmlformats.org/drawingml/2006/main" xmlns:r="http://schemas.openxmlformats.org/officeDocument/2006/relationships" xmlns:p="http://schemas.openxmlformats.org/presentationml/2006/main">
   <p:cSld>
     <p:spTree>
